--- a/10-Knowledge-Products/KP2-GIF/videos/module_5/en/decks/KP2_M5_Deck_v0.3.pptx
+++ b/10-Knowledge-Products/KP2-GIF/videos/module_5/en/decks/KP2_M5_Deck_v0.3.pptx
@@ -102,7 +102,6 @@
     <p:sldId id="2779" r:id="rId101"/>
     <p:sldId id="2780" r:id="rId102"/>
     <p:sldId id="2781" r:id="rId103"/>
-    <p:sldId id="2782" r:id="rId104"/>
   </p:sldIdLst>
   <p:sldSz cx="12192000" cy="6858000"/>
   <p:notesSz cx="6858000" cy="9144000"/>
@@ -5654,7 +5653,7 @@
           <a:lstStyle/>
           <a:p>
             <a:r>
-              <a:t>VO: A production bus needs real monitoring and alerting, and this is what that monitoring is for. A running bus is not finished — it is operating, every day. Every call leaves a trace in the logs: success or failure, fast or slow, who called whom. Reading those logs by hand does not scale past a few services. The monitoring play points Claude at the real bus logs and turns them into something a Strategist can act on — a plain-language picture of the bus's health, and a flag when something looks wrong.</a:t>
+              <a:t>VO: A running bus is not finished — it is operating, every day. Every call it carries leaves a record in the bus's operational monitoring data: which agency called which service, whether the call worked, and how long it took. Reading those records by hand does not scale past a few services. The monitoring play points Claude at that data and turns it into a plain-language picture of the bus's health, with a flag when something looks wrong.</a:t>
             </a:r>
           </a:p>
         </p:txBody>
@@ -5794,7 +5793,7 @@
           <a:lstStyle/>
           <a:p>
             <a:r>
-              <a:t>VO: The logs hold the operational truth. Which exchanges ran and which failed, and how often. Whether calls are getting slower — a sign of a service under strain. And unusual patterns — a sudden spike, an agency calling a service it never called before, a surge of activity at three in the morning. The play reads all of this and writes a plain-language health report, flagging the things that deserve a human's attention this week.</a:t>
+              <a:t>VO: The data shows three things. Which exchanges failed, and how often. Whether calls are getting slower — a sign of a service under strain. And unusual patterns — a sudden spike, an agency calling a service it never called before, a surge of activity at three in the morning. The play writes a plain-language health report and flags what deserves a human's attention this week. That is early warning: a failing service is fixed before it becomes a complaint, and a slowdown is addressed before it becomes an outage. The same reading feeds a slower loop. Each quarter, the Operating Authority tells the Steering Committee which members show sustained failures that call for a conformance re-check. Monitoring that reaches a governance table is accountability; the rest is a dashboard.</a:t>
             </a:r>
           </a:p>
         </p:txBody>
@@ -5864,13 +5863,7 @@
           <a:lstStyle/>
           <a:p>
             <a:r>
-              <a:t>VO: The value is early warning. A failing service, caught in the logs, is fixed before a citizen standing at a counter is turned away. A creeping slowdown, spotted early, is addressed before it becomes an outage. The Operating Authority's team uses this to watch a growing federation without drowning in raw logs — the AI does the reading, the team does the acting. That is what lets a small operations team keep a hundred-service bus healthy. And the same reading serves a second, slower loop. Operational health is watched daily; member compliance is reviewed quarterly — which members still meet the binding standards, whose conformance has lapsed, what breaches occurred and what was done. That review goes to the Steering Committee each quarter, to the Council each year, and, where the country's transparency policy asks for it, to citizens twice a year. Monitoring that never reaches a governance table is a dashboard; monitoring that does is accountability.</a:t>
-            </a:r>
-          </a:p>
-          <a:p/>
-          <a:p>
-            <a:r>
-              <a:t>Production cue: the pivotal slide of this video. Hold it a beat longer.</a:t>
+              <a:t>VO: Two safeguards matter here, and neither is optional. First, the AI flags and a human investigates: an anomaly is a question to look into, not a verdict to act on automatically. Second, only the traffic goes into the prompt, never the cargo. Every server on the bus keeps two records. The operational monitoring data says which service was called, whether it worked, and how fast. The message log keeps the messages themselves — and the citizen data they carried. Only the first belongs anywhere near an AI. Even then, check the request addresses: when a service looks a person up by their ID number, that number can sit in the address itself. Remove it before the data leaves the server. Monitor the traffic, never the cargo.</a:t>
             </a:r>
           </a:p>
         </p:txBody>
@@ -5940,7 +5933,13 @@
           <a:lstStyle/>
           <a:p>
             <a:r>
-              <a:t>VO: Two safeguards matter here, and neither is optional. The AI flags; a human investigates — an anomaly is a question to look into, not a verdict to act on automatically. And, critically, the logs you feed the play must carry no citizen personal data. You monitor the metadata of exchanges — which service, success or failure, how fast — not the contents of what was exchanged. A monitoring tool that ingested citizen data would itself become a data-protection risk, the very thing the framework exists to prevent. Monitor the traffic, never the cargo.</a:t>
+              <a:t>PRACTICE BOX (on-screen only — never read it, never paraphrase it, never point at it). It replaces the narrated handoff: this video ends on the recap and the Sources slide.</a:t>
+            </a:r>
+          </a:p>
+          <a:p/>
+          <a:p>
+            <a:r>
+              <a:t>VO: So monitoring is how a framework stays healthy as it grows from one exchange to hundreds. The bus records how it is doing in its monitoring data; the AI play makes that legible; the Operating Authority acts on the flags; and the messages themselves never enter the prompt. Monitoring is the difference between a federation someone is watching and one that fails silently until a citizen complains.</a:t>
             </a:r>
           </a:p>
         </p:txBody>
@@ -6010,13 +6009,7 @@
           <a:lstStyle/>
           <a:p>
             <a:r>
-              <a:t>PRACTICE BOX (on-screen only — never read it, never paraphrase it, never point at it). It replaces the narrated handoff: this video ends on the recap and the Sources slide.</a:t>
-            </a:r>
-          </a:p>
-          <a:p/>
-          <a:p>
-            <a:r>
-              <a:t>VO: So monitoring is how a framework stays healthy as it grows from one exchange to hundreds. The bus tells you how it is doing, in its logs; the AI play makes that legible; the Operating Authority acts on the flags; and citizen data never enters the prompt. Monitoring is the difference between a federation someone is watching and one that fails silently until a citizen complains.</a:t>
+              <a:t>Sources slide, held ~5 seconds at the end of the video. Links are compiled into the YouTube description per ITU convention; no URLs read aloud.</a:t>
             </a:r>
           </a:p>
         </p:txBody>
@@ -6086,7 +6079,7 @@
           <a:lstStyle/>
           <a:p>
             <a:r>
-              <a:t>Sources slide, held ~5 seconds at the end of the video. Links are compiled into the YouTube description per ITU convention; no URLs read aloud.</a:t>
+              <a:t>Title card — the cold open. The hosts name the module, the video number, the title and the single message on this slide; no scripted narration. Hold until the opener begins; the opener is narrated on the next slide.</a:t>
             </a:r>
           </a:p>
         </p:txBody>
@@ -6156,7 +6149,7 @@
           <a:lstStyle/>
           <a:p>
             <a:r>
-              <a:t>Title card — the cold open. The hosts name the module, the video number, the title and the single message on this slide; no scripted narration. Hold until the opener begins; the opener is narrated on the next slide.</a:t>
+              <a:t>VO: A mature framework produces three big documents that must agree with each other: the decree, which is the legal layer; the Governance Pack, which is the organisational layer; and the standards portfolio, which is the technical layer. The trouble is that, separately maintained, they drift apart over time — a standard updated in the portfolio but not reflected in the decree, a role the Governance Pack renames but the decree still names the old way. The consistency cross-check reads the three for contradictions before a reviewer or a member finds them for you.</a:t>
             </a:r>
           </a:p>
         </p:txBody>
@@ -6226,7 +6219,7 @@
           <a:lstStyle/>
           <a:p>
             <a:r>
-              <a:t>VO: A mature framework produces three big documents that must agree with each other: the decree, which is the legal layer; the Governance Pack, which is the organisational layer; and the standards portfolio, which is the technical layer. The trouble is that, separately maintained, they drift apart over time — a standard updated in the portfolio but not reflected in the decree, a role the Governance Pack renames but the decree still names the old way. The consistency cross-check reads the three for contradictions before a reviewer or a member finds them for you.</a:t>
+              <a:t>VO: Drift is specific and predictable. The standards portfolio adopts a new version, but the decree still references the old one. The RACI names a body the Governance Pack no longer describes. The decree authorises an exchange that no service in the catalogue implements, or a service exists that the decree never authorised. And the same term — 'member', 'service', 'authority' — is used to mean slightly different things in the three documents. Each of these is a contradiction that quietly undermines the framework's credibility the moment someone notices it.</a:t>
             </a:r>
           </a:p>
         </p:txBody>
@@ -6296,7 +6289,13 @@
           <a:lstStyle/>
           <a:p>
             <a:r>
-              <a:t>VO: Drift is specific and predictable. The standards portfolio adopts a new version, but the decree still references the old one. The RACI names a body the Governance Pack no longer describes. The decree authorises an exchange that no service in the catalogue implements, or a service exists that the decree never authorised. And the same term — 'member', 'service', 'authority' — is used to mean slightly different things in the three documents. Each of these is a contradiction that quietly undermines the framework's credibility the moment someone notices it.</a:t>
+              <a:t>VO: The play reads all three documents and reports the contradictions — where they disagree, and on what. It is the document analogue of the bus monitoring in the previous video: instead of watching the live traffic, it watches the documents for inconsistency. The value is catching drift before a Ministry of Justice reviewer, a joining member, or an auditor catches it for you — because a framework whose own three foundational documents contradict each other loses trust faster than almost anything else can cost it.</a:t>
+            </a:r>
+          </a:p>
+          <a:p/>
+          <a:p>
+            <a:r>
+              <a:t>Production cue: the pivotal slide of this video. Hold it a beat longer.</a:t>
             </a:r>
           </a:p>
         </p:txBody>
@@ -6366,13 +6365,7 @@
           <a:lstStyle/>
           <a:p>
             <a:r>
-              <a:t>VO: The play reads all three documents and reports the contradictions — where they disagree, and on what. It is the document analogue of the bus monitoring in the previous video: instead of watching the live traffic, it watches the documents for inconsistency. The value is catching drift before a Ministry of Justice reviewer, a joining member, or an auditor catches it for you — because a framework whose own three foundational documents contradict each other loses trust faster than almost anything else can cost it.</a:t>
-            </a:r>
-          </a:p>
-          <a:p/>
-          <a:p>
-            <a:r>
-              <a:t>Production cue: the pivotal slide of this video. Hold it a beat longer.</a:t>
+              <a:t>VO: The safeguard is the same shape as always. The AI flags the contradiction; a human decides which of the three documents is correct and fixes it. The play does not edit the decree on its own, because deciding whether the catalogue or the decree is right is a judgement with legal and governance consequences. The play finds the drift; a person resolves it. Run it whenever any of the three documents changes, and the framework's documents stay honest with each other as it evolves.</a:t>
             </a:r>
           </a:p>
         </p:txBody>
@@ -6442,7 +6435,13 @@
           <a:lstStyle/>
           <a:p>
             <a:r>
-              <a:t>VO: The safeguard is the same shape as always. The AI flags the contradiction; a human decides which of the three documents is correct and fixes it. The play does not edit the decree on its own, because deciding whether the catalogue or the decree is right is a judgement with legal and governance consequences. The play finds the drift; a person resolves it. Run it whenever any of the three documents changes, and the framework's documents stay honest with each other as it evolves.</a:t>
+              <a:t>PRACTICE BOX (on-screen only — never read it, never paraphrase it, never point at it). It replaces the narrated handoff: this video ends on the recap and the Sources slide.</a:t>
+            </a:r>
+          </a:p>
+          <a:p/>
+          <a:p>
+            <a:r>
+              <a:t>VO: So the consistency cross-check keeps the framework's three foundational documents telling the same story. The AI reads the decree, the Governance Pack and the standards portfolio together and flags where they have drifted apart; a human decides which is right and fixes it. Run it on every change, and you catch the contradictions yourself, before the reviewer, the member or the auditor does.</a:t>
             </a:r>
           </a:p>
         </p:txBody>
@@ -6588,13 +6587,7 @@
           <a:lstStyle/>
           <a:p>
             <a:r>
-              <a:t>PRACTICE BOX (on-screen only — never read it, never paraphrase it, never point at it). It replaces the narrated handoff: this video ends on the recap and the Sources slide.</a:t>
-            </a:r>
-          </a:p>
-          <a:p/>
-          <a:p>
-            <a:r>
-              <a:t>VO: So the consistency cross-check keeps the framework's three foundational documents telling the same story. The AI reads the decree, the Governance Pack and the standards portfolio together and flags where they have drifted apart; a human decides which is right and fixes it. Run it on every change, and you catch the contradictions yourself, before the reviewer, the member or the auditor does.</a:t>
+              <a:t>Sources slide, held ~5 seconds at the end of the video. Links are compiled into the YouTube description per ITU convention; no URLs read aloud.</a:t>
             </a:r>
           </a:p>
         </p:txBody>
@@ -6664,7 +6657,7 @@
           <a:lstStyle/>
           <a:p>
             <a:r>
-              <a:t>Sources slide, held ~5 seconds at the end of the video. Links are compiled into the YouTube description per ITU convention; no URLs read aloud.</a:t>
+              <a:t>Title card — the cold open. The hosts name the module, the video number, the title and the single message on this slide; no scripted narration. Hold until the opener begins; the opener is narrated on the next slide.</a:t>
             </a:r>
           </a:p>
         </p:txBody>
@@ -6734,7 +6727,7 @@
           <a:lstStyle/>
           <a:p>
             <a:r>
-              <a:t>Title card — the cold open. The hosts name the module, the video number, the title and the single message on this slide; no scripted narration. Hold until the opener begins; the opener is narrated on the next slide.</a:t>
+              <a:t>VO: Everything in this knowledge product was demonstrated on education — Progressa's schools, learners and credentials. But the framework is not education-specific, and now that it runs, the most important thing a Strategist can know is exactly which parts carry to the next sector unchanged and which parts are new. Get that split right, and the second sector pays only for its own vocabularies and services.</a:t>
             </a:r>
           </a:p>
         </p:txBody>
@@ -6804,7 +6797,13 @@
           <a:lstStyle/>
           <a:p>
             <a:r>
-              <a:t>VO: Everything in this knowledge product was demonstrated on education — Progressa's schools, learners and credentials. But the framework is not education-specific, and now that it runs, the most important thing a Strategist can know is exactly which parts carry to the next sector unchanged and which parts are new. Get that split right, and the second sector pays only for its own vocabularies and services.</a:t>
+              <a:t>VO: Split the framework in two. What carries unchanged to health, or agriculture, or social protection: the four-layer model, the decree pattern, the governance — the tiers, the RACI, the Operating Authority — the standards portfolio, and the bus itself, already built and running. What is genuinely new per sector: the semantic layer, because health speaks a different vocabulary than education, and the specific exchanges and services that sector needs. That — the vocabularies and the services — is the whole of the difference. And a word on order. This knowledge product demonstrated on education because the worked case was to hand; most countries sequence the framework the other way round. The first wave is usually tax, civil registration, the business register and health — high-volume, foundational reference data that every other sector reads — with education, justice, social protection and customs in the second wave. Whichever sector goes first pays for the platform; the rule that the next is cheaper holds either way.</a:t>
+            </a:r>
+          </a:p>
+          <a:p/>
+          <a:p>
+            <a:r>
+              <a:t>Production cue: the pivotal slide of this video. Hold it a beat longer.</a:t>
             </a:r>
           </a:p>
         </p:txBody>
@@ -6874,13 +6873,7 @@
           <a:lstStyle/>
           <a:p>
             <a:r>
-              <a:t>VO: Split the framework in two. What carries unchanged to health, or agriculture, or social protection: the four-layer model, the decree pattern, the governance — the tiers, the RACI, the Operating Authority — the standards portfolio, and the bus itself, already built and running. What is genuinely new per sector: the semantic layer, because health speaks a different vocabulary than education, and the specific exchanges and services that sector needs. That — the vocabularies and the services — is the whole of the difference. And a word on order. This knowledge product demonstrated on education because the worked case was to hand; most countries sequence the framework the other way round. The first wave is usually tax, civil registration, the business register and health — high-volume, foundational reference data that every other sector reads — with education, justice, social protection and customs in the second wave. Whichever sector goes first pays for the platform; the rule that the next is cheaper holds either way.</a:t>
-            </a:r>
-          </a:p>
-          <a:p/>
-          <a:p>
-            <a:r>
-              <a:t>Production cue: the pivotal slide of this video. Hold it a beat longer.</a:t>
+              <a:t>VO: And this is the re-use argument at the scale of the whole framework. The first sector pays to build the bus, the governance and the legal mandate; the second sector reuses all of it and pays only for its own semantics and services; the third reuses more still. This is exactly the whole-of-government planning logic from the very first module, now visible across sectors: build the shared platform once, and every sector after consumes it. The second sector is cheaper than the first, and the third cheaper than the second — and only a framework built deliberately, for the whole of government, makes that compounding possible. A set of separate sector projects never gets cheaper; a planned framework does.</a:t>
             </a:r>
           </a:p>
         </p:txBody>
@@ -6950,7 +6943,7 @@
           <a:lstStyle/>
           <a:p>
             <a:r>
-              <a:t>VO: And this is the re-use argument at the scale of the whole framework. The first sector pays to build the bus, the governance and the legal mandate; the second sector reuses all of it and pays only for its own semantics and services; the third reuses more still. This is exactly the whole-of-government planning logic from the very first module, now visible across sectors: build the shared platform once, and every sector after consumes it. The second sector is cheaper than the first, and the third cheaper than the second — and only a framework built deliberately, for the whole of government, makes that compounding possible. A set of separate sector projects never gets cheaper; a planned framework does.</a:t>
+              <a:t>VO: Portability is built in on purpose, and it is not a footnote — it is the reason an interoperability framework is worth its cost. A platform that served only education would be hard to justify; a platform that serves education first and then every other sector, each paying only for its own vocabularies and services, is the investment a strategist can defend for a decade. So when you take the next sector to your minister, bring the portability map: here is what we reuse, which is most of it, and here is the small, sector-specific part we build new. That map gets cheaper to make every time, and it is the business case for the next sector.</a:t>
             </a:r>
           </a:p>
         </p:txBody>
@@ -7020,7 +7013,13 @@
           <a:lstStyle/>
           <a:p>
             <a:r>
-              <a:t>VO: Portability is built in on purpose, and it is not a footnote — it is the reason an interoperability framework is worth its cost. A platform that served only education would be hard to justify; a platform that serves education first and then every other sector, each paying only for its own vocabularies and services, is the investment a strategist can defend for a decade. So when you take the next sector to your minister, bring the portability map: here is what we reuse, which is most of it, and here is the small, sector-specific part we build new. That map gets cheaper to make every time, and it is the business case for the next sector.</a:t>
+              <a:t>PRACTICE BOX (on-screen only — never read it, never paraphrase it, never point at it). It replaces the narrated handoff: this video ends on the recap and the Sources slide.</a:t>
+            </a:r>
+          </a:p>
+          <a:p/>
+          <a:p>
+            <a:r>
+              <a:t>VO: So the framework you built for education is sector-portable. Most of it — the bus, the governance, the legal mandate, the standards — carries unchanged; only the vocabularies and the services are new per sector. Build the platform once, reuse it everywhere, and let every sector after the first be cheaper than the one before. That compounding re-use is the framework's lasting value.</a:t>
             </a:r>
           </a:p>
         </p:txBody>
@@ -7090,13 +7089,7 @@
           <a:lstStyle/>
           <a:p>
             <a:r>
-              <a:t>PRACTICE BOX (on-screen only — never read it, never paraphrase it, never point at it). It replaces the narrated handoff: this video ends on the recap and the Sources slide.</a:t>
-            </a:r>
-          </a:p>
-          <a:p/>
-          <a:p>
-            <a:r>
-              <a:t>VO: So the framework you built for education is sector-portable. Most of it — the bus, the governance, the legal mandate, the standards — carries unchanged; only the vocabularies and the services are new per sector. Build the platform once, reuse it everywhere, and let every sector after the first be cheaper than the one before. That compounding re-use is the framework's lasting value.</a:t>
+              <a:t>Sources slide, held ~5 seconds at the end of the video. Links are compiled into the YouTube description per ITU convention; no URLs read aloud.</a:t>
             </a:r>
           </a:p>
         </p:txBody>
@@ -7122,76 +7115,6 @@
 </file>
 
 <file path=ppt/notesSlides/notesSlide88.xml><?xml version="1.0" encoding="utf-8"?>
-<p:notes xmlns:a="http://schemas.openxmlformats.org/drawingml/2006/main" xmlns:p="http://schemas.openxmlformats.org/presentationml/2006/main" xmlns:r="http://schemas.openxmlformats.org/officeDocument/2006/relationships">
-  <p:cSld>
-    <p:spTree>
-      <p:nvGrpSpPr>
-        <p:cNvPr id="1" name=""/>
-        <p:cNvGrpSpPr/>
-        <p:nvPr/>
-      </p:nvGrpSpPr>
-      <p:grpSpPr>
-        <a:xfrm>
-          <a:off x="0" y="0"/>
-          <a:ext cx="0" cy="0"/>
-          <a:chOff x="0" y="0"/>
-          <a:chExt cx="0" cy="0"/>
-        </a:xfrm>
-      </p:grpSpPr>
-      <p:sp>
-        <p:nvSpPr>
-          <p:cNvPr id="2" name="Slide Image Placeholder 1"/>
-          <p:cNvSpPr>
-            <a:spLocks noGrp="1"/>
-          </p:cNvSpPr>
-          <p:nvPr>
-            <p:ph type="sldImg" idx="2"/>
-          </p:nvPr>
-        </p:nvSpPr>
-        <p:spPr/>
-      </p:sp>
-      <p:sp>
-        <p:nvSpPr>
-          <p:cNvPr id="3" name="Notes Placeholder 2"/>
-          <p:cNvSpPr>
-            <a:spLocks noGrp="1"/>
-          </p:cNvSpPr>
-          <p:nvPr>
-            <p:ph type="body" idx="3" sz="quarter"/>
-          </p:nvPr>
-        </p:nvSpPr>
-        <p:spPr/>
-        <p:txBody>
-          <a:bodyPr/>
-          <a:lstStyle/>
-          <a:p>
-            <a:r>
-              <a:t>Sources slide, held ~5 seconds at the end of the video. Links are compiled into the YouTube description per ITU convention; no URLs read aloud.</a:t>
-            </a:r>
-          </a:p>
-        </p:txBody>
-      </p:sp>
-      <p:sp>
-        <p:nvSpPr>
-          <p:cNvPr id="4" name="Slide Number Placeholder 3"/>
-          <p:cNvSpPr>
-            <a:spLocks noGrp="1"/>
-          </p:cNvSpPr>
-          <p:nvPr>
-            <p:ph type="sldNum" idx="5" sz="quarter"/>
-          </p:nvPr>
-        </p:nvSpPr>
-        <p:spPr/>
-      </p:sp>
-    </p:spTree>
-  </p:cSld>
-  <p:clrMapOvr>
-    <a:masterClrMapping/>
-  </p:clrMapOvr>
-</p:notes>
-</file>
-
-<file path=ppt/notesSlides/notesSlide89.xml><?xml version="1.0" encoding="utf-8"?>
 <p:notes xmlns:a="http://schemas.openxmlformats.org/drawingml/2006/main" xmlns:p="http://schemas.openxmlformats.org/presentationml/2006/main" xmlns:r="http://schemas.openxmlformats.org/officeDocument/2006/relationships">
   <p:cSld>
     <p:spTree>
@@ -41649,7 +41572,7 @@
                 </a:solidFill>
                 <a:latin typeface="Arial"/>
               </a:rPr>
-              <a:t>Point Claude at the real bus logs to spot a failing or unusual exchange before a citizen does.</a:t>
+              <a:t>Point Claude at the bus's operational monitoring data — never its message log — to spot a failing or unusual exchange early.</a:t>
             </a:r>
           </a:p>
         </p:txBody>
@@ -41808,7 +41731,7 @@
                 </a:solidFill>
                 <a:latin typeface="Arial"/>
               </a:rPr>
-              <a:t>Every call leaves a trace in the logs.</a:t>
+              <a:t>Every call leaves a record in the bus's monitoring data.</a:t>
             </a:r>
           </a:p>
           <a:p>
@@ -41824,7 +41747,7 @@
                 </a:solidFill>
                 <a:latin typeface="Arial"/>
               </a:rPr>
-              <a:t>Reading them by hand does not scale past a few services.</a:t>
+              <a:t>Reading it by hand does not scale past a few services.</a:t>
             </a:r>
           </a:p>
         </p:txBody>
@@ -42387,7 +42310,7 @@
                 </a:solidFill>
                 <a:latin typeface="Arial"/>
               </a:rPr>
-              <a:t>The logs hold the operational truth</a:t>
+              <a:t>What the monitoring data shows</a:t>
             </a:r>
           </a:p>
         </p:txBody>
@@ -42401,7 +42324,7 @@
         <p:spPr>
           <a:xfrm>
             <a:off x="658368" y="1463040"/>
-            <a:ext cx="10984687" cy="1028699"/>
+            <a:ext cx="10984687" cy="1386839"/>
           </a:xfrm>
           <a:prstGeom prst="rect">
             <a:avLst/>
@@ -42426,7 +42349,7 @@
                 </a:solidFill>
                 <a:latin typeface="Arial"/>
               </a:rPr>
-              <a:t>Which exchanges ran, and which failed</a:t>
+              <a:t>Which exchanges failed</a:t>
             </a:r>
           </a:p>
           <a:p>
@@ -42442,7 +42365,7 @@
                 </a:solidFill>
                 <a:latin typeface="Arial"/>
               </a:rPr>
-              <a:t>And how often.</a:t>
+              <a:t>And how often, service by service.</a:t>
             </a:r>
           </a:p>
         </p:txBody>
@@ -42455,7 +42378,7 @@
         </p:nvSpPr>
         <p:spPr>
           <a:xfrm>
-            <a:off x="621792" y="2496312"/>
+            <a:off x="621792" y="2854452"/>
             <a:ext cx="10881360" cy="12700"/>
           </a:xfrm>
           <a:prstGeom prst="rect">
@@ -42499,8 +42422,8 @@
         </p:nvSpPr>
         <p:spPr>
           <a:xfrm>
-            <a:off x="658368" y="2537460"/>
-            <a:ext cx="10984687" cy="1028699"/>
+            <a:off x="658368" y="2895600"/>
+            <a:ext cx="10984687" cy="1386839"/>
           </a:xfrm>
           <a:prstGeom prst="rect">
             <a:avLst/>
@@ -42554,7 +42477,7 @@
         </p:nvSpPr>
         <p:spPr>
           <a:xfrm>
-            <a:off x="621792" y="3570732"/>
+            <a:off x="621792" y="4287011"/>
             <a:ext cx="10881360" cy="12700"/>
           </a:xfrm>
           <a:prstGeom prst="rect">
@@ -42598,8 +42521,8 @@
         </p:nvSpPr>
         <p:spPr>
           <a:xfrm>
-            <a:off x="658368" y="3611879"/>
-            <a:ext cx="10984687" cy="1028699"/>
+            <a:off x="658368" y="4328159"/>
+            <a:ext cx="10984687" cy="1386839"/>
           </a:xfrm>
           <a:prstGeom prst="rect">
             <a:avLst/>
@@ -42647,58 +42570,14 @@
       </p:sp>
       <p:sp>
         <p:nvSpPr>
-          <p:cNvPr id="9" name="Rectangle 8"/>
-          <p:cNvSpPr/>
-          <p:nvPr/>
-        </p:nvSpPr>
-        <p:spPr>
-          <a:xfrm>
-            <a:off x="621792" y="4645152"/>
-            <a:ext cx="10881360" cy="12700"/>
-          </a:xfrm>
-          <a:prstGeom prst="rect">
-            <a:avLst/>
-          </a:prstGeom>
-          <a:solidFill>
-            <a:srgbClr val="DDECF4"/>
-          </a:solidFill>
-          <a:ln>
-            <a:noFill/>
-          </a:ln>
-          <a:effectLst/>
-        </p:spPr>
-        <p:style>
-          <a:lnRef idx="1">
-            <a:schemeClr val="accent1"/>
-          </a:lnRef>
-          <a:fillRef idx="3">
-            <a:schemeClr val="accent1"/>
-          </a:fillRef>
-          <a:effectRef idx="2">
-            <a:schemeClr val="accent1"/>
-          </a:effectRef>
-          <a:fontRef idx="minor">
-            <a:schemeClr val="lt1"/>
-          </a:fontRef>
-        </p:style>
-        <p:txBody>
-          <a:bodyPr rtlCol="0" anchor="ctr"/>
-          <a:lstStyle/>
-          <a:p>
-            <a:pPr algn="ctr"/>
-          </a:p>
-        </p:txBody>
-      </p:sp>
-      <p:sp>
-        <p:nvSpPr>
-          <p:cNvPr id="10" name="TextBox 9"/>
+          <p:cNvPr id="9" name="TextBox 8"/>
           <p:cNvSpPr txBox="1"/>
           <p:nvPr/>
         </p:nvSpPr>
         <p:spPr>
           <a:xfrm>
-            <a:off x="658368" y="4686300"/>
-            <a:ext cx="10984687" cy="1028699"/>
+            <a:off x="658368" y="5870448"/>
+            <a:ext cx="10881360" cy="548640"/>
           </a:xfrm>
           <a:prstGeom prst="rect">
             <a:avLst/>
@@ -42711,61 +42590,6 @@
           </a:bodyPr>
           <a:lstStyle/>
           <a:p>
-            <a:pPr>
-              <a:spcAft>
-                <a:spcPts val="300"/>
-              </a:spcAft>
-            </a:pPr>
-            <a:r>
-              <a:rPr sz="1900" b="1" i="0">
-                <a:solidFill>
-                  <a:srgbClr val="1A1A1A"/>
-                </a:solidFill>
-                <a:latin typeface="Arial"/>
-              </a:rPr>
-              <a:t>Compliance</a:t>
-            </a:r>
-          </a:p>
-          <a:p>
-            <a:pPr>
-              <a:spcAft>
-                <a:spcPts val="300"/>
-              </a:spcAft>
-            </a:pPr>
-            <a:r>
-              <a:rPr sz="1550" b="0" i="0">
-                <a:solidFill>
-                  <a:srgbClr val="595959"/>
-                </a:solidFill>
-                <a:latin typeface="Arial"/>
-              </a:rPr>
-              <a:t>Which members still meet the binding standards, and which are drifting.</a:t>
-            </a:r>
-          </a:p>
-        </p:txBody>
-      </p:sp>
-      <p:sp>
-        <p:nvSpPr>
-          <p:cNvPr id="11" name="TextBox 10"/>
-          <p:cNvSpPr txBox="1"/>
-          <p:nvPr/>
-        </p:nvSpPr>
-        <p:spPr>
-          <a:xfrm>
-            <a:off x="658368" y="5870448"/>
-            <a:ext cx="10881360" cy="548640"/>
-          </a:xfrm>
-          <a:prstGeom prst="rect">
-            <a:avLst/>
-          </a:prstGeom>
-          <a:noFill/>
-        </p:spPr>
-        <p:txBody>
-          <a:bodyPr wrap="square">
-            <a:spAutoFit/>
-          </a:bodyPr>
-          <a:lstStyle/>
-          <a:p>
             <a:r>
               <a:rPr sz="1550" b="1" i="0">
                 <a:solidFill>
@@ -42773,14 +42597,14 @@
                 </a:solidFill>
                 <a:latin typeface="Arial"/>
               </a:rPr>
-              <a:t>The metadata of exchanges — never their contents.</a:t>
-            </a:r>
-          </a:p>
-        </p:txBody>
-      </p:sp>
-      <p:sp>
-        <p:nvSpPr>
-          <p:cNvPr id="12" name="TextBox 11"/>
+              <a:t>Read daily for health. Summarised each quarter for the Steering Committee.</a:t>
+            </a:r>
+          </a:p>
+        </p:txBody>
+      </p:sp>
+      <p:sp>
+        <p:nvSpPr>
+          <p:cNvPr id="10" name="TextBox 9"/>
           <p:cNvSpPr txBox="1"/>
           <p:nvPr/>
         </p:nvSpPr>
@@ -42903,7 +42727,7 @@
                 </a:solidFill>
                 <a:latin typeface="Arial"/>
               </a:rPr>
-              <a:t>Two loops: health every day, compliance every quarter</a:t>
+              <a:t>Two safeguards that are not optional</a:t>
             </a:r>
           </a:p>
         </p:txBody>
@@ -42988,7 +42812,7 @@
                 </a:solidFill>
                 <a:latin typeface="Arial"/>
               </a:rPr>
-              <a:t>DAILY — OPERATIONAL HEALTH</a:t>
+              <a:t>THE AI FLAGS, A HUMAN INVESTIGATES</a:t>
             </a:r>
           </a:p>
           <a:p>
@@ -43004,7 +42828,7 @@
                 </a:solidFill>
                 <a:latin typeface="Arial"/>
               </a:rPr>
-              <a:t>A failing service caught before a citizen is turned away.</a:t>
+              <a:t>An anomaly is a question to look into.</a:t>
             </a:r>
           </a:p>
           <a:p>
@@ -43020,7 +42844,7 @@
                 </a:solidFill>
                 <a:latin typeface="Arial"/>
               </a:rPr>
-              <a:t>A slowdown addressed before it becomes an outage.</a:t>
+              <a:t>Not a verdict to act on automatically.</a:t>
             </a:r>
           </a:p>
         </p:txBody>
@@ -43042,7 +42866,7 @@
             </a:avLst>
           </a:prstGeom>
           <a:solidFill>
-            <a:srgbClr val="E5F5FB"/>
+            <a:srgbClr val="F2F2F2"/>
           </a:solidFill>
           <a:ln>
             <a:noFill/>
@@ -43105,7 +42929,7 @@
                 </a:solidFill>
                 <a:latin typeface="Arial"/>
               </a:rPr>
-              <a:t>QUARTERLY — MEMBER COMPLIANCE</a:t>
+              <a:t>THE TRAFFIC, NEVER THE CARGO</a:t>
             </a:r>
           </a:p>
           <a:p>
@@ -43121,7 +42945,7 @@
                 </a:solidFill>
                 <a:latin typeface="Arial"/>
               </a:rPr>
-              <a:t>To the Steering Committee each quarter, the Council each year.</a:t>
+              <a:t>Monitoring data: which service, whether it worked, how fast.</a:t>
             </a:r>
           </a:p>
           <a:p>
@@ -43137,7 +42961,7 @@
                 </a:solidFill>
                 <a:latin typeface="Arial"/>
               </a:rPr>
-              <a:t>To citizens twice a year, where transparency policy asks.</a:t>
+              <a:t>Never the message log — it keeps the messages themselves.</a:t>
             </a:r>
           </a:p>
         </p:txBody>
@@ -43171,7 +42995,7 @@
                 </a:solidFill>
                 <a:latin typeface="Arial"/>
               </a:rPr>
-              <a:t>Monitoring that reaches a governance table is accountability. The rest is a dashboard.</a:t>
+              <a:t>Monitor the traffic, never the cargo.</a:t>
             </a:r>
           </a:p>
         </p:txBody>
@@ -43230,23 +43054,95 @@
       <p:grpSpPr/>
       <p:sp>
         <p:nvSpPr>
-          <p:cNvPr id="2" name="Rectangle 1"/>
+          <p:cNvPr id="2" name="TextBox 1"/>
+          <p:cNvSpPr txBox="1"/>
+          <p:nvPr/>
+        </p:nvSpPr>
+        <p:spPr>
+          <a:xfrm>
+            <a:off x="1005840" y="2103120"/>
+            <a:ext cx="10149840" cy="2377440"/>
+          </a:xfrm>
+          <a:prstGeom prst="rect">
+            <a:avLst/>
+          </a:prstGeom>
+          <a:noFill/>
+        </p:spPr>
+        <p:txBody>
+          <a:bodyPr wrap="square">
+            <a:spAutoFit/>
+          </a:bodyPr>
+          <a:lstStyle/>
+          <a:p>
+            <a:r>
+              <a:rPr sz="3000" b="1" i="0">
+                <a:solidFill>
+                  <a:srgbClr val="1A1A1A"/>
+                </a:solidFill>
+                <a:latin typeface="Arial"/>
+              </a:rPr>
+              <a:t>The monitoring data holds the bus's health — the AI makes it legible, a human acts on the flags, and the cargo never enters the prompt.</a:t>
+            </a:r>
+          </a:p>
+        </p:txBody>
+      </p:sp>
+      <p:sp>
+        <p:nvSpPr>
+          <p:cNvPr id="3" name="TextBox 2"/>
+          <p:cNvSpPr txBox="1"/>
+          <p:nvPr/>
+        </p:nvSpPr>
+        <p:spPr>
+          <a:xfrm>
+            <a:off x="1005840" y="1554480"/>
+            <a:ext cx="5486400" cy="365760"/>
+          </a:xfrm>
+          <a:prstGeom prst="rect">
+            <a:avLst/>
+          </a:prstGeom>
+          <a:noFill/>
+        </p:spPr>
+        <p:txBody>
+          <a:bodyPr wrap="square">
+            <a:spAutoFit/>
+          </a:bodyPr>
+          <a:lstStyle/>
+          <a:p>
+            <a:r>
+              <a:rPr sz="1200" b="1" i="0">
+                <a:solidFill>
+                  <a:srgbClr val="006E96"/>
+                </a:solidFill>
+                <a:latin typeface="Arial"/>
+              </a:rPr>
+              <a:t>IN ONE SENTENCE</a:t>
+            </a:r>
+          </a:p>
+        </p:txBody>
+      </p:sp>
+      <p:sp>
+        <p:nvSpPr>
+          <p:cNvPr id="4" name="Rounded Rectangle 3"/>
           <p:cNvSpPr/>
           <p:nvPr/>
         </p:nvSpPr>
         <p:spPr>
           <a:xfrm>
-            <a:off x="457200" y="384048"/>
-            <a:ext cx="45720" cy="256032"/>
-          </a:xfrm>
-          <a:prstGeom prst="rect">
-            <a:avLst/>
+            <a:off x="658368" y="4709160"/>
+            <a:ext cx="10881360" cy="1554480"/>
+          </a:xfrm>
+          <a:prstGeom prst="roundRect">
+            <a:avLst>
+              <a:gd name="adj" fmla="val 4500"/>
+            </a:avLst>
           </a:prstGeom>
           <a:solidFill>
-            <a:srgbClr val="009CD6"/>
+            <a:srgbClr val="FFFFFF"/>
           </a:solidFill>
-          <a:ln>
-            <a:noFill/>
+          <a:ln w="9525">
+            <a:solidFill>
+              <a:srgbClr val="009CD6"/>
+            </a:solidFill>
           </a:ln>
           <a:effectLst/>
         </p:spPr>
@@ -43265,23 +43161,63 @@
           </a:fontRef>
         </p:style>
         <p:txBody>
-          <a:bodyPr rtlCol="0" anchor="ctr"/>
-          <a:lstStyle/>
-          <a:p>
-            <a:pPr algn="ctr"/>
-          </a:p>
-        </p:txBody>
-      </p:sp>
-      <p:sp>
-        <p:nvSpPr>
-          <p:cNvPr id="3" name="TextBox 2"/>
+          <a:bodyPr rtlCol="0" anchor="ctr" wrap="square" lIns="228600" rIns="228600" tIns="109728" bIns="109728">
+            <a:noAutofit/>
+          </a:bodyPr>
+          <a:lstStyle/>
+          <a:p>
+            <a:pPr algn="l">
+              <a:spcAft>
+                <a:spcPts val="400"/>
+              </a:spcAft>
+            </a:pPr>
+            <a:r>
+              <a:rPr sz="1800" b="1" i="0">
+                <a:solidFill>
+                  <a:srgbClr val="006E96"/>
+                </a:solidFill>
+                <a:latin typeface="Arial"/>
+              </a:rPr>
+              <a:t>Do this on your own sector. </a:t>
+            </a:r>
+            <a:r>
+              <a:rPr sz="1800" b="1" i="0">
+                <a:solidFill>
+                  <a:srgbClr val="1A1A1A"/>
+                </a:solidFill>
+                <a:latin typeface="Arial"/>
+              </a:rPr>
+              <a:t>Summarise bus health and flag anomalies from the monitoring data.</a:t>
+            </a:r>
+          </a:p>
+          <a:p>
+            <a:pPr algn="l">
+              <a:spcAft>
+                <a:spcPts val="400"/>
+              </a:spcAft>
+            </a:pPr>
+            <a:r>
+              <a:rPr sz="1800" b="0" i="0">
+                <a:solidFill>
+                  <a:srgbClr val="595959"/>
+                </a:solidFill>
+                <a:latin typeface="Arial"/>
+              </a:rPr>
+              <a:t>The prompt in the companion material gives you a health summary plus a prioritised list of anomalies to investigate. Before the next video.</a:t>
+            </a:r>
+          </a:p>
+        </p:txBody>
+      </p:sp>
+      <p:sp>
+        <p:nvSpPr>
+          <p:cNvPr id="5" name="TextBox 4"/>
           <p:cNvSpPr txBox="1"/>
           <p:nvPr/>
         </p:nvSpPr>
         <p:spPr>
           <a:xfrm>
-            <a:off x="621792" y="274320"/>
-            <a:ext cx="11247120" cy="914400"/>
+            <a:off x="457200" y="6473952"/>
+            <a:ext cx="7772400" cy="292608"/>
           </a:xfrm>
           <a:prstGeom prst="rect">
             <a:avLst/>
@@ -43295,73 +43231,27 @@
           <a:lstStyle/>
           <a:p>
             <a:r>
-              <a:rPr sz="2800" b="1" i="0">
-                <a:solidFill>
-                  <a:srgbClr val="1A1A1A"/>
-                </a:solidFill>
-                <a:latin typeface="Arial"/>
-              </a:rPr>
-              <a:t>Two safeguards that are not optional</a:t>
-            </a:r>
-          </a:p>
-        </p:txBody>
-      </p:sp>
-      <p:sp>
-        <p:nvSpPr>
-          <p:cNvPr id="4" name="Rounded Rectangle 3"/>
-          <p:cNvSpPr/>
-          <p:nvPr/>
-        </p:nvSpPr>
-        <p:spPr>
-          <a:xfrm>
-            <a:off x="658368" y="1554480"/>
-            <a:ext cx="5394960" cy="2926080"/>
-          </a:xfrm>
-          <a:prstGeom prst="roundRect">
-            <a:avLst>
-              <a:gd name="adj" fmla="val 4500"/>
-            </a:avLst>
-          </a:prstGeom>
-          <a:solidFill>
-            <a:srgbClr val="E5F5FB"/>
-          </a:solidFill>
-          <a:ln>
-            <a:noFill/>
-          </a:ln>
-          <a:effectLst/>
-        </p:spPr>
-        <p:style>
-          <a:lnRef idx="1">
-            <a:schemeClr val="accent1"/>
-          </a:lnRef>
-          <a:fillRef idx="3">
-            <a:schemeClr val="accent1"/>
-          </a:fillRef>
-          <a:effectRef idx="2">
-            <a:schemeClr val="accent1"/>
-          </a:effectRef>
-          <a:fontRef idx="minor">
-            <a:schemeClr val="lt1"/>
-          </a:fontRef>
-        </p:style>
-        <p:txBody>
-          <a:bodyPr rtlCol="0" anchor="ctr"/>
-          <a:lstStyle/>
-          <a:p>
-            <a:pPr algn="ctr"/>
-          </a:p>
-        </p:txBody>
-      </p:sp>
-      <p:sp>
-        <p:nvSpPr>
-          <p:cNvPr id="5" name="TextBox 4"/>
+              <a:rPr sz="900" b="0" i="0">
+                <a:solidFill>
+                  <a:srgbClr val="595959"/>
+                </a:solidFill>
+                <a:latin typeface="Arial"/>
+              </a:rPr>
+              <a:t>5.8 · Watch the bus — monitoring and anomaly detection</a:t>
+            </a:r>
+          </a:p>
+        </p:txBody>
+      </p:sp>
+      <p:sp>
+        <p:nvSpPr>
+          <p:cNvPr id="6" name="TextBox 5"/>
           <p:cNvSpPr txBox="1"/>
           <p:nvPr/>
         </p:nvSpPr>
         <p:spPr>
           <a:xfrm>
-            <a:off x="859536" y="1700784"/>
-            <a:ext cx="4992624" cy="2651760"/>
+            <a:off x="10058400" y="6473952"/>
+            <a:ext cx="1673352" cy="292608"/>
           </a:xfrm>
           <a:prstGeom prst="rect">
             <a:avLst/>
@@ -43374,228 +43264,7 @@
           </a:bodyPr>
           <a:lstStyle/>
           <a:p>
-            <a:pPr>
-              <a:spcAft>
-                <a:spcPts val="700"/>
-              </a:spcAft>
-            </a:pPr>
-            <a:r>
-              <a:rPr sz="1900" b="1" i="0">
-                <a:solidFill>
-                  <a:srgbClr val="006E96"/>
-                </a:solidFill>
-                <a:latin typeface="Arial"/>
-              </a:rPr>
-              <a:t>THE AI FLAGS, A HUMAN INVESTIGATES</a:t>
-            </a:r>
-          </a:p>
-          <a:p>
-            <a:pPr>
-              <a:spcAft>
-                <a:spcPts val="700"/>
-              </a:spcAft>
-            </a:pPr>
-            <a:r>
-              <a:rPr sz="1600" b="0" i="0">
-                <a:solidFill>
-                  <a:srgbClr val="1A1A1A"/>
-                </a:solidFill>
-                <a:latin typeface="Arial"/>
-              </a:rPr>
-              <a:t>An anomaly is a question to look into.</a:t>
-            </a:r>
-          </a:p>
-          <a:p>
-            <a:pPr>
-              <a:spcAft>
-                <a:spcPts val="700"/>
-              </a:spcAft>
-            </a:pPr>
-            <a:r>
-              <a:rPr sz="1600" b="0" i="0">
-                <a:solidFill>
-                  <a:srgbClr val="1A1A1A"/>
-                </a:solidFill>
-                <a:latin typeface="Arial"/>
-              </a:rPr>
-              <a:t>Not a verdict to act on automatically.</a:t>
-            </a:r>
-          </a:p>
-        </p:txBody>
-      </p:sp>
-      <p:sp>
-        <p:nvSpPr>
-          <p:cNvPr id="6" name="Rounded Rectangle 5"/>
-          <p:cNvSpPr/>
-          <p:nvPr/>
-        </p:nvSpPr>
-        <p:spPr>
-          <a:xfrm>
-            <a:off x="6263640" y="1554480"/>
-            <a:ext cx="5394960" cy="2926080"/>
-          </a:xfrm>
-          <a:prstGeom prst="roundRect">
-            <a:avLst>
-              <a:gd name="adj" fmla="val 4500"/>
-            </a:avLst>
-          </a:prstGeom>
-          <a:solidFill>
-            <a:srgbClr val="F2F2F2"/>
-          </a:solidFill>
-          <a:ln>
-            <a:noFill/>
-          </a:ln>
-          <a:effectLst/>
-        </p:spPr>
-        <p:style>
-          <a:lnRef idx="1">
-            <a:schemeClr val="accent1"/>
-          </a:lnRef>
-          <a:fillRef idx="3">
-            <a:schemeClr val="accent1"/>
-          </a:fillRef>
-          <a:effectRef idx="2">
-            <a:schemeClr val="accent1"/>
-          </a:effectRef>
-          <a:fontRef idx="minor">
-            <a:schemeClr val="lt1"/>
-          </a:fontRef>
-        </p:style>
-        <p:txBody>
-          <a:bodyPr rtlCol="0" anchor="ctr"/>
-          <a:lstStyle/>
-          <a:p>
-            <a:pPr algn="ctr"/>
-          </a:p>
-        </p:txBody>
-      </p:sp>
-      <p:sp>
-        <p:nvSpPr>
-          <p:cNvPr id="7" name="TextBox 6"/>
-          <p:cNvSpPr txBox="1"/>
-          <p:nvPr/>
-        </p:nvSpPr>
-        <p:spPr>
-          <a:xfrm>
-            <a:off x="6464808" y="1700784"/>
-            <a:ext cx="4992624" cy="2651760"/>
-          </a:xfrm>
-          <a:prstGeom prst="rect">
-            <a:avLst/>
-          </a:prstGeom>
-          <a:noFill/>
-        </p:spPr>
-        <p:txBody>
-          <a:bodyPr wrap="square">
-            <a:spAutoFit/>
-          </a:bodyPr>
-          <a:lstStyle/>
-          <a:p>
-            <a:pPr>
-              <a:spcAft>
-                <a:spcPts val="700"/>
-              </a:spcAft>
-            </a:pPr>
-            <a:r>
-              <a:rPr sz="1900" b="1" i="0">
-                <a:solidFill>
-                  <a:srgbClr val="006E96"/>
-                </a:solidFill>
-                <a:latin typeface="Arial"/>
-              </a:rPr>
-              <a:t>NO CITIZEN DATA IN THE PROMPT</a:t>
-            </a:r>
-          </a:p>
-          <a:p>
-            <a:pPr>
-              <a:spcAft>
-                <a:spcPts val="700"/>
-              </a:spcAft>
-            </a:pPr>
-            <a:r>
-              <a:rPr sz="1600" b="0" i="0">
-                <a:solidFill>
-                  <a:srgbClr val="1A1A1A"/>
-                </a:solidFill>
-                <a:latin typeface="Arial"/>
-              </a:rPr>
-              <a:t>Which service, success or failure, how fast.</a:t>
-            </a:r>
-          </a:p>
-          <a:p>
-            <a:pPr>
-              <a:spcAft>
-                <a:spcPts val="700"/>
-              </a:spcAft>
-            </a:pPr>
-            <a:r>
-              <a:rPr sz="1600" b="0" i="0">
-                <a:solidFill>
-                  <a:srgbClr val="1A1A1A"/>
-                </a:solidFill>
-                <a:latin typeface="Arial"/>
-              </a:rPr>
-              <a:t>A monitoring tool that ingests citizen data becomes the risk.</a:t>
-            </a:r>
-          </a:p>
-        </p:txBody>
-      </p:sp>
-      <p:sp>
-        <p:nvSpPr>
-          <p:cNvPr id="8" name="TextBox 7"/>
-          <p:cNvSpPr txBox="1"/>
-          <p:nvPr/>
-        </p:nvSpPr>
-        <p:spPr>
-          <a:xfrm>
-            <a:off x="658368" y="4663440"/>
-            <a:ext cx="10881360" cy="548640"/>
-          </a:xfrm>
-          <a:prstGeom prst="rect">
-            <a:avLst/>
-          </a:prstGeom>
-          <a:noFill/>
-        </p:spPr>
-        <p:txBody>
-          <a:bodyPr wrap="square">
-            <a:spAutoFit/>
-          </a:bodyPr>
-          <a:lstStyle/>
-          <a:p>
-            <a:r>
-              <a:rPr sz="1550" b="1" i="0">
-                <a:solidFill>
-                  <a:srgbClr val="006E96"/>
-                </a:solidFill>
-                <a:latin typeface="Arial"/>
-              </a:rPr>
-              <a:t>Monitor the traffic, never the cargo.</a:t>
-            </a:r>
-          </a:p>
-        </p:txBody>
-      </p:sp>
-      <p:sp>
-        <p:nvSpPr>
-          <p:cNvPr id="9" name="TextBox 8"/>
-          <p:cNvSpPr txBox="1"/>
-          <p:nvPr/>
-        </p:nvSpPr>
-        <p:spPr>
-          <a:xfrm>
-            <a:off x="457200" y="6473952"/>
-            <a:ext cx="7772400" cy="292608"/>
-          </a:xfrm>
-          <a:prstGeom prst="rect">
-            <a:avLst/>
-          </a:prstGeom>
-          <a:noFill/>
-        </p:spPr>
-        <p:txBody>
-          <a:bodyPr wrap="square">
-            <a:spAutoFit/>
-          </a:bodyPr>
-          <a:lstStyle/>
-          <a:p>
+            <a:pPr algn="r"/>
             <a:r>
               <a:rPr sz="900" b="0" i="0">
                 <a:solidFill>
@@ -43603,7 +43272,7 @@
                 </a:solidFill>
                 <a:latin typeface="Arial"/>
               </a:rPr>
-              <a:t>5.8 · Watch the bus — monitoring and anomaly detection</a:t>
+              <a:t>www.itu.int</a:t>
             </a:r>
           </a:p>
         </p:txBody>
@@ -43628,95 +43297,23 @@
       <p:grpSpPr/>
       <p:sp>
         <p:nvSpPr>
-          <p:cNvPr id="2" name="TextBox 1"/>
-          <p:cNvSpPr txBox="1"/>
-          <p:nvPr/>
-        </p:nvSpPr>
-        <p:spPr>
-          <a:xfrm>
-            <a:off x="1005840" y="2103120"/>
-            <a:ext cx="10149840" cy="2377440"/>
-          </a:xfrm>
-          <a:prstGeom prst="rect">
-            <a:avLst/>
-          </a:prstGeom>
-          <a:noFill/>
-        </p:spPr>
-        <p:txBody>
-          <a:bodyPr wrap="square">
-            <a:spAutoFit/>
-          </a:bodyPr>
-          <a:lstStyle/>
-          <a:p>
-            <a:r>
-              <a:rPr sz="3000" b="1" i="0">
-                <a:solidFill>
-                  <a:srgbClr val="1A1A1A"/>
-                </a:solidFill>
-                <a:latin typeface="Arial"/>
-              </a:rPr>
-              <a:t>The logs hold the bus's health — the AI makes it legible, a human acts on the flags, and citizen data never enters the prompt.</a:t>
-            </a:r>
-          </a:p>
-        </p:txBody>
-      </p:sp>
-      <p:sp>
-        <p:nvSpPr>
-          <p:cNvPr id="3" name="TextBox 2"/>
-          <p:cNvSpPr txBox="1"/>
-          <p:nvPr/>
-        </p:nvSpPr>
-        <p:spPr>
-          <a:xfrm>
-            <a:off x="1005840" y="1554480"/>
-            <a:ext cx="5486400" cy="365760"/>
-          </a:xfrm>
-          <a:prstGeom prst="rect">
-            <a:avLst/>
-          </a:prstGeom>
-          <a:noFill/>
-        </p:spPr>
-        <p:txBody>
-          <a:bodyPr wrap="square">
-            <a:spAutoFit/>
-          </a:bodyPr>
-          <a:lstStyle/>
-          <a:p>
-            <a:r>
-              <a:rPr sz="1200" b="1" i="0">
-                <a:solidFill>
-                  <a:srgbClr val="006E96"/>
-                </a:solidFill>
-                <a:latin typeface="Arial"/>
-              </a:rPr>
-              <a:t>IN ONE SENTENCE</a:t>
-            </a:r>
-          </a:p>
-        </p:txBody>
-      </p:sp>
-      <p:sp>
-        <p:nvSpPr>
-          <p:cNvPr id="4" name="Rounded Rectangle 3"/>
+          <p:cNvPr id="2" name="Rectangle 1"/>
           <p:cNvSpPr/>
           <p:nvPr/>
         </p:nvSpPr>
         <p:spPr>
           <a:xfrm>
-            <a:off x="658368" y="4709160"/>
-            <a:ext cx="10881360" cy="1554480"/>
-          </a:xfrm>
-          <a:prstGeom prst="roundRect">
-            <a:avLst>
-              <a:gd name="adj" fmla="val 4500"/>
-            </a:avLst>
+            <a:off x="457200" y="384048"/>
+            <a:ext cx="45720" cy="256032"/>
+          </a:xfrm>
+          <a:prstGeom prst="rect">
+            <a:avLst/>
           </a:prstGeom>
           <a:solidFill>
-            <a:srgbClr val="FFFFFF"/>
+            <a:srgbClr val="009CD6"/>
           </a:solidFill>
-          <a:ln w="9525">
-            <a:solidFill>
-              <a:srgbClr val="009CD6"/>
-            </a:solidFill>
+          <a:ln>
+            <a:noFill/>
           </a:ln>
           <a:effectLst/>
         </p:spPr>
@@ -43735,63 +43332,23 @@
           </a:fontRef>
         </p:style>
         <p:txBody>
-          <a:bodyPr rtlCol="0" anchor="ctr" wrap="square" lIns="228600" rIns="228600" tIns="109728" bIns="109728">
-            <a:noAutofit/>
-          </a:bodyPr>
-          <a:lstStyle/>
-          <a:p>
-            <a:pPr algn="l">
-              <a:spcAft>
-                <a:spcPts val="400"/>
-              </a:spcAft>
-            </a:pPr>
-            <a:r>
-              <a:rPr sz="1800" b="1" i="0">
-                <a:solidFill>
-                  <a:srgbClr val="006E96"/>
-                </a:solidFill>
-                <a:latin typeface="Arial"/>
-              </a:rPr>
-              <a:t>Do this on your own sector. </a:t>
-            </a:r>
-            <a:r>
-              <a:rPr sz="1800" b="1" i="0">
-                <a:solidFill>
-                  <a:srgbClr val="1A1A1A"/>
-                </a:solidFill>
-                <a:latin typeface="Arial"/>
-              </a:rPr>
-              <a:t>Summarise bus health and flag anomalies from the logs.</a:t>
-            </a:r>
-          </a:p>
-          <a:p>
-            <a:pPr algn="l">
-              <a:spcAft>
-                <a:spcPts val="400"/>
-              </a:spcAft>
-            </a:pPr>
-            <a:r>
-              <a:rPr sz="1800" b="0" i="0">
-                <a:solidFill>
-                  <a:srgbClr val="595959"/>
-                </a:solidFill>
-                <a:latin typeface="Arial"/>
-              </a:rPr>
-              <a:t>The prompt in the companion material gives you a health summary plus a prioritised list of anomalies to investigate. Before the next video.</a:t>
-            </a:r>
-          </a:p>
-        </p:txBody>
-      </p:sp>
-      <p:sp>
-        <p:nvSpPr>
-          <p:cNvPr id="5" name="TextBox 4"/>
+          <a:bodyPr rtlCol="0" anchor="ctr"/>
+          <a:lstStyle/>
+          <a:p>
+            <a:pPr algn="ctr"/>
+          </a:p>
+        </p:txBody>
+      </p:sp>
+      <p:sp>
+        <p:nvSpPr>
+          <p:cNvPr id="3" name="TextBox 2"/>
           <p:cNvSpPr txBox="1"/>
           <p:nvPr/>
         </p:nvSpPr>
         <p:spPr>
           <a:xfrm>
-            <a:off x="457200" y="6473952"/>
-            <a:ext cx="7772400" cy="292608"/>
+            <a:off x="621792" y="274320"/>
+            <a:ext cx="11247120" cy="914400"/>
           </a:xfrm>
           <a:prstGeom prst="rect">
             <a:avLst/>
@@ -43805,27 +43362,27 @@
           <a:lstStyle/>
           <a:p>
             <a:r>
-              <a:rPr sz="900" b="0" i="0">
-                <a:solidFill>
-                  <a:srgbClr val="595959"/>
-                </a:solidFill>
-                <a:latin typeface="Arial"/>
-              </a:rPr>
-              <a:t>5.8 · Watch the bus — monitoring and anomaly detection</a:t>
-            </a:r>
-          </a:p>
-        </p:txBody>
-      </p:sp>
-      <p:sp>
-        <p:nvSpPr>
-          <p:cNvPr id="6" name="TextBox 5"/>
+              <a:rPr sz="2800" b="1" i="0">
+                <a:solidFill>
+                  <a:srgbClr val="1A1A1A"/>
+                </a:solidFill>
+                <a:latin typeface="Arial"/>
+              </a:rPr>
+              <a:t>Sources</a:t>
+            </a:r>
+          </a:p>
+        </p:txBody>
+      </p:sp>
+      <p:sp>
+        <p:nvSpPr>
+          <p:cNvPr id="4" name="TextBox 3"/>
           <p:cNvSpPr txBox="1"/>
           <p:nvPr/>
         </p:nvSpPr>
         <p:spPr>
           <a:xfrm>
-            <a:off x="10058400" y="6473952"/>
-            <a:ext cx="1673352" cy="292608"/>
+            <a:off x="658368" y="1554480"/>
+            <a:ext cx="10789920" cy="3840480"/>
           </a:xfrm>
           <a:prstGeom prst="rect">
             <a:avLst/>
@@ -43838,7 +43395,111 @@
           </a:bodyPr>
           <a:lstStyle/>
           <a:p>
-            <a:pPr algn="r"/>
+            <a:pPr>
+              <a:spcAft>
+                <a:spcPts val="1200"/>
+              </a:spcAft>
+            </a:pPr>
+            <a:r>
+              <a:rPr sz="1700" b="0" i="0">
+                <a:solidFill>
+                  <a:srgbClr val="1A1A1A"/>
+                </a:solidFill>
+                <a:latin typeface="Arial"/>
+              </a:rPr>
+              <a:t>•  NIIS X-Road operational monitoring (niis.org)</a:t>
+            </a:r>
+          </a:p>
+          <a:p>
+            <a:pPr>
+              <a:spcAft>
+                <a:spcPts val="1200"/>
+              </a:spcAft>
+            </a:pPr>
+            <a:r>
+              <a:rPr sz="1700" b="0" i="0">
+                <a:solidFill>
+                  <a:srgbClr val="1A1A1A"/>
+                </a:solidFill>
+                <a:latin typeface="Arial"/>
+              </a:rPr>
+              <a:t>•  NIIS X-Road message log (niis.org)</a:t>
+            </a:r>
+          </a:p>
+          <a:p>
+            <a:pPr>
+              <a:spcAft>
+                <a:spcPts val="1200"/>
+              </a:spcAft>
+            </a:pPr>
+            <a:r>
+              <a:rPr sz="1700" b="0" i="0">
+                <a:solidFill>
+                  <a:srgbClr val="1A1A1A"/>
+                </a:solidFill>
+                <a:latin typeface="Arial"/>
+              </a:rPr>
+              <a:t>•  ITU DPI Safeguards</a:t>
+            </a:r>
+          </a:p>
+        </p:txBody>
+      </p:sp>
+      <p:sp>
+        <p:nvSpPr>
+          <p:cNvPr id="5" name="TextBox 4"/>
+          <p:cNvSpPr txBox="1"/>
+          <p:nvPr/>
+        </p:nvSpPr>
+        <p:spPr>
+          <a:xfrm>
+            <a:off x="658368" y="5806440"/>
+            <a:ext cx="10789920" cy="457200"/>
+          </a:xfrm>
+          <a:prstGeom prst="rect">
+            <a:avLst/>
+          </a:prstGeom>
+          <a:noFill/>
+        </p:spPr>
+        <p:txBody>
+          <a:bodyPr wrap="square">
+            <a:spAutoFit/>
+          </a:bodyPr>
+          <a:lstStyle/>
+          <a:p>
+            <a:r>
+              <a:rPr sz="1400" b="1" i="0">
+                <a:solidFill>
+                  <a:srgbClr val="006E96"/>
+                </a:solidFill>
+                <a:latin typeface="Arial"/>
+              </a:rPr>
+              <a:t>Find the link in the description.</a:t>
+            </a:r>
+          </a:p>
+        </p:txBody>
+      </p:sp>
+      <p:sp>
+        <p:nvSpPr>
+          <p:cNvPr id="6" name="TextBox 5"/>
+          <p:cNvSpPr txBox="1"/>
+          <p:nvPr/>
+        </p:nvSpPr>
+        <p:spPr>
+          <a:xfrm>
+            <a:off x="457200" y="6473952"/>
+            <a:ext cx="7772400" cy="292608"/>
+          </a:xfrm>
+          <a:prstGeom prst="rect">
+            <a:avLst/>
+          </a:prstGeom>
+          <a:noFill/>
+        </p:spPr>
+        <p:txBody>
+          <a:bodyPr wrap="square">
+            <a:spAutoFit/>
+          </a:bodyPr>
+          <a:lstStyle/>
+          <a:p>
             <a:r>
               <a:rPr sz="900" b="0" i="0">
                 <a:solidFill>
@@ -43846,7 +43507,7 @@
                 </a:solidFill>
                 <a:latin typeface="Arial"/>
               </a:rPr>
-              <a:t>www.itu.int</a:t>
+              <a:t>5.8 · Watch the bus — monitoring and anomaly detection</a:t>
             </a:r>
           </a:p>
         </p:txBody>
@@ -43871,58 +43532,14 @@
       <p:grpSpPr/>
       <p:sp>
         <p:nvSpPr>
-          <p:cNvPr id="2" name="Rectangle 1"/>
-          <p:cNvSpPr/>
-          <p:nvPr/>
-        </p:nvSpPr>
-        <p:spPr>
-          <a:xfrm>
-            <a:off x="457200" y="384048"/>
-            <a:ext cx="45720" cy="256032"/>
-          </a:xfrm>
-          <a:prstGeom prst="rect">
-            <a:avLst/>
-          </a:prstGeom>
-          <a:solidFill>
-            <a:srgbClr val="009CD6"/>
-          </a:solidFill>
-          <a:ln>
-            <a:noFill/>
-          </a:ln>
-          <a:effectLst/>
-        </p:spPr>
-        <p:style>
-          <a:lnRef idx="1">
-            <a:schemeClr val="accent1"/>
-          </a:lnRef>
-          <a:fillRef idx="3">
-            <a:schemeClr val="accent1"/>
-          </a:fillRef>
-          <a:effectRef idx="2">
-            <a:schemeClr val="accent1"/>
-          </a:effectRef>
-          <a:fontRef idx="minor">
-            <a:schemeClr val="lt1"/>
-          </a:fontRef>
-        </p:style>
-        <p:txBody>
-          <a:bodyPr rtlCol="0" anchor="ctr"/>
-          <a:lstStyle/>
-          <a:p>
-            <a:pPr algn="ctr"/>
-          </a:p>
-        </p:txBody>
-      </p:sp>
-      <p:sp>
-        <p:nvSpPr>
-          <p:cNvPr id="3" name="TextBox 2"/>
+          <p:cNvPr id="2" name="TextBox 1"/>
           <p:cNvSpPr txBox="1"/>
           <p:nvPr/>
         </p:nvSpPr>
         <p:spPr>
           <a:xfrm>
-            <a:off x="621792" y="274320"/>
-            <a:ext cx="11247120" cy="914400"/>
+            <a:off x="822960" y="822960"/>
+            <a:ext cx="7315200" cy="457200"/>
           </a:xfrm>
           <a:prstGeom prst="rect">
             <a:avLst/>
@@ -43936,27 +43553,27 @@
           <a:lstStyle/>
           <a:p>
             <a:r>
-              <a:rPr sz="2800" b="1" i="0">
-                <a:solidFill>
-                  <a:srgbClr val="1A1A1A"/>
-                </a:solidFill>
-                <a:latin typeface="Arial"/>
-              </a:rPr>
-              <a:t>Sources</a:t>
-            </a:r>
-          </a:p>
-        </p:txBody>
-      </p:sp>
-      <p:sp>
-        <p:nvSpPr>
-          <p:cNvPr id="4" name="TextBox 3"/>
+              <a:rPr sz="1200" b="1" i="0">
+                <a:solidFill>
+                  <a:srgbClr val="595959"/>
+                </a:solidFill>
+                <a:latin typeface="Arial"/>
+              </a:rPr>
+              <a:t>MODULE 5 · VIDEO 5.9</a:t>
+            </a:r>
+          </a:p>
+        </p:txBody>
+      </p:sp>
+      <p:sp>
+        <p:nvSpPr>
+          <p:cNvPr id="3" name="TextBox 2"/>
           <p:cNvSpPr txBox="1"/>
           <p:nvPr/>
         </p:nvSpPr>
         <p:spPr>
           <a:xfrm>
-            <a:off x="658368" y="1554480"/>
-            <a:ext cx="10789920" cy="3840480"/>
+            <a:off x="822960" y="1828800"/>
+            <a:ext cx="2011680" cy="1097280"/>
           </a:xfrm>
           <a:prstGeom prst="rect">
             <a:avLst/>
@@ -43969,65 +43586,28 @@
           </a:bodyPr>
           <a:lstStyle/>
           <a:p>
-            <a:pPr>
-              <a:spcAft>
-                <a:spcPts val="1200"/>
-              </a:spcAft>
-            </a:pPr>
-            <a:r>
-              <a:rPr sz="1700" b="0" i="0">
-                <a:solidFill>
-                  <a:srgbClr val="1A1A1A"/>
-                </a:solidFill>
-                <a:latin typeface="Arial"/>
-              </a:rPr>
-              <a:t>•  NIIS X-Road monitoring and operational logs (niis.org)</a:t>
-            </a:r>
-          </a:p>
-          <a:p>
-            <a:pPr>
-              <a:spcAft>
-                <a:spcPts val="1200"/>
-              </a:spcAft>
-            </a:pPr>
-            <a:r>
-              <a:rPr sz="1700" b="0" i="0">
-                <a:solidFill>
-                  <a:srgbClr val="1A1A1A"/>
-                </a:solidFill>
-                <a:latin typeface="Arial"/>
-              </a:rPr>
-              <a:t>•  The Linkup demonstration federation</a:t>
-            </a:r>
-          </a:p>
-          <a:p>
-            <a:pPr>
-              <a:spcAft>
-                <a:spcPts val="1200"/>
-              </a:spcAft>
-            </a:pPr>
-            <a:r>
-              <a:rPr sz="1700" b="0" i="0">
-                <a:solidFill>
-                  <a:srgbClr val="1A1A1A"/>
-                </a:solidFill>
-                <a:latin typeface="Arial"/>
-              </a:rPr>
-              <a:t>•  ITU DPI Safeguards</a:t>
-            </a:r>
-          </a:p>
-        </p:txBody>
-      </p:sp>
-      <p:sp>
-        <p:nvSpPr>
-          <p:cNvPr id="5" name="TextBox 4"/>
+            <a:r>
+              <a:rPr sz="6000" b="1" i="0">
+                <a:solidFill>
+                  <a:srgbClr val="009CD6"/>
+                </a:solidFill>
+                <a:latin typeface="Arial"/>
+              </a:rPr>
+              <a:t>5.9</a:t>
+            </a:r>
+          </a:p>
+        </p:txBody>
+      </p:sp>
+      <p:sp>
+        <p:nvSpPr>
+          <p:cNvPr id="4" name="TextBox 3"/>
           <p:cNvSpPr txBox="1"/>
           <p:nvPr/>
         </p:nvSpPr>
         <p:spPr>
           <a:xfrm>
-            <a:off x="658368" y="5806440"/>
-            <a:ext cx="10789920" cy="457200"/>
+            <a:off x="822960" y="2880360"/>
+            <a:ext cx="9601200" cy="1371600"/>
           </a:xfrm>
           <a:prstGeom prst="rect">
             <a:avLst/>
@@ -44041,27 +43621,27 @@
           <a:lstStyle/>
           <a:p>
             <a:r>
-              <a:rPr sz="1400" b="1" i="0">
-                <a:solidFill>
-                  <a:srgbClr val="006E96"/>
-                </a:solidFill>
-                <a:latin typeface="Arial"/>
-              </a:rPr>
-              <a:t>Find the link in the description.</a:t>
-            </a:r>
-          </a:p>
-        </p:txBody>
-      </p:sp>
-      <p:sp>
-        <p:nvSpPr>
-          <p:cNvPr id="6" name="TextBox 5"/>
+              <a:rPr sz="3400" b="1" i="0">
+                <a:solidFill>
+                  <a:srgbClr val="1A1A1A"/>
+                </a:solidFill>
+                <a:latin typeface="Arial"/>
+              </a:rPr>
+              <a:t>Keep the documents honest — the consistency cross-check</a:t>
+            </a:r>
+          </a:p>
+        </p:txBody>
+      </p:sp>
+      <p:sp>
+        <p:nvSpPr>
+          <p:cNvPr id="5" name="TextBox 4"/>
           <p:cNvSpPr txBox="1"/>
           <p:nvPr/>
         </p:nvSpPr>
         <p:spPr>
           <a:xfrm>
-            <a:off x="457200" y="6473952"/>
-            <a:ext cx="7772400" cy="292608"/>
+            <a:off x="822960" y="4343400"/>
+            <a:ext cx="9875520" cy="1554480"/>
           </a:xfrm>
           <a:prstGeom prst="rect">
             <a:avLst/>
@@ -44075,13 +43655,47 @@
           <a:lstStyle/>
           <a:p>
             <a:r>
-              <a:rPr sz="900" b="0" i="0">
+              <a:rPr sz="1700" b="0" i="1">
                 <a:solidFill>
                   <a:srgbClr val="595959"/>
                 </a:solidFill>
                 <a:latin typeface="Arial"/>
               </a:rPr>
-              <a:t>5.8 · Watch the bus — monitoring and anomaly detection</a:t>
+              <a:t>Keep the decree, the Governance Pack and the standards portfolio saying the same thing — a cross-check that catches drift across the three.</a:t>
+            </a:r>
+          </a:p>
+        </p:txBody>
+      </p:sp>
+      <p:sp>
+        <p:nvSpPr>
+          <p:cNvPr id="6" name="TextBox 5"/>
+          <p:cNvSpPr txBox="1"/>
+          <p:nvPr/>
+        </p:nvSpPr>
+        <p:spPr>
+          <a:xfrm>
+            <a:off x="822960" y="5989320"/>
+            <a:ext cx="7315200" cy="365760"/>
+          </a:xfrm>
+          <a:prstGeom prst="rect">
+            <a:avLst/>
+          </a:prstGeom>
+          <a:noFill/>
+        </p:spPr>
+        <p:txBody>
+          <a:bodyPr wrap="square">
+            <a:spAutoFit/>
+          </a:bodyPr>
+          <a:lstStyle/>
+          <a:p>
+            <a:r>
+              <a:rPr sz="1200" b="0" i="0">
+                <a:solidFill>
+                  <a:srgbClr val="595959"/>
+                </a:solidFill>
+                <a:latin typeface="Arial"/>
+              </a:rPr>
+              <a:t>standalone video · voice-over on text slides</a:t>
             </a:r>
           </a:p>
         </p:txBody>
@@ -44112,8 +43726,8 @@
         </p:nvSpPr>
         <p:spPr>
           <a:xfrm>
-            <a:off x="822960" y="822960"/>
-            <a:ext cx="7315200" cy="457200"/>
+            <a:off x="1005840" y="1325880"/>
+            <a:ext cx="5486400" cy="365760"/>
           </a:xfrm>
           <a:prstGeom prst="rect">
             <a:avLst/>
@@ -44129,11 +43743,11 @@
             <a:r>
               <a:rPr sz="1200" b="1" i="0">
                 <a:solidFill>
-                  <a:srgbClr val="595959"/>
-                </a:solidFill>
-                <a:latin typeface="Arial"/>
-              </a:rPr>
-              <a:t>MODULE 5 · VIDEO 5.9</a:t>
+                  <a:srgbClr val="006E96"/>
+                </a:solidFill>
+                <a:latin typeface="Arial"/>
+              </a:rPr>
+              <a:t>WHERE WE START</a:t>
             </a:r>
           </a:p>
         </p:txBody>
@@ -44146,8 +43760,8 @@
         </p:nvSpPr>
         <p:spPr>
           <a:xfrm>
-            <a:off x="822960" y="1828800"/>
-            <a:ext cx="2011680" cy="1097280"/>
+            <a:off x="1005840" y="1783080"/>
+            <a:ext cx="10149840" cy="1737360"/>
           </a:xfrm>
           <a:prstGeom prst="rect">
             <a:avLst/>
@@ -44161,13 +43775,13 @@
           <a:lstStyle/>
           <a:p>
             <a:r>
-              <a:rPr sz="6000" b="1" i="0">
-                <a:solidFill>
-                  <a:srgbClr val="009CD6"/>
-                </a:solidFill>
-                <a:latin typeface="Arial"/>
-              </a:rPr>
-              <a:t>5.9</a:t>
+              <a:rPr sz="3000" b="1" i="0">
+                <a:solidFill>
+                  <a:srgbClr val="1A1A1A"/>
+                </a:solidFill>
+                <a:latin typeface="Arial"/>
+              </a:rPr>
+              <a:t>Three documents that must agree — and, left alone, drift apart.</a:t>
             </a:r>
           </a:p>
         </p:txBody>
@@ -44180,8 +43794,8 @@
         </p:nvSpPr>
         <p:spPr>
           <a:xfrm>
-            <a:off x="822960" y="2880360"/>
-            <a:ext cx="9601200" cy="1371600"/>
+            <a:off x="1005840" y="3611880"/>
+            <a:ext cx="10149840" cy="2377440"/>
           </a:xfrm>
           <a:prstGeom prst="rect">
             <a:avLst/>
@@ -44194,14 +43808,35 @@
           </a:bodyPr>
           <a:lstStyle/>
           <a:p>
-            <a:r>
-              <a:rPr sz="3400" b="1" i="0">
-                <a:solidFill>
-                  <a:srgbClr val="1A1A1A"/>
-                </a:solidFill>
-                <a:latin typeface="Arial"/>
-              </a:rPr>
-              <a:t>Keep the documents honest — the consistency cross-check</a:t>
+            <a:pPr>
+              <a:spcAft>
+                <a:spcPts val="800"/>
+              </a:spcAft>
+            </a:pPr>
+            <a:r>
+              <a:rPr sz="1700" b="0" i="0">
+                <a:solidFill>
+                  <a:srgbClr val="595959"/>
+                </a:solidFill>
+                <a:latin typeface="Arial"/>
+              </a:rPr>
+              <a:t>The decree, the Governance Pack, the standards portfolio.</a:t>
+            </a:r>
+          </a:p>
+          <a:p>
+            <a:pPr>
+              <a:spcAft>
+                <a:spcPts val="800"/>
+              </a:spcAft>
+            </a:pPr>
+            <a:r>
+              <a:rPr sz="1700" b="0" i="0">
+                <a:solidFill>
+                  <a:srgbClr val="595959"/>
+                </a:solidFill>
+                <a:latin typeface="Arial"/>
+              </a:rPr>
+              <a:t>Find the contradictions before a reviewer does.</a:t>
             </a:r>
           </a:p>
         </p:txBody>
@@ -44214,8 +43849,8 @@
         </p:nvSpPr>
         <p:spPr>
           <a:xfrm>
-            <a:off x="822960" y="4343400"/>
-            <a:ext cx="9875520" cy="1554480"/>
+            <a:off x="457200" y="6473952"/>
+            <a:ext cx="7772400" cy="292608"/>
           </a:xfrm>
           <a:prstGeom prst="rect">
             <a:avLst/>
@@ -44229,13 +43864,13 @@
           <a:lstStyle/>
           <a:p>
             <a:r>
-              <a:rPr sz="1700" b="0" i="1">
+              <a:rPr sz="900" b="0" i="0">
                 <a:solidFill>
                   <a:srgbClr val="595959"/>
                 </a:solidFill>
                 <a:latin typeface="Arial"/>
               </a:rPr>
-              <a:t>Keep the decree, the Governance Pack and the standards portfolio saying the same thing — a cross-check that catches drift across the three.</a:t>
+              <a:t>5.9 · Keep the documents honest — the consistency cross-check</a:t>
             </a:r>
           </a:p>
         </p:txBody>
@@ -44248,8 +43883,8 @@
         </p:nvSpPr>
         <p:spPr>
           <a:xfrm>
-            <a:off x="822960" y="5989320"/>
-            <a:ext cx="7315200" cy="365760"/>
+            <a:off x="10058400" y="6473952"/>
+            <a:ext cx="1673352" cy="292608"/>
           </a:xfrm>
           <a:prstGeom prst="rect">
             <a:avLst/>
@@ -44262,14 +43897,15 @@
           </a:bodyPr>
           <a:lstStyle/>
           <a:p>
-            <a:r>
-              <a:rPr sz="1200" b="0" i="0">
+            <a:pPr algn="r"/>
+            <a:r>
+              <a:rPr sz="900" b="0" i="0">
                 <a:solidFill>
                   <a:srgbClr val="595959"/>
                 </a:solidFill>
                 <a:latin typeface="Arial"/>
               </a:rPr>
-              <a:t>standalone video · voice-over on text slides</a:t>
+              <a:t>www.itu.int</a:t>
             </a:r>
           </a:p>
         </p:txBody>
@@ -44294,14 +43930,58 @@
       <p:grpSpPr/>
       <p:sp>
         <p:nvSpPr>
-          <p:cNvPr id="2" name="TextBox 1"/>
+          <p:cNvPr id="2" name="Rectangle 1"/>
+          <p:cNvSpPr/>
+          <p:nvPr/>
+        </p:nvSpPr>
+        <p:spPr>
+          <a:xfrm>
+            <a:off x="457200" y="384048"/>
+            <a:ext cx="45720" cy="256032"/>
+          </a:xfrm>
+          <a:prstGeom prst="rect">
+            <a:avLst/>
+          </a:prstGeom>
+          <a:solidFill>
+            <a:srgbClr val="009CD6"/>
+          </a:solidFill>
+          <a:ln>
+            <a:noFill/>
+          </a:ln>
+          <a:effectLst/>
+        </p:spPr>
+        <p:style>
+          <a:lnRef idx="1">
+            <a:schemeClr val="accent1"/>
+          </a:lnRef>
+          <a:fillRef idx="3">
+            <a:schemeClr val="accent1"/>
+          </a:fillRef>
+          <a:effectRef idx="2">
+            <a:schemeClr val="accent1"/>
+          </a:effectRef>
+          <a:fontRef idx="minor">
+            <a:schemeClr val="lt1"/>
+          </a:fontRef>
+        </p:style>
+        <p:txBody>
+          <a:bodyPr rtlCol="0" anchor="ctr"/>
+          <a:lstStyle/>
+          <a:p>
+            <a:pPr algn="ctr"/>
+          </a:p>
+        </p:txBody>
+      </p:sp>
+      <p:sp>
+        <p:nvSpPr>
+          <p:cNvPr id="3" name="TextBox 2"/>
           <p:cNvSpPr txBox="1"/>
           <p:nvPr/>
         </p:nvSpPr>
         <p:spPr>
           <a:xfrm>
-            <a:off x="1005840" y="1325880"/>
-            <a:ext cx="5486400" cy="365760"/>
+            <a:off x="621792" y="274320"/>
+            <a:ext cx="11247120" cy="914400"/>
           </a:xfrm>
           <a:prstGeom prst="rect">
             <a:avLst/>
@@ -44315,27 +43995,80 @@
           <a:lstStyle/>
           <a:p>
             <a:r>
-              <a:rPr sz="1200" b="1" i="0">
-                <a:solidFill>
-                  <a:srgbClr val="006E96"/>
-                </a:solidFill>
-                <a:latin typeface="Arial"/>
-              </a:rPr>
-              <a:t>WHERE WE START</a:t>
-            </a:r>
-          </a:p>
-        </p:txBody>
-      </p:sp>
-      <p:sp>
-        <p:nvSpPr>
-          <p:cNvPr id="3" name="TextBox 2"/>
+              <a:rPr sz="2800" b="1" i="0">
+                <a:solidFill>
+                  <a:srgbClr val="1A1A1A"/>
+                </a:solidFill>
+                <a:latin typeface="Arial"/>
+              </a:rPr>
+              <a:t>Drift is specific and predictable</a:t>
+            </a:r>
+          </a:p>
+        </p:txBody>
+      </p:sp>
+      <p:sp>
+        <p:nvSpPr>
+          <p:cNvPr id="4" name="Oval 3"/>
+          <p:cNvSpPr/>
+          <p:nvPr/>
+        </p:nvSpPr>
+        <p:spPr>
+          <a:xfrm>
+            <a:off x="621792" y="1508760"/>
+            <a:ext cx="310896" cy="310896"/>
+          </a:xfrm>
+          <a:prstGeom prst="ellipse">
+            <a:avLst/>
+          </a:prstGeom>
+          <a:solidFill>
+            <a:srgbClr val="009CD6"/>
+          </a:solidFill>
+          <a:ln>
+            <a:noFill/>
+          </a:ln>
+          <a:effectLst/>
+        </p:spPr>
+        <p:style>
+          <a:lnRef idx="1">
+            <a:schemeClr val="accent1"/>
+          </a:lnRef>
+          <a:fillRef idx="3">
+            <a:schemeClr val="accent1"/>
+          </a:fillRef>
+          <a:effectRef idx="2">
+            <a:schemeClr val="accent1"/>
+          </a:effectRef>
+          <a:fontRef idx="minor">
+            <a:schemeClr val="lt1"/>
+          </a:fontRef>
+        </p:style>
+        <p:txBody>
+          <a:bodyPr rtlCol="0" anchor="ctr" lIns="0" rIns="0" tIns="0" bIns="0" wrap="square"/>
+          <a:lstStyle/>
+          <a:p>
+            <a:pPr algn="ctr"/>
+            <a:r>
+              <a:rPr sz="1300" b="1" i="0">
+                <a:solidFill>
+                  <a:srgbClr val="FFFFFF"/>
+                </a:solidFill>
+                <a:latin typeface="Arial"/>
+              </a:rPr>
+              <a:t>1</a:t>
+            </a:r>
+          </a:p>
+        </p:txBody>
+      </p:sp>
+      <p:sp>
+        <p:nvSpPr>
+          <p:cNvPr id="5" name="TextBox 4"/>
           <p:cNvSpPr txBox="1"/>
           <p:nvPr/>
         </p:nvSpPr>
         <p:spPr>
           <a:xfrm>
-            <a:off x="1005840" y="1783080"/>
-            <a:ext cx="10149840" cy="1737360"/>
+            <a:off x="1115568" y="1463040"/>
+            <a:ext cx="10527487" cy="1028699"/>
           </a:xfrm>
           <a:prstGeom prst="rect">
             <a:avLst/>
@@ -44348,28 +44081,146 @@
           </a:bodyPr>
           <a:lstStyle/>
           <a:p>
-            <a:r>
-              <a:rPr sz="3000" b="1" i="0">
+            <a:pPr>
+              <a:spcAft>
+                <a:spcPts val="300"/>
+              </a:spcAft>
+            </a:pPr>
+            <a:r>
+              <a:rPr sz="1900" b="1" i="0">
                 <a:solidFill>
                   <a:srgbClr val="1A1A1A"/>
                 </a:solidFill>
                 <a:latin typeface="Arial"/>
               </a:rPr>
-              <a:t>Three documents that must agree — and, left alone, drift apart.</a:t>
-            </a:r>
-          </a:p>
-        </p:txBody>
-      </p:sp>
-      <p:sp>
-        <p:nvSpPr>
-          <p:cNvPr id="4" name="TextBox 3"/>
+              <a:t>A standard updated in the portfolio</a:t>
+            </a:r>
+          </a:p>
+          <a:p>
+            <a:pPr>
+              <a:spcAft>
+                <a:spcPts val="300"/>
+              </a:spcAft>
+            </a:pPr>
+            <a:r>
+              <a:rPr sz="1550" b="0" i="0">
+                <a:solidFill>
+                  <a:srgbClr val="595959"/>
+                </a:solidFill>
+                <a:latin typeface="Arial"/>
+              </a:rPr>
+              <a:t>But the decree still references the old version.</a:t>
+            </a:r>
+          </a:p>
+        </p:txBody>
+      </p:sp>
+      <p:sp>
+        <p:nvSpPr>
+          <p:cNvPr id="6" name="Rectangle 5"/>
+          <p:cNvSpPr/>
+          <p:nvPr/>
+        </p:nvSpPr>
+        <p:spPr>
+          <a:xfrm>
+            <a:off x="621792" y="2496312"/>
+            <a:ext cx="10881360" cy="12700"/>
+          </a:xfrm>
+          <a:prstGeom prst="rect">
+            <a:avLst/>
+          </a:prstGeom>
+          <a:solidFill>
+            <a:srgbClr val="DDECF4"/>
+          </a:solidFill>
+          <a:ln>
+            <a:noFill/>
+          </a:ln>
+          <a:effectLst/>
+        </p:spPr>
+        <p:style>
+          <a:lnRef idx="1">
+            <a:schemeClr val="accent1"/>
+          </a:lnRef>
+          <a:fillRef idx="3">
+            <a:schemeClr val="accent1"/>
+          </a:fillRef>
+          <a:effectRef idx="2">
+            <a:schemeClr val="accent1"/>
+          </a:effectRef>
+          <a:fontRef idx="minor">
+            <a:schemeClr val="lt1"/>
+          </a:fontRef>
+        </p:style>
+        <p:txBody>
+          <a:bodyPr rtlCol="0" anchor="ctr"/>
+          <a:lstStyle/>
+          <a:p>
+            <a:pPr algn="ctr"/>
+          </a:p>
+        </p:txBody>
+      </p:sp>
+      <p:sp>
+        <p:nvSpPr>
+          <p:cNvPr id="7" name="Oval 6"/>
+          <p:cNvSpPr/>
+          <p:nvPr/>
+        </p:nvSpPr>
+        <p:spPr>
+          <a:xfrm>
+            <a:off x="621792" y="2583179"/>
+            <a:ext cx="310896" cy="310896"/>
+          </a:xfrm>
+          <a:prstGeom prst="ellipse">
+            <a:avLst/>
+          </a:prstGeom>
+          <a:solidFill>
+            <a:srgbClr val="009CD6"/>
+          </a:solidFill>
+          <a:ln>
+            <a:noFill/>
+          </a:ln>
+          <a:effectLst/>
+        </p:spPr>
+        <p:style>
+          <a:lnRef idx="1">
+            <a:schemeClr val="accent1"/>
+          </a:lnRef>
+          <a:fillRef idx="3">
+            <a:schemeClr val="accent1"/>
+          </a:fillRef>
+          <a:effectRef idx="2">
+            <a:schemeClr val="accent1"/>
+          </a:effectRef>
+          <a:fontRef idx="minor">
+            <a:schemeClr val="lt1"/>
+          </a:fontRef>
+        </p:style>
+        <p:txBody>
+          <a:bodyPr rtlCol="0" anchor="ctr" lIns="0" rIns="0" tIns="0" bIns="0" wrap="square"/>
+          <a:lstStyle/>
+          <a:p>
+            <a:pPr algn="ctr"/>
+            <a:r>
+              <a:rPr sz="1300" b="1" i="0">
+                <a:solidFill>
+                  <a:srgbClr val="FFFFFF"/>
+                </a:solidFill>
+                <a:latin typeface="Arial"/>
+              </a:rPr>
+              <a:t>2</a:t>
+            </a:r>
+          </a:p>
+        </p:txBody>
+      </p:sp>
+      <p:sp>
+        <p:nvSpPr>
+          <p:cNvPr id="8" name="TextBox 7"/>
           <p:cNvSpPr txBox="1"/>
           <p:nvPr/>
         </p:nvSpPr>
         <p:spPr>
           <a:xfrm>
-            <a:off x="1005840" y="3611880"/>
-            <a:ext cx="10149840" cy="2377440"/>
+            <a:off x="1115568" y="2537460"/>
+            <a:ext cx="10527487" cy="1028699"/>
           </a:xfrm>
           <a:prstGeom prst="rect">
             <a:avLst/>
@@ -44384,47 +44235,144 @@
           <a:p>
             <a:pPr>
               <a:spcAft>
-                <a:spcPts val="800"/>
+                <a:spcPts val="300"/>
               </a:spcAft>
             </a:pPr>
             <a:r>
-              <a:rPr sz="1700" b="0" i="0">
-                <a:solidFill>
-                  <a:srgbClr val="595959"/>
-                </a:solidFill>
-                <a:latin typeface="Arial"/>
-              </a:rPr>
-              <a:t>The decree, the Governance Pack, the standards portfolio.</a:t>
+              <a:rPr sz="1900" b="1" i="0">
+                <a:solidFill>
+                  <a:srgbClr val="1A1A1A"/>
+                </a:solidFill>
+                <a:latin typeface="Arial"/>
+              </a:rPr>
+              <a:t>A body in the RACI</a:t>
             </a:r>
           </a:p>
           <a:p>
             <a:pPr>
               <a:spcAft>
-                <a:spcPts val="800"/>
+                <a:spcPts val="300"/>
               </a:spcAft>
             </a:pPr>
             <a:r>
-              <a:rPr sz="1700" b="0" i="0">
+              <a:rPr sz="1550" b="0" i="0">
                 <a:solidFill>
                   <a:srgbClr val="595959"/>
                 </a:solidFill>
                 <a:latin typeface="Arial"/>
               </a:rPr>
-              <a:t>Find the contradictions before a reviewer does.</a:t>
-            </a:r>
-          </a:p>
-        </p:txBody>
-      </p:sp>
-      <p:sp>
-        <p:nvSpPr>
-          <p:cNvPr id="5" name="TextBox 4"/>
+              <a:t>That the Governance Pack no longer describes.</a:t>
+            </a:r>
+          </a:p>
+        </p:txBody>
+      </p:sp>
+      <p:sp>
+        <p:nvSpPr>
+          <p:cNvPr id="9" name="Rectangle 8"/>
+          <p:cNvSpPr/>
+          <p:nvPr/>
+        </p:nvSpPr>
+        <p:spPr>
+          <a:xfrm>
+            <a:off x="621792" y="3570732"/>
+            <a:ext cx="10881360" cy="12700"/>
+          </a:xfrm>
+          <a:prstGeom prst="rect">
+            <a:avLst/>
+          </a:prstGeom>
+          <a:solidFill>
+            <a:srgbClr val="DDECF4"/>
+          </a:solidFill>
+          <a:ln>
+            <a:noFill/>
+          </a:ln>
+          <a:effectLst/>
+        </p:spPr>
+        <p:style>
+          <a:lnRef idx="1">
+            <a:schemeClr val="accent1"/>
+          </a:lnRef>
+          <a:fillRef idx="3">
+            <a:schemeClr val="accent1"/>
+          </a:fillRef>
+          <a:effectRef idx="2">
+            <a:schemeClr val="accent1"/>
+          </a:effectRef>
+          <a:fontRef idx="minor">
+            <a:schemeClr val="lt1"/>
+          </a:fontRef>
+        </p:style>
+        <p:txBody>
+          <a:bodyPr rtlCol="0" anchor="ctr"/>
+          <a:lstStyle/>
+          <a:p>
+            <a:pPr algn="ctr"/>
+          </a:p>
+        </p:txBody>
+      </p:sp>
+      <p:sp>
+        <p:nvSpPr>
+          <p:cNvPr id="10" name="Oval 9"/>
+          <p:cNvSpPr/>
+          <p:nvPr/>
+        </p:nvSpPr>
+        <p:spPr>
+          <a:xfrm>
+            <a:off x="621792" y="3657599"/>
+            <a:ext cx="310896" cy="310896"/>
+          </a:xfrm>
+          <a:prstGeom prst="ellipse">
+            <a:avLst/>
+          </a:prstGeom>
+          <a:solidFill>
+            <a:srgbClr val="009CD6"/>
+          </a:solidFill>
+          <a:ln>
+            <a:noFill/>
+          </a:ln>
+          <a:effectLst/>
+        </p:spPr>
+        <p:style>
+          <a:lnRef idx="1">
+            <a:schemeClr val="accent1"/>
+          </a:lnRef>
+          <a:fillRef idx="3">
+            <a:schemeClr val="accent1"/>
+          </a:fillRef>
+          <a:effectRef idx="2">
+            <a:schemeClr val="accent1"/>
+          </a:effectRef>
+          <a:fontRef idx="minor">
+            <a:schemeClr val="lt1"/>
+          </a:fontRef>
+        </p:style>
+        <p:txBody>
+          <a:bodyPr rtlCol="0" anchor="ctr" lIns="0" rIns="0" tIns="0" bIns="0" wrap="square"/>
+          <a:lstStyle/>
+          <a:p>
+            <a:pPr algn="ctr"/>
+            <a:r>
+              <a:rPr sz="1300" b="1" i="0">
+                <a:solidFill>
+                  <a:srgbClr val="FFFFFF"/>
+                </a:solidFill>
+                <a:latin typeface="Arial"/>
+              </a:rPr>
+              <a:t>3</a:t>
+            </a:r>
+          </a:p>
+        </p:txBody>
+      </p:sp>
+      <p:sp>
+        <p:nvSpPr>
+          <p:cNvPr id="11" name="TextBox 10"/>
           <p:cNvSpPr txBox="1"/>
           <p:nvPr/>
         </p:nvSpPr>
         <p:spPr>
           <a:xfrm>
-            <a:off x="457200" y="6473952"/>
-            <a:ext cx="7772400" cy="292608"/>
+            <a:off x="1115568" y="3611879"/>
+            <a:ext cx="10527487" cy="1028699"/>
           </a:xfrm>
           <a:prstGeom prst="rect">
             <a:avLst/>
@@ -44437,28 +44385,146 @@
           </a:bodyPr>
           <a:lstStyle/>
           <a:p>
-            <a:r>
-              <a:rPr sz="900" b="0" i="0">
+            <a:pPr>
+              <a:spcAft>
+                <a:spcPts val="300"/>
+              </a:spcAft>
+            </a:pPr>
+            <a:r>
+              <a:rPr sz="1900" b="1" i="0">
+                <a:solidFill>
+                  <a:srgbClr val="1A1A1A"/>
+                </a:solidFill>
+                <a:latin typeface="Arial"/>
+              </a:rPr>
+              <a:t>An exchange the decree authorises</a:t>
+            </a:r>
+          </a:p>
+          <a:p>
+            <a:pPr>
+              <a:spcAft>
+                <a:spcPts val="300"/>
+              </a:spcAft>
+            </a:pPr>
+            <a:r>
+              <a:rPr sz="1550" b="0" i="0">
                 <a:solidFill>
                   <a:srgbClr val="595959"/>
                 </a:solidFill>
                 <a:latin typeface="Arial"/>
               </a:rPr>
-              <a:t>5.9 · Keep the documents honest — the consistency cross-check</a:t>
-            </a:r>
-          </a:p>
-        </p:txBody>
-      </p:sp>
-      <p:sp>
-        <p:nvSpPr>
-          <p:cNvPr id="6" name="TextBox 5"/>
+              <a:t>That no service implements — or a service the decree never authorised.</a:t>
+            </a:r>
+          </a:p>
+        </p:txBody>
+      </p:sp>
+      <p:sp>
+        <p:nvSpPr>
+          <p:cNvPr id="12" name="Rectangle 11"/>
+          <p:cNvSpPr/>
+          <p:nvPr/>
+        </p:nvSpPr>
+        <p:spPr>
+          <a:xfrm>
+            <a:off x="621792" y="4645152"/>
+            <a:ext cx="10881360" cy="12700"/>
+          </a:xfrm>
+          <a:prstGeom prst="rect">
+            <a:avLst/>
+          </a:prstGeom>
+          <a:solidFill>
+            <a:srgbClr val="DDECF4"/>
+          </a:solidFill>
+          <a:ln>
+            <a:noFill/>
+          </a:ln>
+          <a:effectLst/>
+        </p:spPr>
+        <p:style>
+          <a:lnRef idx="1">
+            <a:schemeClr val="accent1"/>
+          </a:lnRef>
+          <a:fillRef idx="3">
+            <a:schemeClr val="accent1"/>
+          </a:fillRef>
+          <a:effectRef idx="2">
+            <a:schemeClr val="accent1"/>
+          </a:effectRef>
+          <a:fontRef idx="minor">
+            <a:schemeClr val="lt1"/>
+          </a:fontRef>
+        </p:style>
+        <p:txBody>
+          <a:bodyPr rtlCol="0" anchor="ctr"/>
+          <a:lstStyle/>
+          <a:p>
+            <a:pPr algn="ctr"/>
+          </a:p>
+        </p:txBody>
+      </p:sp>
+      <p:sp>
+        <p:nvSpPr>
+          <p:cNvPr id="13" name="Oval 12"/>
+          <p:cNvSpPr/>
+          <p:nvPr/>
+        </p:nvSpPr>
+        <p:spPr>
+          <a:xfrm>
+            <a:off x="621792" y="4732020"/>
+            <a:ext cx="310896" cy="310896"/>
+          </a:xfrm>
+          <a:prstGeom prst="ellipse">
+            <a:avLst/>
+          </a:prstGeom>
+          <a:solidFill>
+            <a:srgbClr val="009CD6"/>
+          </a:solidFill>
+          <a:ln>
+            <a:noFill/>
+          </a:ln>
+          <a:effectLst/>
+        </p:spPr>
+        <p:style>
+          <a:lnRef idx="1">
+            <a:schemeClr val="accent1"/>
+          </a:lnRef>
+          <a:fillRef idx="3">
+            <a:schemeClr val="accent1"/>
+          </a:fillRef>
+          <a:effectRef idx="2">
+            <a:schemeClr val="accent1"/>
+          </a:effectRef>
+          <a:fontRef idx="minor">
+            <a:schemeClr val="lt1"/>
+          </a:fontRef>
+        </p:style>
+        <p:txBody>
+          <a:bodyPr rtlCol="0" anchor="ctr" lIns="0" rIns="0" tIns="0" bIns="0" wrap="square"/>
+          <a:lstStyle/>
+          <a:p>
+            <a:pPr algn="ctr"/>
+            <a:r>
+              <a:rPr sz="1300" b="1" i="0">
+                <a:solidFill>
+                  <a:srgbClr val="FFFFFF"/>
+                </a:solidFill>
+                <a:latin typeface="Arial"/>
+              </a:rPr>
+              <a:t>4</a:t>
+            </a:r>
+          </a:p>
+        </p:txBody>
+      </p:sp>
+      <p:sp>
+        <p:nvSpPr>
+          <p:cNvPr id="14" name="TextBox 13"/>
           <p:cNvSpPr txBox="1"/>
           <p:nvPr/>
         </p:nvSpPr>
         <p:spPr>
           <a:xfrm>
-            <a:off x="10058400" y="6473952"/>
-            <a:ext cx="1673352" cy="292608"/>
+            <a:off x="1115568" y="4686300"/>
+            <a:ext cx="10527487" cy="1028699"/>
           </a:xfrm>
           <a:prstGeom prst="rect">
             <a:avLst/>
@@ -44471,7 +44537,95 @@
           </a:bodyPr>
           <a:lstStyle/>
           <a:p>
-            <a:pPr algn="r"/>
+            <a:pPr>
+              <a:spcAft>
+                <a:spcPts val="300"/>
+              </a:spcAft>
+            </a:pPr>
+            <a:r>
+              <a:rPr sz="1900" b="1" i="0">
+                <a:solidFill>
+                  <a:srgbClr val="1A1A1A"/>
+                </a:solidFill>
+                <a:latin typeface="Arial"/>
+              </a:rPr>
+              <a:t>One term, three meanings</a:t>
+            </a:r>
+          </a:p>
+          <a:p>
+            <a:pPr>
+              <a:spcAft>
+                <a:spcPts val="300"/>
+              </a:spcAft>
+            </a:pPr>
+            <a:r>
+              <a:rPr sz="1550" b="0" i="0">
+                <a:solidFill>
+                  <a:srgbClr val="595959"/>
+                </a:solidFill>
+                <a:latin typeface="Arial"/>
+              </a:rPr>
+              <a:t>"Member", "service", "authority" — used slightly differently in each.</a:t>
+            </a:r>
+          </a:p>
+        </p:txBody>
+      </p:sp>
+      <p:sp>
+        <p:nvSpPr>
+          <p:cNvPr id="15" name="TextBox 14"/>
+          <p:cNvSpPr txBox="1"/>
+          <p:nvPr/>
+        </p:nvSpPr>
+        <p:spPr>
+          <a:xfrm>
+            <a:off x="658368" y="5870448"/>
+            <a:ext cx="10881360" cy="548640"/>
+          </a:xfrm>
+          <a:prstGeom prst="rect">
+            <a:avLst/>
+          </a:prstGeom>
+          <a:noFill/>
+        </p:spPr>
+        <p:txBody>
+          <a:bodyPr wrap="square">
+            <a:spAutoFit/>
+          </a:bodyPr>
+          <a:lstStyle/>
+          <a:p>
+            <a:r>
+              <a:rPr sz="1550" b="1" i="0">
+                <a:solidFill>
+                  <a:srgbClr val="006E96"/>
+                </a:solidFill>
+                <a:latin typeface="Arial"/>
+              </a:rPr>
+              <a:t>Each one quietly undermines the framework the moment someone notices.</a:t>
+            </a:r>
+          </a:p>
+        </p:txBody>
+      </p:sp>
+      <p:sp>
+        <p:nvSpPr>
+          <p:cNvPr id="16" name="TextBox 15"/>
+          <p:cNvSpPr txBox="1"/>
+          <p:nvPr/>
+        </p:nvSpPr>
+        <p:spPr>
+          <a:xfrm>
+            <a:off x="457200" y="6473952"/>
+            <a:ext cx="7772400" cy="292608"/>
+          </a:xfrm>
+          <a:prstGeom prst="rect">
+            <a:avLst/>
+          </a:prstGeom>
+          <a:noFill/>
+        </p:spPr>
+        <p:txBody>
+          <a:bodyPr wrap="square">
+            <a:spAutoFit/>
+          </a:bodyPr>
+          <a:lstStyle/>
+          <a:p>
             <a:r>
               <a:rPr sz="900" b="0" i="0">
                 <a:solidFill>
@@ -44479,7 +44633,7 @@
                 </a:solidFill>
                 <a:latin typeface="Arial"/>
               </a:rPr>
-              <a:t>www.itu.int</a:t>
+              <a:t>5.9 · Keep the documents honest — the consistency cross-check</a:t>
             </a:r>
           </a:p>
         </p:txBody>
@@ -44575,27 +44729,137 @@
                 </a:solidFill>
                 <a:latin typeface="Arial"/>
               </a:rPr>
-              <a:t>Drift is specific and predictable</a:t>
-            </a:r>
-          </a:p>
-        </p:txBody>
-      </p:sp>
-      <p:sp>
-        <p:nvSpPr>
-          <p:cNvPr id="4" name="Oval 3"/>
+              <a:t>Read the three together — before a reviewer does</a:t>
+            </a:r>
+          </a:p>
+        </p:txBody>
+      </p:sp>
+      <p:cxnSp>
+        <p:nvCxnSpPr>
+          <p:cNvPr id="4" name="Connector 3"/>
+          <p:cNvCxnSpPr/>
+          <p:nvPr/>
+        </p:nvCxnSpPr>
+        <p:spPr>
+          <a:xfrm>
+            <a:off x="4544568" y="2125980"/>
+            <a:ext cx="1719072" cy="1211580"/>
+          </a:xfrm>
+          <a:prstGeom prst="line">
+            <a:avLst/>
+          </a:prstGeom>
+          <a:ln w="25400">
+            <a:solidFill>
+              <a:srgbClr val="006E96"/>
+            </a:solidFill>
+            <a:tailEnd type="triangle" w="med" len="med"/>
+          </a:ln>
+        </p:spPr>
+        <p:style>
+          <a:lnRef idx="2">
+            <a:schemeClr val="accent1"/>
+          </a:lnRef>
+          <a:fillRef idx="0">
+            <a:schemeClr val="accent1"/>
+          </a:fillRef>
+          <a:effectRef idx="1">
+            <a:schemeClr val="accent1"/>
+          </a:effectRef>
+          <a:fontRef idx="minor">
+            <a:schemeClr val="tx1"/>
+          </a:fontRef>
+        </p:style>
+      </p:cxnSp>
+      <p:cxnSp>
+        <p:nvCxnSpPr>
+          <p:cNvPr id="5" name="Connector 4"/>
+          <p:cNvCxnSpPr/>
+          <p:nvPr/>
+        </p:nvCxnSpPr>
+        <p:spPr>
+          <a:xfrm flipV="1">
+            <a:off x="4544568" y="3337560"/>
+            <a:ext cx="1719072" cy="22860"/>
+          </a:xfrm>
+          <a:prstGeom prst="line">
+            <a:avLst/>
+          </a:prstGeom>
+          <a:ln w="25400">
+            <a:solidFill>
+              <a:srgbClr val="006E96"/>
+            </a:solidFill>
+            <a:tailEnd type="triangle" w="med" len="med"/>
+          </a:ln>
+        </p:spPr>
+        <p:style>
+          <a:lnRef idx="2">
+            <a:schemeClr val="accent1"/>
+          </a:lnRef>
+          <a:fillRef idx="0">
+            <a:schemeClr val="accent1"/>
+          </a:fillRef>
+          <a:effectRef idx="1">
+            <a:schemeClr val="accent1"/>
+          </a:effectRef>
+          <a:fontRef idx="minor">
+            <a:schemeClr val="tx1"/>
+          </a:fontRef>
+        </p:style>
+      </p:cxnSp>
+      <p:cxnSp>
+        <p:nvCxnSpPr>
+          <p:cNvPr id="6" name="Connector 5"/>
+          <p:cNvCxnSpPr/>
+          <p:nvPr/>
+        </p:nvCxnSpPr>
+        <p:spPr>
+          <a:xfrm flipV="1">
+            <a:off x="4544568" y="3337560"/>
+            <a:ext cx="1719072" cy="1257300"/>
+          </a:xfrm>
+          <a:prstGeom prst="line">
+            <a:avLst/>
+          </a:prstGeom>
+          <a:ln w="25400">
+            <a:solidFill>
+              <a:srgbClr val="006E96"/>
+            </a:solidFill>
+            <a:tailEnd type="triangle" w="med" len="med"/>
+          </a:ln>
+        </p:spPr>
+        <p:style>
+          <a:lnRef idx="2">
+            <a:schemeClr val="accent1"/>
+          </a:lnRef>
+          <a:fillRef idx="0">
+            <a:schemeClr val="accent1"/>
+          </a:fillRef>
+          <a:effectRef idx="1">
+            <a:schemeClr val="accent1"/>
+          </a:effectRef>
+          <a:fontRef idx="minor">
+            <a:schemeClr val="tx1"/>
+          </a:fontRef>
+        </p:style>
+      </p:cxnSp>
+      <p:sp>
+        <p:nvSpPr>
+          <p:cNvPr id="7" name="Rounded Rectangle 6"/>
           <p:cNvSpPr/>
           <p:nvPr/>
         </p:nvSpPr>
         <p:spPr>
           <a:xfrm>
-            <a:off x="621792" y="1508760"/>
-            <a:ext cx="310896" cy="310896"/>
-          </a:xfrm>
-          <a:prstGeom prst="ellipse">
-            <a:avLst/>
+            <a:off x="658368" y="1600200"/>
+            <a:ext cx="3840480" cy="1051560"/>
+          </a:xfrm>
+          <a:prstGeom prst="roundRect">
+            <a:avLst>
+              <a:gd name="adj" fmla="val 8000"/>
+            </a:avLst>
           </a:prstGeom>
           <a:solidFill>
-            <a:srgbClr val="009CD6"/>
+            <a:srgbClr val="E5F5FB"/>
           </a:solidFill>
           <a:ln>
             <a:noFill/>
@@ -44617,93 +44881,60 @@
           </a:fontRef>
         </p:style>
         <p:txBody>
-          <a:bodyPr rtlCol="0" anchor="ctr" lIns="0" rIns="0" tIns="0" bIns="0" wrap="square"/>
-          <a:lstStyle/>
-          <a:p>
-            <a:pPr algn="ctr"/>
-            <a:r>
-              <a:rPr sz="1300" b="1" i="0">
-                <a:solidFill>
-                  <a:srgbClr val="FFFFFF"/>
-                </a:solidFill>
-                <a:latin typeface="Arial"/>
-              </a:rPr>
-              <a:t>1</a:t>
-            </a:r>
-          </a:p>
-        </p:txBody>
-      </p:sp>
-      <p:sp>
-        <p:nvSpPr>
-          <p:cNvPr id="5" name="TextBox 4"/>
-          <p:cNvSpPr txBox="1"/>
-          <p:nvPr/>
-        </p:nvSpPr>
-        <p:spPr>
-          <a:xfrm>
-            <a:off x="1115568" y="1463040"/>
-            <a:ext cx="10527487" cy="1028699"/>
-          </a:xfrm>
-          <a:prstGeom prst="rect">
-            <a:avLst/>
-          </a:prstGeom>
-          <a:noFill/>
-        </p:spPr>
-        <p:txBody>
-          <a:bodyPr wrap="square">
-            <a:spAutoFit/>
-          </a:bodyPr>
-          <a:lstStyle/>
-          <a:p>
-            <a:pPr>
+          <a:bodyPr rtlCol="0" anchor="t" lIns="128016" rIns="128016" tIns="91440" bIns="54864" wrap="square"/>
+          <a:lstStyle/>
+          <a:p>
+            <a:pPr algn="l">
               <a:spcAft>
                 <a:spcPts val="300"/>
               </a:spcAft>
             </a:pPr>
             <a:r>
-              <a:rPr sz="1900" b="1" i="0">
-                <a:solidFill>
-                  <a:srgbClr val="1A1A1A"/>
-                </a:solidFill>
-                <a:latin typeface="Arial"/>
-              </a:rPr>
-              <a:t>A standard updated in the portfolio</a:t>
-            </a:r>
-          </a:p>
-          <a:p>
-            <a:pPr>
+              <a:rPr sz="1700" b="1" i="0">
+                <a:solidFill>
+                  <a:srgbClr val="006E96"/>
+                </a:solidFill>
+                <a:latin typeface="Arial"/>
+              </a:rPr>
+              <a:t>THE DECREE</a:t>
+            </a:r>
+          </a:p>
+          <a:p>
+            <a:pPr algn="l">
               <a:spcAft>
                 <a:spcPts val="300"/>
               </a:spcAft>
             </a:pPr>
             <a:r>
-              <a:rPr sz="1550" b="0" i="0">
-                <a:solidFill>
-                  <a:srgbClr val="595959"/>
-                </a:solidFill>
-                <a:latin typeface="Arial"/>
-              </a:rPr>
-              <a:t>But the decree still references the old version.</a:t>
-            </a:r>
-          </a:p>
-        </p:txBody>
-      </p:sp>
-      <p:sp>
-        <p:nvSpPr>
-          <p:cNvPr id="6" name="Rectangle 5"/>
+              <a:rPr sz="1600" b="0" i="0">
+                <a:solidFill>
+                  <a:srgbClr val="1A1A1A"/>
+                </a:solidFill>
+                <a:latin typeface="Arial"/>
+              </a:rPr>
+              <a:t>The legal layer</a:t>
+            </a:r>
+          </a:p>
+        </p:txBody>
+      </p:sp>
+      <p:sp>
+        <p:nvSpPr>
+          <p:cNvPr id="8" name="Rounded Rectangle 7"/>
           <p:cNvSpPr/>
           <p:nvPr/>
         </p:nvSpPr>
         <p:spPr>
           <a:xfrm>
-            <a:off x="621792" y="2496312"/>
-            <a:ext cx="10881360" cy="12700"/>
-          </a:xfrm>
-          <a:prstGeom prst="rect">
-            <a:avLst/>
+            <a:off x="658368" y="2834640"/>
+            <a:ext cx="3840480" cy="1051560"/>
+          </a:xfrm>
+          <a:prstGeom prst="roundRect">
+            <a:avLst>
+              <a:gd name="adj" fmla="val 8000"/>
+            </a:avLst>
           </a:prstGeom>
           <a:solidFill>
-            <a:srgbClr val="DDECF4"/>
+            <a:srgbClr val="E5F5FB"/>
           </a:solidFill>
           <a:ln>
             <a:noFill/>
@@ -44725,29 +44956,60 @@
           </a:fontRef>
         </p:style>
         <p:txBody>
-          <a:bodyPr rtlCol="0" anchor="ctr"/>
-          <a:lstStyle/>
-          <a:p>
-            <a:pPr algn="ctr"/>
-          </a:p>
-        </p:txBody>
-      </p:sp>
-      <p:sp>
-        <p:nvSpPr>
-          <p:cNvPr id="7" name="Oval 6"/>
+          <a:bodyPr rtlCol="0" anchor="t" lIns="128016" rIns="128016" tIns="91440" bIns="54864" wrap="square"/>
+          <a:lstStyle/>
+          <a:p>
+            <a:pPr algn="l">
+              <a:spcAft>
+                <a:spcPts val="300"/>
+              </a:spcAft>
+            </a:pPr>
+            <a:r>
+              <a:rPr sz="1700" b="1" i="0">
+                <a:solidFill>
+                  <a:srgbClr val="006E96"/>
+                </a:solidFill>
+                <a:latin typeface="Arial"/>
+              </a:rPr>
+              <a:t>THE GOVERNANCE PACK</a:t>
+            </a:r>
+          </a:p>
+          <a:p>
+            <a:pPr algn="l">
+              <a:spcAft>
+                <a:spcPts val="300"/>
+              </a:spcAft>
+            </a:pPr>
+            <a:r>
+              <a:rPr sz="1600" b="0" i="0">
+                <a:solidFill>
+                  <a:srgbClr val="1A1A1A"/>
+                </a:solidFill>
+                <a:latin typeface="Arial"/>
+              </a:rPr>
+              <a:t>The organisational layer</a:t>
+            </a:r>
+          </a:p>
+        </p:txBody>
+      </p:sp>
+      <p:sp>
+        <p:nvSpPr>
+          <p:cNvPr id="9" name="Rounded Rectangle 8"/>
           <p:cNvSpPr/>
           <p:nvPr/>
         </p:nvSpPr>
         <p:spPr>
           <a:xfrm>
-            <a:off x="621792" y="2583179"/>
-            <a:ext cx="310896" cy="310896"/>
-          </a:xfrm>
-          <a:prstGeom prst="ellipse">
-            <a:avLst/>
+            <a:off x="658368" y="4069080"/>
+            <a:ext cx="3840480" cy="1051560"/>
+          </a:xfrm>
+          <a:prstGeom prst="roundRect">
+            <a:avLst>
+              <a:gd name="adj" fmla="val 8000"/>
+            </a:avLst>
           </a:prstGeom>
           <a:solidFill>
-            <a:srgbClr val="009CD6"/>
+            <a:srgbClr val="E5F5FB"/>
           </a:solidFill>
           <a:ln>
             <a:noFill/>
@@ -44769,93 +45031,60 @@
           </a:fontRef>
         </p:style>
         <p:txBody>
-          <a:bodyPr rtlCol="0" anchor="ctr" lIns="0" rIns="0" tIns="0" bIns="0" wrap="square"/>
-          <a:lstStyle/>
-          <a:p>
-            <a:pPr algn="ctr"/>
-            <a:r>
-              <a:rPr sz="1300" b="1" i="0">
-                <a:solidFill>
-                  <a:srgbClr val="FFFFFF"/>
-                </a:solidFill>
-                <a:latin typeface="Arial"/>
-              </a:rPr>
-              <a:t>2</a:t>
-            </a:r>
-          </a:p>
-        </p:txBody>
-      </p:sp>
-      <p:sp>
-        <p:nvSpPr>
-          <p:cNvPr id="8" name="TextBox 7"/>
-          <p:cNvSpPr txBox="1"/>
-          <p:nvPr/>
-        </p:nvSpPr>
-        <p:spPr>
-          <a:xfrm>
-            <a:off x="1115568" y="2537460"/>
-            <a:ext cx="10527487" cy="1028699"/>
-          </a:xfrm>
-          <a:prstGeom prst="rect">
-            <a:avLst/>
-          </a:prstGeom>
-          <a:noFill/>
-        </p:spPr>
-        <p:txBody>
-          <a:bodyPr wrap="square">
-            <a:spAutoFit/>
-          </a:bodyPr>
-          <a:lstStyle/>
-          <a:p>
-            <a:pPr>
+          <a:bodyPr rtlCol="0" anchor="t" lIns="128016" rIns="128016" tIns="91440" bIns="54864" wrap="square"/>
+          <a:lstStyle/>
+          <a:p>
+            <a:pPr algn="l">
               <a:spcAft>
                 <a:spcPts val="300"/>
               </a:spcAft>
             </a:pPr>
             <a:r>
-              <a:rPr sz="1900" b="1" i="0">
-                <a:solidFill>
-                  <a:srgbClr val="1A1A1A"/>
-                </a:solidFill>
-                <a:latin typeface="Arial"/>
-              </a:rPr>
-              <a:t>A body in the RACI</a:t>
-            </a:r>
-          </a:p>
-          <a:p>
-            <a:pPr>
+              <a:rPr sz="1700" b="1" i="0">
+                <a:solidFill>
+                  <a:srgbClr val="006E96"/>
+                </a:solidFill>
+                <a:latin typeface="Arial"/>
+              </a:rPr>
+              <a:t>THE STANDARDS PORTFOLIO</a:t>
+            </a:r>
+          </a:p>
+          <a:p>
+            <a:pPr algn="l">
               <a:spcAft>
                 <a:spcPts val="300"/>
               </a:spcAft>
             </a:pPr>
             <a:r>
-              <a:rPr sz="1550" b="0" i="0">
-                <a:solidFill>
-                  <a:srgbClr val="595959"/>
-                </a:solidFill>
-                <a:latin typeface="Arial"/>
-              </a:rPr>
-              <a:t>That the Governance Pack no longer describes.</a:t>
-            </a:r>
-          </a:p>
-        </p:txBody>
-      </p:sp>
-      <p:sp>
-        <p:nvSpPr>
-          <p:cNvPr id="9" name="Rectangle 8"/>
+              <a:rPr sz="1600" b="0" i="0">
+                <a:solidFill>
+                  <a:srgbClr val="1A1A1A"/>
+                </a:solidFill>
+                <a:latin typeface="Arial"/>
+              </a:rPr>
+              <a:t>The technical layer</a:t>
+            </a:r>
+          </a:p>
+        </p:txBody>
+      </p:sp>
+      <p:sp>
+        <p:nvSpPr>
+          <p:cNvPr id="10" name="Rounded Rectangle 9"/>
           <p:cNvSpPr/>
           <p:nvPr/>
         </p:nvSpPr>
         <p:spPr>
           <a:xfrm>
-            <a:off x="621792" y="3570732"/>
-            <a:ext cx="10881360" cy="12700"/>
-          </a:xfrm>
-          <a:prstGeom prst="rect">
-            <a:avLst/>
+            <a:off x="6309360" y="2194560"/>
+            <a:ext cx="5230368" cy="2286000"/>
+          </a:xfrm>
+          <a:prstGeom prst="roundRect">
+            <a:avLst>
+              <a:gd name="adj" fmla="val 8000"/>
+            </a:avLst>
           </a:prstGeom>
           <a:solidFill>
-            <a:srgbClr val="DDECF4"/>
+            <a:srgbClr val="006E96"/>
           </a:solidFill>
           <a:ln>
             <a:noFill/>
@@ -44877,89 +45106,10 @@
           </a:fontRef>
         </p:style>
         <p:txBody>
-          <a:bodyPr rtlCol="0" anchor="ctr"/>
-          <a:lstStyle/>
-          <a:p>
-            <a:pPr algn="ctr"/>
-          </a:p>
-        </p:txBody>
-      </p:sp>
-      <p:sp>
-        <p:nvSpPr>
-          <p:cNvPr id="10" name="Oval 9"/>
-          <p:cNvSpPr/>
-          <p:nvPr/>
-        </p:nvSpPr>
-        <p:spPr>
-          <a:xfrm>
-            <a:off x="621792" y="3657599"/>
-            <a:ext cx="310896" cy="310896"/>
-          </a:xfrm>
-          <a:prstGeom prst="ellipse">
-            <a:avLst/>
-          </a:prstGeom>
-          <a:solidFill>
-            <a:srgbClr val="009CD6"/>
-          </a:solidFill>
-          <a:ln>
-            <a:noFill/>
-          </a:ln>
-          <a:effectLst/>
-        </p:spPr>
-        <p:style>
-          <a:lnRef idx="1">
-            <a:schemeClr val="accent1"/>
-          </a:lnRef>
-          <a:fillRef idx="3">
-            <a:schemeClr val="accent1"/>
-          </a:fillRef>
-          <a:effectRef idx="2">
-            <a:schemeClr val="accent1"/>
-          </a:effectRef>
-          <a:fontRef idx="minor">
-            <a:schemeClr val="lt1"/>
-          </a:fontRef>
-        </p:style>
-        <p:txBody>
-          <a:bodyPr rtlCol="0" anchor="ctr" lIns="0" rIns="0" tIns="0" bIns="0" wrap="square"/>
-          <a:lstStyle/>
-          <a:p>
-            <a:pPr algn="ctr"/>
-            <a:r>
-              <a:rPr sz="1300" b="1" i="0">
-                <a:solidFill>
-                  <a:srgbClr val="FFFFFF"/>
-                </a:solidFill>
-                <a:latin typeface="Arial"/>
-              </a:rPr>
-              <a:t>3</a:t>
-            </a:r>
-          </a:p>
-        </p:txBody>
-      </p:sp>
-      <p:sp>
-        <p:nvSpPr>
-          <p:cNvPr id="11" name="TextBox 10"/>
-          <p:cNvSpPr txBox="1"/>
-          <p:nvPr/>
-        </p:nvSpPr>
-        <p:spPr>
-          <a:xfrm>
-            <a:off x="1115568" y="3611879"/>
-            <a:ext cx="10527487" cy="1028699"/>
-          </a:xfrm>
-          <a:prstGeom prst="rect">
-            <a:avLst/>
-          </a:prstGeom>
-          <a:noFill/>
-        </p:spPr>
-        <p:txBody>
-          <a:bodyPr wrap="square">
-            <a:spAutoFit/>
-          </a:bodyPr>
-          <a:lstStyle/>
-          <a:p>
-            <a:pPr>
+          <a:bodyPr rtlCol="0" anchor="t" lIns="128016" rIns="128016" tIns="91440" bIns="54864" wrap="square"/>
+          <a:lstStyle/>
+          <a:p>
+            <a:pPr algn="l">
               <a:spcAft>
                 <a:spcPts val="300"/>
               </a:spcAft>
@@ -44967,192 +45117,72 @@
             <a:r>
               <a:rPr sz="1900" b="1" i="0">
                 <a:solidFill>
-                  <a:srgbClr val="1A1A1A"/>
-                </a:solidFill>
-                <a:latin typeface="Arial"/>
-              </a:rPr>
-              <a:t>An exchange the decree authorises</a:t>
-            </a:r>
-          </a:p>
-          <a:p>
-            <a:pPr>
+                  <a:srgbClr val="FFFFFF"/>
+                </a:solidFill>
+                <a:latin typeface="Arial"/>
+              </a:rPr>
+              <a:t>THE CROSS-CHECK</a:t>
+            </a:r>
+          </a:p>
+          <a:p>
+            <a:pPr algn="l">
               <a:spcAft>
                 <a:spcPts val="300"/>
               </a:spcAft>
             </a:pPr>
             <a:r>
-              <a:rPr sz="1550" b="0" i="0">
-                <a:solidFill>
-                  <a:srgbClr val="595959"/>
-                </a:solidFill>
-                <a:latin typeface="Arial"/>
-              </a:rPr>
-              <a:t>That no service implements — or a service the decree never authorised.</a:t>
-            </a:r>
-          </a:p>
-        </p:txBody>
-      </p:sp>
-      <p:sp>
-        <p:nvSpPr>
-          <p:cNvPr id="12" name="Rectangle 11"/>
-          <p:cNvSpPr/>
-          <p:nvPr/>
-        </p:nvSpPr>
-        <p:spPr>
-          <a:xfrm>
-            <a:off x="621792" y="4645152"/>
-            <a:ext cx="10881360" cy="12700"/>
-          </a:xfrm>
-          <a:prstGeom prst="rect">
-            <a:avLst/>
-          </a:prstGeom>
-          <a:solidFill>
-            <a:srgbClr val="DDECF4"/>
-          </a:solidFill>
-          <a:ln>
-            <a:noFill/>
-          </a:ln>
-          <a:effectLst/>
-        </p:spPr>
-        <p:style>
-          <a:lnRef idx="1">
-            <a:schemeClr val="accent1"/>
-          </a:lnRef>
-          <a:fillRef idx="3">
-            <a:schemeClr val="accent1"/>
-          </a:fillRef>
-          <a:effectRef idx="2">
-            <a:schemeClr val="accent1"/>
-          </a:effectRef>
-          <a:fontRef idx="minor">
-            <a:schemeClr val="lt1"/>
-          </a:fontRef>
-        </p:style>
-        <p:txBody>
-          <a:bodyPr rtlCol="0" anchor="ctr"/>
-          <a:lstStyle/>
-          <a:p>
-            <a:pPr algn="ctr"/>
-          </a:p>
-        </p:txBody>
-      </p:sp>
-      <p:sp>
-        <p:nvSpPr>
-          <p:cNvPr id="13" name="Oval 12"/>
-          <p:cNvSpPr/>
-          <p:nvPr/>
-        </p:nvSpPr>
-        <p:spPr>
-          <a:xfrm>
-            <a:off x="621792" y="4732020"/>
-            <a:ext cx="310896" cy="310896"/>
-          </a:xfrm>
-          <a:prstGeom prst="ellipse">
-            <a:avLst/>
-          </a:prstGeom>
-          <a:solidFill>
-            <a:srgbClr val="009CD6"/>
-          </a:solidFill>
-          <a:ln>
-            <a:noFill/>
-          </a:ln>
-          <a:effectLst/>
-        </p:spPr>
-        <p:style>
-          <a:lnRef idx="1">
-            <a:schemeClr val="accent1"/>
-          </a:lnRef>
-          <a:fillRef idx="3">
-            <a:schemeClr val="accent1"/>
-          </a:fillRef>
-          <a:effectRef idx="2">
-            <a:schemeClr val="accent1"/>
-          </a:effectRef>
-          <a:fontRef idx="minor">
-            <a:schemeClr val="lt1"/>
-          </a:fontRef>
-        </p:style>
-        <p:txBody>
-          <a:bodyPr rtlCol="0" anchor="ctr" lIns="0" rIns="0" tIns="0" bIns="0" wrap="square"/>
-          <a:lstStyle/>
-          <a:p>
-            <a:pPr algn="ctr"/>
-            <a:r>
-              <a:rPr sz="1300" b="1" i="0">
+              <a:rPr sz="1700" b="0" i="0">
                 <a:solidFill>
                   <a:srgbClr val="FFFFFF"/>
                 </a:solidFill>
                 <a:latin typeface="Arial"/>
               </a:rPr>
-              <a:t>4</a:t>
-            </a:r>
-          </a:p>
-        </p:txBody>
-      </p:sp>
-      <p:sp>
-        <p:nvSpPr>
-          <p:cNvPr id="14" name="TextBox 13"/>
-          <p:cNvSpPr txBox="1"/>
-          <p:nvPr/>
-        </p:nvSpPr>
-        <p:spPr>
-          <a:xfrm>
-            <a:off x="1115568" y="4686300"/>
-            <a:ext cx="10527487" cy="1028699"/>
-          </a:xfrm>
-          <a:prstGeom prst="rect">
-            <a:avLst/>
-          </a:prstGeom>
-          <a:noFill/>
-        </p:spPr>
-        <p:txBody>
-          <a:bodyPr wrap="square">
-            <a:spAutoFit/>
-          </a:bodyPr>
-          <a:lstStyle/>
-          <a:p>
-            <a:pPr>
+              <a:t>Reads all three documents together.</a:t>
+            </a:r>
+          </a:p>
+          <a:p>
+            <a:pPr algn="l">
               <a:spcAft>
                 <a:spcPts val="300"/>
               </a:spcAft>
             </a:pPr>
             <a:r>
-              <a:rPr sz="1900" b="1" i="0">
-                <a:solidFill>
-                  <a:srgbClr val="1A1A1A"/>
-                </a:solidFill>
-                <a:latin typeface="Arial"/>
-              </a:rPr>
-              <a:t>One term, three meanings</a:t>
-            </a:r>
-          </a:p>
-          <a:p>
-            <a:pPr>
+              <a:rPr sz="1700" b="0" i="0">
+                <a:solidFill>
+                  <a:srgbClr val="FFFFFF"/>
+                </a:solidFill>
+                <a:latin typeface="Arial"/>
+              </a:rPr>
+              <a:t>Reports where they disagree, and on what.</a:t>
+            </a:r>
+          </a:p>
+          <a:p>
+            <a:pPr algn="l">
               <a:spcAft>
                 <a:spcPts val="300"/>
               </a:spcAft>
             </a:pPr>
             <a:r>
-              <a:rPr sz="1550" b="0" i="0">
-                <a:solidFill>
-                  <a:srgbClr val="595959"/>
-                </a:solidFill>
-                <a:latin typeface="Arial"/>
-              </a:rPr>
-              <a:t>"Member", "service", "authority" — used slightly differently in each.</a:t>
-            </a:r>
-          </a:p>
-        </p:txBody>
-      </p:sp>
-      <p:sp>
-        <p:nvSpPr>
-          <p:cNvPr id="15" name="TextBox 14"/>
+              <a:rPr sz="1700" b="0" i="0">
+                <a:solidFill>
+                  <a:srgbClr val="FFFFFF"/>
+                </a:solidFill>
+                <a:latin typeface="Arial"/>
+              </a:rPr>
+              <a:t>Bus monitoring watches the traffic; this watches the documents.</a:t>
+            </a:r>
+          </a:p>
+        </p:txBody>
+      </p:sp>
+      <p:sp>
+        <p:nvSpPr>
+          <p:cNvPr id="11" name="TextBox 10"/>
           <p:cNvSpPr txBox="1"/>
           <p:nvPr/>
         </p:nvSpPr>
         <p:spPr>
           <a:xfrm>
-            <a:off x="658368" y="5870448"/>
+            <a:off x="658368" y="5440680"/>
             <a:ext cx="10881360" cy="548640"/>
           </a:xfrm>
           <a:prstGeom prst="rect">
@@ -45173,14 +45203,14 @@
                 </a:solidFill>
                 <a:latin typeface="Arial"/>
               </a:rPr>
-              <a:t>Each one quietly undermines the framework the moment someone notices.</a:t>
-            </a:r>
-          </a:p>
-        </p:txBody>
-      </p:sp>
-      <p:sp>
-        <p:nvSpPr>
-          <p:cNvPr id="16" name="TextBox 15"/>
+              <a:t>Caught by you — not by a Ministry of Justice reviewer, a joining member or an auditor.</a:t>
+            </a:r>
+          </a:p>
+        </p:txBody>
+      </p:sp>
+      <p:sp>
+        <p:nvSpPr>
+          <p:cNvPr id="12" name="TextBox 11"/>
           <p:cNvSpPr txBox="1"/>
           <p:nvPr/>
         </p:nvSpPr>
@@ -45303,133 +45333,80 @@
                 </a:solidFill>
                 <a:latin typeface="Arial"/>
               </a:rPr>
-              <a:t>Read the three together — before a reviewer does</a:t>
-            </a:r>
-          </a:p>
-        </p:txBody>
-      </p:sp>
-      <p:cxnSp>
-        <p:nvCxnSpPr>
-          <p:cNvPr id="4" name="Connector 3"/>
-          <p:cNvCxnSpPr/>
-          <p:nvPr/>
-        </p:nvCxnSpPr>
-        <p:spPr>
-          <a:xfrm>
-            <a:off x="4544568" y="2125980"/>
-            <a:ext cx="1719072" cy="1211580"/>
-          </a:xfrm>
-          <a:prstGeom prst="line">
-            <a:avLst/>
-          </a:prstGeom>
-          <a:ln w="25400">
-            <a:solidFill>
-              <a:srgbClr val="006E96"/>
-            </a:solidFill>
-            <a:tailEnd type="triangle" w="med" len="med"/>
-          </a:ln>
-        </p:spPr>
-        <p:style>
-          <a:lnRef idx="2">
-            <a:schemeClr val="accent1"/>
-          </a:lnRef>
-          <a:fillRef idx="0">
-            <a:schemeClr val="accent1"/>
-          </a:fillRef>
-          <a:effectRef idx="1">
-            <a:schemeClr val="accent1"/>
-          </a:effectRef>
-          <a:fontRef idx="minor">
-            <a:schemeClr val="tx1"/>
-          </a:fontRef>
-        </p:style>
-      </p:cxnSp>
-      <p:cxnSp>
-        <p:nvCxnSpPr>
-          <p:cNvPr id="5" name="Connector 4"/>
-          <p:cNvCxnSpPr/>
-          <p:nvPr/>
-        </p:nvCxnSpPr>
-        <p:spPr>
-          <a:xfrm flipV="1">
-            <a:off x="4544568" y="3337560"/>
-            <a:ext cx="1719072" cy="22860"/>
-          </a:xfrm>
-          <a:prstGeom prst="line">
-            <a:avLst/>
-          </a:prstGeom>
-          <a:ln w="25400">
-            <a:solidFill>
-              <a:srgbClr val="006E96"/>
-            </a:solidFill>
-            <a:tailEnd type="triangle" w="med" len="med"/>
-          </a:ln>
-        </p:spPr>
-        <p:style>
-          <a:lnRef idx="2">
-            <a:schemeClr val="accent1"/>
-          </a:lnRef>
-          <a:fillRef idx="0">
-            <a:schemeClr val="accent1"/>
-          </a:fillRef>
-          <a:effectRef idx="1">
-            <a:schemeClr val="accent1"/>
-          </a:effectRef>
-          <a:fontRef idx="minor">
-            <a:schemeClr val="tx1"/>
-          </a:fontRef>
-        </p:style>
-      </p:cxnSp>
-      <p:cxnSp>
-        <p:nvCxnSpPr>
-          <p:cNvPr id="6" name="Connector 5"/>
-          <p:cNvCxnSpPr/>
-          <p:nvPr/>
-        </p:nvCxnSpPr>
-        <p:spPr>
-          <a:xfrm flipV="1">
-            <a:off x="4544568" y="3337560"/>
-            <a:ext cx="1719072" cy="1257300"/>
-          </a:xfrm>
-          <a:prstGeom prst="line">
-            <a:avLst/>
-          </a:prstGeom>
-          <a:ln w="25400">
-            <a:solidFill>
-              <a:srgbClr val="006E96"/>
-            </a:solidFill>
-            <a:tailEnd type="triangle" w="med" len="med"/>
-          </a:ln>
-        </p:spPr>
-        <p:style>
-          <a:lnRef idx="2">
-            <a:schemeClr val="accent1"/>
-          </a:lnRef>
-          <a:fillRef idx="0">
-            <a:schemeClr val="accent1"/>
-          </a:fillRef>
-          <a:effectRef idx="1">
-            <a:schemeClr val="accent1"/>
-          </a:effectRef>
-          <a:fontRef idx="minor">
-            <a:schemeClr val="tx1"/>
-          </a:fontRef>
-        </p:style>
-      </p:cxnSp>
-      <p:sp>
-        <p:nvSpPr>
-          <p:cNvPr id="7" name="Rounded Rectangle 6"/>
+              <a:t>The AI finds the drift — a person decides which is right</a:t>
+            </a:r>
+          </a:p>
+        </p:txBody>
+      </p:sp>
+      <p:sp>
+        <p:nvSpPr>
+          <p:cNvPr id="4" name="TextBox 3"/>
+          <p:cNvSpPr txBox="1"/>
+          <p:nvPr/>
+        </p:nvSpPr>
+        <p:spPr>
+          <a:xfrm>
+            <a:off x="658368" y="1600200"/>
+            <a:ext cx="10881360" cy="2194560"/>
+          </a:xfrm>
+          <a:prstGeom prst="rect">
+            <a:avLst/>
+          </a:prstGeom>
+          <a:noFill/>
+        </p:spPr>
+        <p:txBody>
+          <a:bodyPr wrap="square">
+            <a:spAutoFit/>
+          </a:bodyPr>
+          <a:lstStyle/>
+          <a:p>
+            <a:pPr>
+              <a:spcAft>
+                <a:spcPts val="1200"/>
+              </a:spcAft>
+            </a:pPr>
+            <a:r>
+              <a:rPr sz="2000" b="0" i="0">
+                <a:solidFill>
+                  <a:srgbClr val="1A1A1A"/>
+                </a:solidFill>
+                <a:latin typeface="Arial"/>
+              </a:rPr>
+              <a:t>Whether the catalogue or the decree is correct is a judgement with legal and governance consequences.</a:t>
+            </a:r>
+          </a:p>
+          <a:p>
+            <a:pPr>
+              <a:spcAft>
+                <a:spcPts val="1200"/>
+              </a:spcAft>
+            </a:pPr>
+            <a:r>
+              <a:rPr sz="2000" b="0" i="0">
+                <a:solidFill>
+                  <a:srgbClr val="1A1A1A"/>
+                </a:solidFill>
+                <a:latin typeface="Arial"/>
+              </a:rPr>
+              <a:t>So the play never edits the decree on its own. Run it whenever any of the three changes.</a:t>
+            </a:r>
+          </a:p>
+        </p:txBody>
+      </p:sp>
+      <p:sp>
+        <p:nvSpPr>
+          <p:cNvPr id="5" name="Rounded Rectangle 4"/>
           <p:cNvSpPr/>
           <p:nvPr/>
         </p:nvSpPr>
         <p:spPr>
           <a:xfrm>
-            <a:off x="658368" y="1600200"/>
-            <a:ext cx="3840480" cy="1051560"/>
+            <a:off x="658368" y="3977639"/>
+            <a:ext cx="10881360" cy="1325880"/>
           </a:xfrm>
           <a:prstGeom prst="roundRect">
             <a:avLst>
-              <a:gd name="adj" fmla="val 8000"/>
+              <a:gd name="adj" fmla="val 4500"/>
             </a:avLst>
           </a:prstGeom>
           <a:solidFill>
@@ -45455,309 +45432,23 @@
           </a:fontRef>
         </p:style>
         <p:txBody>
-          <a:bodyPr rtlCol="0" anchor="t" lIns="128016" rIns="128016" tIns="91440" bIns="54864" wrap="square"/>
-          <a:lstStyle/>
-          <a:p>
-            <a:pPr algn="l">
-              <a:spcAft>
-                <a:spcPts val="300"/>
-              </a:spcAft>
-            </a:pPr>
-            <a:r>
-              <a:rPr sz="1700" b="1" i="0">
-                <a:solidFill>
-                  <a:srgbClr val="006E96"/>
-                </a:solidFill>
-                <a:latin typeface="Arial"/>
-              </a:rPr>
-              <a:t>THE DECREE</a:t>
-            </a:r>
-          </a:p>
-          <a:p>
-            <a:pPr algn="l">
-              <a:spcAft>
-                <a:spcPts val="300"/>
-              </a:spcAft>
-            </a:pPr>
-            <a:r>
-              <a:rPr sz="1600" b="0" i="0">
-                <a:solidFill>
-                  <a:srgbClr val="1A1A1A"/>
-                </a:solidFill>
-                <a:latin typeface="Arial"/>
-              </a:rPr>
-              <a:t>The legal layer</a:t>
-            </a:r>
-          </a:p>
-        </p:txBody>
-      </p:sp>
-      <p:sp>
-        <p:nvSpPr>
-          <p:cNvPr id="8" name="Rounded Rectangle 7"/>
-          <p:cNvSpPr/>
-          <p:nvPr/>
-        </p:nvSpPr>
-        <p:spPr>
-          <a:xfrm>
-            <a:off x="658368" y="2834640"/>
-            <a:ext cx="3840480" cy="1051560"/>
-          </a:xfrm>
-          <a:prstGeom prst="roundRect">
-            <a:avLst>
-              <a:gd name="adj" fmla="val 8000"/>
-            </a:avLst>
-          </a:prstGeom>
-          <a:solidFill>
-            <a:srgbClr val="E5F5FB"/>
-          </a:solidFill>
-          <a:ln>
-            <a:noFill/>
-          </a:ln>
-          <a:effectLst/>
-        </p:spPr>
-        <p:style>
-          <a:lnRef idx="1">
-            <a:schemeClr val="accent1"/>
-          </a:lnRef>
-          <a:fillRef idx="3">
-            <a:schemeClr val="accent1"/>
-          </a:fillRef>
-          <a:effectRef idx="2">
-            <a:schemeClr val="accent1"/>
-          </a:effectRef>
-          <a:fontRef idx="minor">
-            <a:schemeClr val="lt1"/>
-          </a:fontRef>
-        </p:style>
-        <p:txBody>
-          <a:bodyPr rtlCol="0" anchor="t" lIns="128016" rIns="128016" tIns="91440" bIns="54864" wrap="square"/>
-          <a:lstStyle/>
-          <a:p>
-            <a:pPr algn="l">
-              <a:spcAft>
-                <a:spcPts val="300"/>
-              </a:spcAft>
-            </a:pPr>
-            <a:r>
-              <a:rPr sz="1700" b="1" i="0">
-                <a:solidFill>
-                  <a:srgbClr val="006E96"/>
-                </a:solidFill>
-                <a:latin typeface="Arial"/>
-              </a:rPr>
-              <a:t>THE GOVERNANCE PACK</a:t>
-            </a:r>
-          </a:p>
-          <a:p>
-            <a:pPr algn="l">
-              <a:spcAft>
-                <a:spcPts val="300"/>
-              </a:spcAft>
-            </a:pPr>
-            <a:r>
-              <a:rPr sz="1600" b="0" i="0">
-                <a:solidFill>
-                  <a:srgbClr val="1A1A1A"/>
-                </a:solidFill>
-                <a:latin typeface="Arial"/>
-              </a:rPr>
-              <a:t>The organisational layer</a:t>
-            </a:r>
-          </a:p>
-        </p:txBody>
-      </p:sp>
-      <p:sp>
-        <p:nvSpPr>
-          <p:cNvPr id="9" name="Rounded Rectangle 8"/>
-          <p:cNvSpPr/>
-          <p:nvPr/>
-        </p:nvSpPr>
-        <p:spPr>
-          <a:xfrm>
-            <a:off x="658368" y="4069080"/>
-            <a:ext cx="3840480" cy="1051560"/>
-          </a:xfrm>
-          <a:prstGeom prst="roundRect">
-            <a:avLst>
-              <a:gd name="adj" fmla="val 8000"/>
-            </a:avLst>
-          </a:prstGeom>
-          <a:solidFill>
-            <a:srgbClr val="E5F5FB"/>
-          </a:solidFill>
-          <a:ln>
-            <a:noFill/>
-          </a:ln>
-          <a:effectLst/>
-        </p:spPr>
-        <p:style>
-          <a:lnRef idx="1">
-            <a:schemeClr val="accent1"/>
-          </a:lnRef>
-          <a:fillRef idx="3">
-            <a:schemeClr val="accent1"/>
-          </a:fillRef>
-          <a:effectRef idx="2">
-            <a:schemeClr val="accent1"/>
-          </a:effectRef>
-          <a:fontRef idx="minor">
-            <a:schemeClr val="lt1"/>
-          </a:fontRef>
-        </p:style>
-        <p:txBody>
-          <a:bodyPr rtlCol="0" anchor="t" lIns="128016" rIns="128016" tIns="91440" bIns="54864" wrap="square"/>
-          <a:lstStyle/>
-          <a:p>
-            <a:pPr algn="l">
-              <a:spcAft>
-                <a:spcPts val="300"/>
-              </a:spcAft>
-            </a:pPr>
-            <a:r>
-              <a:rPr sz="1700" b="1" i="0">
-                <a:solidFill>
-                  <a:srgbClr val="006E96"/>
-                </a:solidFill>
-                <a:latin typeface="Arial"/>
-              </a:rPr>
-              <a:t>THE STANDARDS PORTFOLIO</a:t>
-            </a:r>
-          </a:p>
-          <a:p>
-            <a:pPr algn="l">
-              <a:spcAft>
-                <a:spcPts val="300"/>
-              </a:spcAft>
-            </a:pPr>
-            <a:r>
-              <a:rPr sz="1600" b="0" i="0">
-                <a:solidFill>
-                  <a:srgbClr val="1A1A1A"/>
-                </a:solidFill>
-                <a:latin typeface="Arial"/>
-              </a:rPr>
-              <a:t>The technical layer</a:t>
-            </a:r>
-          </a:p>
-        </p:txBody>
-      </p:sp>
-      <p:sp>
-        <p:nvSpPr>
-          <p:cNvPr id="10" name="Rounded Rectangle 9"/>
-          <p:cNvSpPr/>
-          <p:nvPr/>
-        </p:nvSpPr>
-        <p:spPr>
-          <a:xfrm>
-            <a:off x="6309360" y="2194560"/>
-            <a:ext cx="5230368" cy="2286000"/>
-          </a:xfrm>
-          <a:prstGeom prst="roundRect">
-            <a:avLst>
-              <a:gd name="adj" fmla="val 8000"/>
-            </a:avLst>
-          </a:prstGeom>
-          <a:solidFill>
-            <a:srgbClr val="006E96"/>
-          </a:solidFill>
-          <a:ln>
-            <a:noFill/>
-          </a:ln>
-          <a:effectLst/>
-        </p:spPr>
-        <p:style>
-          <a:lnRef idx="1">
-            <a:schemeClr val="accent1"/>
-          </a:lnRef>
-          <a:fillRef idx="3">
-            <a:schemeClr val="accent1"/>
-          </a:fillRef>
-          <a:effectRef idx="2">
-            <a:schemeClr val="accent1"/>
-          </a:effectRef>
-          <a:fontRef idx="minor">
-            <a:schemeClr val="lt1"/>
-          </a:fontRef>
-        </p:style>
-        <p:txBody>
-          <a:bodyPr rtlCol="0" anchor="t" lIns="128016" rIns="128016" tIns="91440" bIns="54864" wrap="square"/>
-          <a:lstStyle/>
-          <a:p>
-            <a:pPr algn="l">
-              <a:spcAft>
-                <a:spcPts val="300"/>
-              </a:spcAft>
-            </a:pPr>
-            <a:r>
-              <a:rPr sz="1900" b="1" i="0">
-                <a:solidFill>
-                  <a:srgbClr val="FFFFFF"/>
-                </a:solidFill>
-                <a:latin typeface="Arial"/>
-              </a:rPr>
-              <a:t>THE CROSS-CHECK</a:t>
-            </a:r>
-          </a:p>
-          <a:p>
-            <a:pPr algn="l">
-              <a:spcAft>
-                <a:spcPts val="300"/>
-              </a:spcAft>
-            </a:pPr>
-            <a:r>
-              <a:rPr sz="1700" b="0" i="0">
-                <a:solidFill>
-                  <a:srgbClr val="FFFFFF"/>
-                </a:solidFill>
-                <a:latin typeface="Arial"/>
-              </a:rPr>
-              <a:t>Reads all three documents together.</a:t>
-            </a:r>
-          </a:p>
-          <a:p>
-            <a:pPr algn="l">
-              <a:spcAft>
-                <a:spcPts val="300"/>
-              </a:spcAft>
-            </a:pPr>
-            <a:r>
-              <a:rPr sz="1700" b="0" i="0">
-                <a:solidFill>
-                  <a:srgbClr val="FFFFFF"/>
-                </a:solidFill>
-                <a:latin typeface="Arial"/>
-              </a:rPr>
-              <a:t>Reports where they disagree, and on what.</a:t>
-            </a:r>
-          </a:p>
-          <a:p>
-            <a:pPr algn="l">
-              <a:spcAft>
-                <a:spcPts val="300"/>
-              </a:spcAft>
-            </a:pPr>
-            <a:r>
-              <a:rPr sz="1700" b="0" i="0">
-                <a:solidFill>
-                  <a:srgbClr val="FFFFFF"/>
-                </a:solidFill>
-                <a:latin typeface="Arial"/>
-              </a:rPr>
-              <a:t>Bus monitoring watches the traffic; this watches the documents.</a:t>
-            </a:r>
-          </a:p>
-        </p:txBody>
-      </p:sp>
-      <p:sp>
-        <p:nvSpPr>
-          <p:cNvPr id="11" name="TextBox 10"/>
+          <a:bodyPr rtlCol="0" anchor="ctr"/>
+          <a:lstStyle/>
+          <a:p>
+            <a:pPr algn="ctr"/>
+          </a:p>
+        </p:txBody>
+      </p:sp>
+      <p:sp>
+        <p:nvSpPr>
+          <p:cNvPr id="6" name="TextBox 5"/>
           <p:cNvSpPr txBox="1"/>
           <p:nvPr/>
         </p:nvSpPr>
         <p:spPr>
           <a:xfrm>
-            <a:off x="658368" y="5440680"/>
-            <a:ext cx="10881360" cy="548640"/>
+            <a:off x="859536" y="4169663"/>
+            <a:ext cx="10479024" cy="1051560"/>
           </a:xfrm>
           <a:prstGeom prst="rect">
             <a:avLst/>
@@ -45770,21 +45461,26 @@
           </a:bodyPr>
           <a:lstStyle/>
           <a:p>
-            <a:r>
-              <a:rPr sz="1550" b="1" i="0">
+            <a:pPr>
+              <a:spcAft>
+                <a:spcPts val="700"/>
+              </a:spcAft>
+            </a:pPr>
+            <a:r>
+              <a:rPr sz="2300" b="1" i="0">
                 <a:solidFill>
                   <a:srgbClr val="006E96"/>
                 </a:solidFill>
                 <a:latin typeface="Arial"/>
               </a:rPr>
-              <a:t>Caught by you — not by a Ministry of Justice reviewer, a joining member or an auditor.</a:t>
-            </a:r>
-          </a:p>
-        </p:txBody>
-      </p:sp>
-      <p:sp>
-        <p:nvSpPr>
-          <p:cNvPr id="12" name="TextBox 11"/>
+              <a:t>Consistency is a direction, not an automatic edit.</a:t>
+            </a:r>
+          </a:p>
+        </p:txBody>
+      </p:sp>
+      <p:sp>
+        <p:nvSpPr>
+          <p:cNvPr id="7" name="TextBox 6"/>
           <p:cNvSpPr txBox="1"/>
           <p:nvPr/>
         </p:nvSpPr>
@@ -45836,23 +45532,95 @@
       <p:grpSpPr/>
       <p:sp>
         <p:nvSpPr>
-          <p:cNvPr id="2" name="Rectangle 1"/>
+          <p:cNvPr id="2" name="TextBox 1"/>
+          <p:cNvSpPr txBox="1"/>
+          <p:nvPr/>
+        </p:nvSpPr>
+        <p:spPr>
+          <a:xfrm>
+            <a:off x="1005840" y="2103120"/>
+            <a:ext cx="10149840" cy="2377440"/>
+          </a:xfrm>
+          <a:prstGeom prst="rect">
+            <a:avLst/>
+          </a:prstGeom>
+          <a:noFill/>
+        </p:spPr>
+        <p:txBody>
+          <a:bodyPr wrap="square">
+            <a:spAutoFit/>
+          </a:bodyPr>
+          <a:lstStyle/>
+          <a:p>
+            <a:r>
+              <a:rPr sz="3000" b="1" i="0">
+                <a:solidFill>
+                  <a:srgbClr val="1A1A1A"/>
+                </a:solidFill>
+                <a:latin typeface="Arial"/>
+              </a:rPr>
+              <a:t>Cross-check the decree, the Governance Pack and the standards portfolio — the AI finds the drift, a human resolves which document is right.</a:t>
+            </a:r>
+          </a:p>
+        </p:txBody>
+      </p:sp>
+      <p:sp>
+        <p:nvSpPr>
+          <p:cNvPr id="3" name="TextBox 2"/>
+          <p:cNvSpPr txBox="1"/>
+          <p:nvPr/>
+        </p:nvSpPr>
+        <p:spPr>
+          <a:xfrm>
+            <a:off x="1005840" y="1554480"/>
+            <a:ext cx="5486400" cy="365760"/>
+          </a:xfrm>
+          <a:prstGeom prst="rect">
+            <a:avLst/>
+          </a:prstGeom>
+          <a:noFill/>
+        </p:spPr>
+        <p:txBody>
+          <a:bodyPr wrap="square">
+            <a:spAutoFit/>
+          </a:bodyPr>
+          <a:lstStyle/>
+          <a:p>
+            <a:r>
+              <a:rPr sz="1200" b="1" i="0">
+                <a:solidFill>
+                  <a:srgbClr val="006E96"/>
+                </a:solidFill>
+                <a:latin typeface="Arial"/>
+              </a:rPr>
+              <a:t>IN ONE SENTENCE</a:t>
+            </a:r>
+          </a:p>
+        </p:txBody>
+      </p:sp>
+      <p:sp>
+        <p:nvSpPr>
+          <p:cNvPr id="4" name="Rounded Rectangle 3"/>
           <p:cNvSpPr/>
           <p:nvPr/>
         </p:nvSpPr>
         <p:spPr>
           <a:xfrm>
-            <a:off x="457200" y="384048"/>
-            <a:ext cx="45720" cy="256032"/>
-          </a:xfrm>
-          <a:prstGeom prst="rect">
-            <a:avLst/>
+            <a:off x="658368" y="4709160"/>
+            <a:ext cx="10881360" cy="1554480"/>
+          </a:xfrm>
+          <a:prstGeom prst="roundRect">
+            <a:avLst>
+              <a:gd name="adj" fmla="val 4500"/>
+            </a:avLst>
           </a:prstGeom>
           <a:solidFill>
-            <a:srgbClr val="009CD6"/>
+            <a:srgbClr val="FFFFFF"/>
           </a:solidFill>
-          <a:ln>
-            <a:noFill/>
+          <a:ln w="9525">
+            <a:solidFill>
+              <a:srgbClr val="009CD6"/>
+            </a:solidFill>
           </a:ln>
           <a:effectLst/>
         </p:spPr>
@@ -45871,23 +45639,63 @@
           </a:fontRef>
         </p:style>
         <p:txBody>
-          <a:bodyPr rtlCol="0" anchor="ctr"/>
-          <a:lstStyle/>
-          <a:p>
-            <a:pPr algn="ctr"/>
-          </a:p>
-        </p:txBody>
-      </p:sp>
-      <p:sp>
-        <p:nvSpPr>
-          <p:cNvPr id="3" name="TextBox 2"/>
+          <a:bodyPr rtlCol="0" anchor="ctr" wrap="square" lIns="228600" rIns="228600" tIns="109728" bIns="109728">
+            <a:noAutofit/>
+          </a:bodyPr>
+          <a:lstStyle/>
+          <a:p>
+            <a:pPr algn="l">
+              <a:spcAft>
+                <a:spcPts val="400"/>
+              </a:spcAft>
+            </a:pPr>
+            <a:r>
+              <a:rPr sz="1800" b="1" i="0">
+                <a:solidFill>
+                  <a:srgbClr val="006E96"/>
+                </a:solidFill>
+                <a:latin typeface="Arial"/>
+              </a:rPr>
+              <a:t>Do this on your own sector. </a:t>
+            </a:r>
+            <a:r>
+              <a:rPr sz="1800" b="1" i="0">
+                <a:solidFill>
+                  <a:srgbClr val="1A1A1A"/>
+                </a:solidFill>
+                <a:latin typeface="Arial"/>
+              </a:rPr>
+              <a:t>Cross-check the decree, Governance Pack and standards portfolio for drift.</a:t>
+            </a:r>
+          </a:p>
+          <a:p>
+            <a:pPr algn="l">
+              <a:spcAft>
+                <a:spcPts val="400"/>
+              </a:spcAft>
+            </a:pPr>
+            <a:r>
+              <a:rPr sz="1800" b="0" i="0">
+                <a:solidFill>
+                  <a:srgbClr val="595959"/>
+                </a:solidFill>
+                <a:latin typeface="Arial"/>
+              </a:rPr>
+              <a:t>The prompt in the companion material gives you a contradiction table with a human question for each, ordered by risk. Before the next video.</a:t>
+            </a:r>
+          </a:p>
+        </p:txBody>
+      </p:sp>
+      <p:sp>
+        <p:nvSpPr>
+          <p:cNvPr id="5" name="TextBox 4"/>
           <p:cNvSpPr txBox="1"/>
           <p:nvPr/>
         </p:nvSpPr>
         <p:spPr>
           <a:xfrm>
-            <a:off x="621792" y="274320"/>
-            <a:ext cx="11247120" cy="914400"/>
+            <a:off x="457200" y="6473952"/>
+            <a:ext cx="7772400" cy="292608"/>
           </a:xfrm>
           <a:prstGeom prst="rect">
             <a:avLst/>
@@ -45901,27 +45709,27 @@
           <a:lstStyle/>
           <a:p>
             <a:r>
-              <a:rPr sz="2800" b="1" i="0">
-                <a:solidFill>
-                  <a:srgbClr val="1A1A1A"/>
-                </a:solidFill>
-                <a:latin typeface="Arial"/>
-              </a:rPr>
-              <a:t>The AI finds the drift — a person decides which is right</a:t>
-            </a:r>
-          </a:p>
-        </p:txBody>
-      </p:sp>
-      <p:sp>
-        <p:nvSpPr>
-          <p:cNvPr id="4" name="TextBox 3"/>
+              <a:rPr sz="900" b="0" i="0">
+                <a:solidFill>
+                  <a:srgbClr val="595959"/>
+                </a:solidFill>
+                <a:latin typeface="Arial"/>
+              </a:rPr>
+              <a:t>5.9 · Keep the documents honest — the consistency cross-check</a:t>
+            </a:r>
+          </a:p>
+        </p:txBody>
+      </p:sp>
+      <p:sp>
+        <p:nvSpPr>
+          <p:cNvPr id="6" name="TextBox 5"/>
           <p:cNvSpPr txBox="1"/>
           <p:nvPr/>
         </p:nvSpPr>
         <p:spPr>
           <a:xfrm>
-            <a:off x="658368" y="1600200"/>
-            <a:ext cx="10881360" cy="2194560"/>
+            <a:off x="10058400" y="6473952"/>
+            <a:ext cx="1673352" cy="292608"/>
           </a:xfrm>
           <a:prstGeom prst="rect">
             <a:avLst/>
@@ -45934,146 +45742,7 @@
           </a:bodyPr>
           <a:lstStyle/>
           <a:p>
-            <a:pPr>
-              <a:spcAft>
-                <a:spcPts val="1200"/>
-              </a:spcAft>
-            </a:pPr>
-            <a:r>
-              <a:rPr sz="2000" b="0" i="0">
-                <a:solidFill>
-                  <a:srgbClr val="1A1A1A"/>
-                </a:solidFill>
-                <a:latin typeface="Arial"/>
-              </a:rPr>
-              <a:t>Whether the catalogue or the decree is correct is a judgement with legal and governance consequences.</a:t>
-            </a:r>
-          </a:p>
-          <a:p>
-            <a:pPr>
-              <a:spcAft>
-                <a:spcPts val="1200"/>
-              </a:spcAft>
-            </a:pPr>
-            <a:r>
-              <a:rPr sz="2000" b="0" i="0">
-                <a:solidFill>
-                  <a:srgbClr val="1A1A1A"/>
-                </a:solidFill>
-                <a:latin typeface="Arial"/>
-              </a:rPr>
-              <a:t>So the play never edits the decree on its own. Run it whenever any of the three changes.</a:t>
-            </a:r>
-          </a:p>
-        </p:txBody>
-      </p:sp>
-      <p:sp>
-        <p:nvSpPr>
-          <p:cNvPr id="5" name="Rounded Rectangle 4"/>
-          <p:cNvSpPr/>
-          <p:nvPr/>
-        </p:nvSpPr>
-        <p:spPr>
-          <a:xfrm>
-            <a:off x="658368" y="3977639"/>
-            <a:ext cx="10881360" cy="1325880"/>
-          </a:xfrm>
-          <a:prstGeom prst="roundRect">
-            <a:avLst>
-              <a:gd name="adj" fmla="val 4500"/>
-            </a:avLst>
-          </a:prstGeom>
-          <a:solidFill>
-            <a:srgbClr val="E5F5FB"/>
-          </a:solidFill>
-          <a:ln>
-            <a:noFill/>
-          </a:ln>
-          <a:effectLst/>
-        </p:spPr>
-        <p:style>
-          <a:lnRef idx="1">
-            <a:schemeClr val="accent1"/>
-          </a:lnRef>
-          <a:fillRef idx="3">
-            <a:schemeClr val="accent1"/>
-          </a:fillRef>
-          <a:effectRef idx="2">
-            <a:schemeClr val="accent1"/>
-          </a:effectRef>
-          <a:fontRef idx="minor">
-            <a:schemeClr val="lt1"/>
-          </a:fontRef>
-        </p:style>
-        <p:txBody>
-          <a:bodyPr rtlCol="0" anchor="ctr"/>
-          <a:lstStyle/>
-          <a:p>
-            <a:pPr algn="ctr"/>
-          </a:p>
-        </p:txBody>
-      </p:sp>
-      <p:sp>
-        <p:nvSpPr>
-          <p:cNvPr id="6" name="TextBox 5"/>
-          <p:cNvSpPr txBox="1"/>
-          <p:nvPr/>
-        </p:nvSpPr>
-        <p:spPr>
-          <a:xfrm>
-            <a:off x="859536" y="4169663"/>
-            <a:ext cx="10479024" cy="1051560"/>
-          </a:xfrm>
-          <a:prstGeom prst="rect">
-            <a:avLst/>
-          </a:prstGeom>
-          <a:noFill/>
-        </p:spPr>
-        <p:txBody>
-          <a:bodyPr wrap="square">
-            <a:spAutoFit/>
-          </a:bodyPr>
-          <a:lstStyle/>
-          <a:p>
-            <a:pPr>
-              <a:spcAft>
-                <a:spcPts val="700"/>
-              </a:spcAft>
-            </a:pPr>
-            <a:r>
-              <a:rPr sz="2300" b="1" i="0">
-                <a:solidFill>
-                  <a:srgbClr val="006E96"/>
-                </a:solidFill>
-                <a:latin typeface="Arial"/>
-              </a:rPr>
-              <a:t>Consistency is a direction, not an automatic edit.</a:t>
-            </a:r>
-          </a:p>
-        </p:txBody>
-      </p:sp>
-      <p:sp>
-        <p:nvSpPr>
-          <p:cNvPr id="7" name="TextBox 6"/>
-          <p:cNvSpPr txBox="1"/>
-          <p:nvPr/>
-        </p:nvSpPr>
-        <p:spPr>
-          <a:xfrm>
-            <a:off x="457200" y="6473952"/>
-            <a:ext cx="7772400" cy="292608"/>
-          </a:xfrm>
-          <a:prstGeom prst="rect">
-            <a:avLst/>
-          </a:prstGeom>
-          <a:noFill/>
-        </p:spPr>
-        <p:txBody>
-          <a:bodyPr wrap="square">
-            <a:spAutoFit/>
-          </a:bodyPr>
-          <a:lstStyle/>
-          <a:p>
+            <a:pPr algn="r"/>
             <a:r>
               <a:rPr sz="900" b="0" i="0">
                 <a:solidFill>
@@ -46081,7 +45750,7 @@
                 </a:solidFill>
                 <a:latin typeface="Arial"/>
               </a:rPr>
-              <a:t>5.9 · Keep the documents honest — the consistency cross-check</a:t>
+              <a:t>www.itu.int</a:t>
             </a:r>
           </a:p>
         </p:txBody>
@@ -46986,95 +46655,23 @@
       <p:grpSpPr/>
       <p:sp>
         <p:nvSpPr>
-          <p:cNvPr id="2" name="TextBox 1"/>
-          <p:cNvSpPr txBox="1"/>
-          <p:nvPr/>
-        </p:nvSpPr>
-        <p:spPr>
-          <a:xfrm>
-            <a:off x="1005840" y="2103120"/>
-            <a:ext cx="10149840" cy="2377440"/>
-          </a:xfrm>
-          <a:prstGeom prst="rect">
-            <a:avLst/>
-          </a:prstGeom>
-          <a:noFill/>
-        </p:spPr>
-        <p:txBody>
-          <a:bodyPr wrap="square">
-            <a:spAutoFit/>
-          </a:bodyPr>
-          <a:lstStyle/>
-          <a:p>
-            <a:r>
-              <a:rPr sz="3000" b="1" i="0">
-                <a:solidFill>
-                  <a:srgbClr val="1A1A1A"/>
-                </a:solidFill>
-                <a:latin typeface="Arial"/>
-              </a:rPr>
-              <a:t>Cross-check the decree, the Governance Pack and the standards portfolio — the AI finds the drift, a human resolves which document is right.</a:t>
-            </a:r>
-          </a:p>
-        </p:txBody>
-      </p:sp>
-      <p:sp>
-        <p:nvSpPr>
-          <p:cNvPr id="3" name="TextBox 2"/>
-          <p:cNvSpPr txBox="1"/>
-          <p:nvPr/>
-        </p:nvSpPr>
-        <p:spPr>
-          <a:xfrm>
-            <a:off x="1005840" y="1554480"/>
-            <a:ext cx="5486400" cy="365760"/>
-          </a:xfrm>
-          <a:prstGeom prst="rect">
-            <a:avLst/>
-          </a:prstGeom>
-          <a:noFill/>
-        </p:spPr>
-        <p:txBody>
-          <a:bodyPr wrap="square">
-            <a:spAutoFit/>
-          </a:bodyPr>
-          <a:lstStyle/>
-          <a:p>
-            <a:r>
-              <a:rPr sz="1200" b="1" i="0">
-                <a:solidFill>
-                  <a:srgbClr val="006E96"/>
-                </a:solidFill>
-                <a:latin typeface="Arial"/>
-              </a:rPr>
-              <a:t>IN ONE SENTENCE</a:t>
-            </a:r>
-          </a:p>
-        </p:txBody>
-      </p:sp>
-      <p:sp>
-        <p:nvSpPr>
-          <p:cNvPr id="4" name="Rounded Rectangle 3"/>
+          <p:cNvPr id="2" name="Rectangle 1"/>
           <p:cNvSpPr/>
           <p:nvPr/>
         </p:nvSpPr>
         <p:spPr>
           <a:xfrm>
-            <a:off x="658368" y="4709160"/>
-            <a:ext cx="10881360" cy="1554480"/>
-          </a:xfrm>
-          <a:prstGeom prst="roundRect">
-            <a:avLst>
-              <a:gd name="adj" fmla="val 4500"/>
-            </a:avLst>
+            <a:off x="457200" y="384048"/>
+            <a:ext cx="45720" cy="256032"/>
+          </a:xfrm>
+          <a:prstGeom prst="rect">
+            <a:avLst/>
           </a:prstGeom>
           <a:solidFill>
-            <a:srgbClr val="FFFFFF"/>
+            <a:srgbClr val="009CD6"/>
           </a:solidFill>
-          <a:ln w="9525">
-            <a:solidFill>
-              <a:srgbClr val="009CD6"/>
-            </a:solidFill>
+          <a:ln>
+            <a:noFill/>
           </a:ln>
           <a:effectLst/>
         </p:spPr>
@@ -47093,63 +46690,23 @@
           </a:fontRef>
         </p:style>
         <p:txBody>
-          <a:bodyPr rtlCol="0" anchor="ctr" wrap="square" lIns="228600" rIns="228600" tIns="109728" bIns="109728">
-            <a:noAutofit/>
-          </a:bodyPr>
-          <a:lstStyle/>
-          <a:p>
-            <a:pPr algn="l">
-              <a:spcAft>
-                <a:spcPts val="400"/>
-              </a:spcAft>
-            </a:pPr>
-            <a:r>
-              <a:rPr sz="1800" b="1" i="0">
-                <a:solidFill>
-                  <a:srgbClr val="006E96"/>
-                </a:solidFill>
-                <a:latin typeface="Arial"/>
-              </a:rPr>
-              <a:t>Do this on your own sector. </a:t>
-            </a:r>
-            <a:r>
-              <a:rPr sz="1800" b="1" i="0">
-                <a:solidFill>
-                  <a:srgbClr val="1A1A1A"/>
-                </a:solidFill>
-                <a:latin typeface="Arial"/>
-              </a:rPr>
-              <a:t>Cross-check the decree, Governance Pack and standards portfolio for drift.</a:t>
-            </a:r>
-          </a:p>
-          <a:p>
-            <a:pPr algn="l">
-              <a:spcAft>
-                <a:spcPts val="400"/>
-              </a:spcAft>
-            </a:pPr>
-            <a:r>
-              <a:rPr sz="1800" b="0" i="0">
-                <a:solidFill>
-                  <a:srgbClr val="595959"/>
-                </a:solidFill>
-                <a:latin typeface="Arial"/>
-              </a:rPr>
-              <a:t>The prompt in the companion material gives you a contradiction table with a human question for each, ordered by risk. Before the next video.</a:t>
-            </a:r>
-          </a:p>
-        </p:txBody>
-      </p:sp>
-      <p:sp>
-        <p:nvSpPr>
-          <p:cNvPr id="5" name="TextBox 4"/>
+          <a:bodyPr rtlCol="0" anchor="ctr"/>
+          <a:lstStyle/>
+          <a:p>
+            <a:pPr algn="ctr"/>
+          </a:p>
+        </p:txBody>
+      </p:sp>
+      <p:sp>
+        <p:nvSpPr>
+          <p:cNvPr id="3" name="TextBox 2"/>
           <p:cNvSpPr txBox="1"/>
           <p:nvPr/>
         </p:nvSpPr>
         <p:spPr>
           <a:xfrm>
-            <a:off x="457200" y="6473952"/>
-            <a:ext cx="7772400" cy="292608"/>
+            <a:off x="621792" y="274320"/>
+            <a:ext cx="11247120" cy="914400"/>
           </a:xfrm>
           <a:prstGeom prst="rect">
             <a:avLst/>
@@ -47163,27 +46720,27 @@
           <a:lstStyle/>
           <a:p>
             <a:r>
-              <a:rPr sz="900" b="0" i="0">
-                <a:solidFill>
-                  <a:srgbClr val="595959"/>
-                </a:solidFill>
-                <a:latin typeface="Arial"/>
-              </a:rPr>
-              <a:t>5.9 · Keep the documents honest — the consistency cross-check</a:t>
-            </a:r>
-          </a:p>
-        </p:txBody>
-      </p:sp>
-      <p:sp>
-        <p:nvSpPr>
-          <p:cNvPr id="6" name="TextBox 5"/>
+              <a:rPr sz="2800" b="1" i="0">
+                <a:solidFill>
+                  <a:srgbClr val="1A1A1A"/>
+                </a:solidFill>
+                <a:latin typeface="Arial"/>
+              </a:rPr>
+              <a:t>Sources</a:t>
+            </a:r>
+          </a:p>
+        </p:txBody>
+      </p:sp>
+      <p:sp>
+        <p:nvSpPr>
+          <p:cNvPr id="4" name="TextBox 3"/>
           <p:cNvSpPr txBox="1"/>
           <p:nvPr/>
         </p:nvSpPr>
         <p:spPr>
           <a:xfrm>
-            <a:off x="10058400" y="6473952"/>
-            <a:ext cx="1673352" cy="292608"/>
+            <a:off x="658368" y="1554480"/>
+            <a:ext cx="10789920" cy="3840480"/>
           </a:xfrm>
           <a:prstGeom prst="rect">
             <a:avLst/>
@@ -47196,7 +46753,127 @@
           </a:bodyPr>
           <a:lstStyle/>
           <a:p>
-            <a:pPr algn="r"/>
+            <a:pPr>
+              <a:spcAft>
+                <a:spcPts val="1200"/>
+              </a:spcAft>
+            </a:pPr>
+            <a:r>
+              <a:rPr sz="1700" b="0" i="0">
+                <a:solidFill>
+                  <a:srgbClr val="1A1A1A"/>
+                </a:solidFill>
+                <a:latin typeface="Arial"/>
+              </a:rPr>
+              <a:t>•  The decree — Module 2</a:t>
+            </a:r>
+          </a:p>
+          <a:p>
+            <a:pPr>
+              <a:spcAft>
+                <a:spcPts val="1200"/>
+              </a:spcAft>
+            </a:pPr>
+            <a:r>
+              <a:rPr sz="1700" b="0" i="0">
+                <a:solidFill>
+                  <a:srgbClr val="1A1A1A"/>
+                </a:solidFill>
+                <a:latin typeface="Arial"/>
+              </a:rPr>
+              <a:t>•  The Governance Pack — Module 3</a:t>
+            </a:r>
+          </a:p>
+          <a:p>
+            <a:pPr>
+              <a:spcAft>
+                <a:spcPts val="1200"/>
+              </a:spcAft>
+            </a:pPr>
+            <a:r>
+              <a:rPr sz="1700" b="0" i="0">
+                <a:solidFill>
+                  <a:srgbClr val="1A1A1A"/>
+                </a:solidFill>
+                <a:latin typeface="Arial"/>
+              </a:rPr>
+              <a:t>•  The standards portfolio — Module 4</a:t>
+            </a:r>
+          </a:p>
+          <a:p>
+            <a:pPr>
+              <a:spcAft>
+                <a:spcPts val="1200"/>
+              </a:spcAft>
+            </a:pPr>
+            <a:r>
+              <a:rPr sz="1700" b="0" i="0">
+                <a:solidFill>
+                  <a:srgbClr val="1A1A1A"/>
+                </a:solidFill>
+                <a:latin typeface="Arial"/>
+              </a:rPr>
+              <a:t>•  EU European Interoperability Framework (EIF)</a:t>
+            </a:r>
+          </a:p>
+        </p:txBody>
+      </p:sp>
+      <p:sp>
+        <p:nvSpPr>
+          <p:cNvPr id="5" name="TextBox 4"/>
+          <p:cNvSpPr txBox="1"/>
+          <p:nvPr/>
+        </p:nvSpPr>
+        <p:spPr>
+          <a:xfrm>
+            <a:off x="658368" y="5806440"/>
+            <a:ext cx="10789920" cy="457200"/>
+          </a:xfrm>
+          <a:prstGeom prst="rect">
+            <a:avLst/>
+          </a:prstGeom>
+          <a:noFill/>
+        </p:spPr>
+        <p:txBody>
+          <a:bodyPr wrap="square">
+            <a:spAutoFit/>
+          </a:bodyPr>
+          <a:lstStyle/>
+          <a:p>
+            <a:r>
+              <a:rPr sz="1400" b="1" i="0">
+                <a:solidFill>
+                  <a:srgbClr val="006E96"/>
+                </a:solidFill>
+                <a:latin typeface="Arial"/>
+              </a:rPr>
+              <a:t>Find the link in the description.</a:t>
+            </a:r>
+          </a:p>
+        </p:txBody>
+      </p:sp>
+      <p:sp>
+        <p:nvSpPr>
+          <p:cNvPr id="6" name="TextBox 5"/>
+          <p:cNvSpPr txBox="1"/>
+          <p:nvPr/>
+        </p:nvSpPr>
+        <p:spPr>
+          <a:xfrm>
+            <a:off x="457200" y="6473952"/>
+            <a:ext cx="7772400" cy="292608"/>
+          </a:xfrm>
+          <a:prstGeom prst="rect">
+            <a:avLst/>
+          </a:prstGeom>
+          <a:noFill/>
+        </p:spPr>
+        <p:txBody>
+          <a:bodyPr wrap="square">
+            <a:spAutoFit/>
+          </a:bodyPr>
+          <a:lstStyle/>
+          <a:p>
             <a:r>
               <a:rPr sz="900" b="0" i="0">
                 <a:solidFill>
@@ -47204,7 +46881,7 @@
                 </a:solidFill>
                 <a:latin typeface="Arial"/>
               </a:rPr>
-              <a:t>www.itu.int</a:t>
+              <a:t>5.9 · Keep the documents honest — the consistency cross-check</a:t>
             </a:r>
           </a:p>
         </p:txBody>
@@ -47229,58 +46906,14 @@
       <p:grpSpPr/>
       <p:sp>
         <p:nvSpPr>
-          <p:cNvPr id="2" name="Rectangle 1"/>
-          <p:cNvSpPr/>
-          <p:nvPr/>
-        </p:nvSpPr>
-        <p:spPr>
-          <a:xfrm>
-            <a:off x="457200" y="384048"/>
-            <a:ext cx="45720" cy="256032"/>
-          </a:xfrm>
-          <a:prstGeom prst="rect">
-            <a:avLst/>
-          </a:prstGeom>
-          <a:solidFill>
-            <a:srgbClr val="009CD6"/>
-          </a:solidFill>
-          <a:ln>
-            <a:noFill/>
-          </a:ln>
-          <a:effectLst/>
-        </p:spPr>
-        <p:style>
-          <a:lnRef idx="1">
-            <a:schemeClr val="accent1"/>
-          </a:lnRef>
-          <a:fillRef idx="3">
-            <a:schemeClr val="accent1"/>
-          </a:fillRef>
-          <a:effectRef idx="2">
-            <a:schemeClr val="accent1"/>
-          </a:effectRef>
-          <a:fontRef idx="minor">
-            <a:schemeClr val="lt1"/>
-          </a:fontRef>
-        </p:style>
-        <p:txBody>
-          <a:bodyPr rtlCol="0" anchor="ctr"/>
-          <a:lstStyle/>
-          <a:p>
-            <a:pPr algn="ctr"/>
-          </a:p>
-        </p:txBody>
-      </p:sp>
-      <p:sp>
-        <p:nvSpPr>
-          <p:cNvPr id="3" name="TextBox 2"/>
+          <p:cNvPr id="2" name="TextBox 1"/>
           <p:cNvSpPr txBox="1"/>
           <p:nvPr/>
         </p:nvSpPr>
         <p:spPr>
           <a:xfrm>
-            <a:off x="621792" y="274320"/>
-            <a:ext cx="11247120" cy="914400"/>
+            <a:off x="822960" y="822960"/>
+            <a:ext cx="7315200" cy="457200"/>
           </a:xfrm>
           <a:prstGeom prst="rect">
             <a:avLst/>
@@ -47294,27 +46927,27 @@
           <a:lstStyle/>
           <a:p>
             <a:r>
-              <a:rPr sz="2800" b="1" i="0">
-                <a:solidFill>
-                  <a:srgbClr val="1A1A1A"/>
-                </a:solidFill>
-                <a:latin typeface="Arial"/>
-              </a:rPr>
-              <a:t>Sources</a:t>
-            </a:r>
-          </a:p>
-        </p:txBody>
-      </p:sp>
-      <p:sp>
-        <p:nvSpPr>
-          <p:cNvPr id="4" name="TextBox 3"/>
+              <a:rPr sz="1200" b="1" i="0">
+                <a:solidFill>
+                  <a:srgbClr val="595959"/>
+                </a:solidFill>
+                <a:latin typeface="Arial"/>
+              </a:rPr>
+              <a:t>MODULE 5 · VIDEO 5.10</a:t>
+            </a:r>
+          </a:p>
+        </p:txBody>
+      </p:sp>
+      <p:sp>
+        <p:nvSpPr>
+          <p:cNvPr id="3" name="TextBox 2"/>
           <p:cNvSpPr txBox="1"/>
           <p:nvPr/>
         </p:nvSpPr>
         <p:spPr>
           <a:xfrm>
-            <a:off x="658368" y="1554480"/>
-            <a:ext cx="10789920" cy="3840480"/>
+            <a:off x="822960" y="1828800"/>
+            <a:ext cx="2011680" cy="1097280"/>
           </a:xfrm>
           <a:prstGeom prst="rect">
             <a:avLst/>
@@ -47327,81 +46960,28 @@
           </a:bodyPr>
           <a:lstStyle/>
           <a:p>
-            <a:pPr>
-              <a:spcAft>
-                <a:spcPts val="1200"/>
-              </a:spcAft>
-            </a:pPr>
-            <a:r>
-              <a:rPr sz="1700" b="0" i="0">
-                <a:solidFill>
-                  <a:srgbClr val="1A1A1A"/>
-                </a:solidFill>
-                <a:latin typeface="Arial"/>
-              </a:rPr>
-              <a:t>•  The decree — Module 2</a:t>
-            </a:r>
-          </a:p>
-          <a:p>
-            <a:pPr>
-              <a:spcAft>
-                <a:spcPts val="1200"/>
-              </a:spcAft>
-            </a:pPr>
-            <a:r>
-              <a:rPr sz="1700" b="0" i="0">
-                <a:solidFill>
-                  <a:srgbClr val="1A1A1A"/>
-                </a:solidFill>
-                <a:latin typeface="Arial"/>
-              </a:rPr>
-              <a:t>•  The Governance Pack — Module 3</a:t>
-            </a:r>
-          </a:p>
-          <a:p>
-            <a:pPr>
-              <a:spcAft>
-                <a:spcPts val="1200"/>
-              </a:spcAft>
-            </a:pPr>
-            <a:r>
-              <a:rPr sz="1700" b="0" i="0">
-                <a:solidFill>
-                  <a:srgbClr val="1A1A1A"/>
-                </a:solidFill>
-                <a:latin typeface="Arial"/>
-              </a:rPr>
-              <a:t>•  The standards portfolio — Module 4</a:t>
-            </a:r>
-          </a:p>
-          <a:p>
-            <a:pPr>
-              <a:spcAft>
-                <a:spcPts val="1200"/>
-              </a:spcAft>
-            </a:pPr>
-            <a:r>
-              <a:rPr sz="1700" b="0" i="0">
-                <a:solidFill>
-                  <a:srgbClr val="1A1A1A"/>
-                </a:solidFill>
-                <a:latin typeface="Arial"/>
-              </a:rPr>
-              <a:t>•  EU European Interoperability Framework (EIF)</a:t>
-            </a:r>
-          </a:p>
-        </p:txBody>
-      </p:sp>
-      <p:sp>
-        <p:nvSpPr>
-          <p:cNvPr id="5" name="TextBox 4"/>
+            <a:r>
+              <a:rPr sz="6000" b="1" i="0">
+                <a:solidFill>
+                  <a:srgbClr val="009CD6"/>
+                </a:solidFill>
+                <a:latin typeface="Arial"/>
+              </a:rPr>
+              <a:t>5.10</a:t>
+            </a:r>
+          </a:p>
+        </p:txBody>
+      </p:sp>
+      <p:sp>
+        <p:nvSpPr>
+          <p:cNvPr id="4" name="TextBox 3"/>
           <p:cNvSpPr txBox="1"/>
           <p:nvPr/>
         </p:nvSpPr>
         <p:spPr>
           <a:xfrm>
-            <a:off x="658368" y="5806440"/>
-            <a:ext cx="10789920" cy="457200"/>
+            <a:off x="822960" y="2880360"/>
+            <a:ext cx="9601200" cy="1371600"/>
           </a:xfrm>
           <a:prstGeom prst="rect">
             <a:avLst/>
@@ -47415,27 +46995,27 @@
           <a:lstStyle/>
           <a:p>
             <a:r>
-              <a:rPr sz="1400" b="1" i="0">
-                <a:solidFill>
-                  <a:srgbClr val="006E96"/>
-                </a:solidFill>
-                <a:latin typeface="Arial"/>
-              </a:rPr>
-              <a:t>Find the link in the description.</a:t>
-            </a:r>
-          </a:p>
-        </p:txBody>
-      </p:sp>
-      <p:sp>
-        <p:nvSpPr>
-          <p:cNvPr id="6" name="TextBox 5"/>
+              <a:rPr sz="3400" b="1" i="0">
+                <a:solidFill>
+                  <a:srgbClr val="1A1A1A"/>
+                </a:solidFill>
+                <a:latin typeface="Arial"/>
+              </a:rPr>
+              <a:t>Carry the framework to the next sector</a:t>
+            </a:r>
+          </a:p>
+        </p:txBody>
+      </p:sp>
+      <p:sp>
+        <p:nvSpPr>
+          <p:cNvPr id="5" name="TextBox 4"/>
           <p:cNvSpPr txBox="1"/>
           <p:nvPr/>
         </p:nvSpPr>
         <p:spPr>
           <a:xfrm>
-            <a:off x="457200" y="6473952"/>
-            <a:ext cx="7772400" cy="292608"/>
+            <a:off x="822960" y="4343400"/>
+            <a:ext cx="9875520" cy="1554480"/>
           </a:xfrm>
           <a:prstGeom prst="rect">
             <a:avLst/>
@@ -47449,13 +47029,47 @@
           <a:lstStyle/>
           <a:p>
             <a:r>
-              <a:rPr sz="900" b="0" i="0">
+              <a:rPr sz="1700" b="0" i="1">
                 <a:solidFill>
                   <a:srgbClr val="595959"/>
                 </a:solidFill>
                 <a:latin typeface="Arial"/>
               </a:rPr>
-              <a:t>5.9 · Keep the documents honest — the consistency cross-check</a:t>
+              <a:t>The same four-layer framework stands up interoperability beyond education — the method is sector-portable, and the second sector is cheaper than the first.</a:t>
+            </a:r>
+          </a:p>
+        </p:txBody>
+      </p:sp>
+      <p:sp>
+        <p:nvSpPr>
+          <p:cNvPr id="6" name="TextBox 5"/>
+          <p:cNvSpPr txBox="1"/>
+          <p:nvPr/>
+        </p:nvSpPr>
+        <p:spPr>
+          <a:xfrm>
+            <a:off x="822960" y="5989320"/>
+            <a:ext cx="7315200" cy="365760"/>
+          </a:xfrm>
+          <a:prstGeom prst="rect">
+            <a:avLst/>
+          </a:prstGeom>
+          <a:noFill/>
+        </p:spPr>
+        <p:txBody>
+          <a:bodyPr wrap="square">
+            <a:spAutoFit/>
+          </a:bodyPr>
+          <a:lstStyle/>
+          <a:p>
+            <a:r>
+              <a:rPr sz="1200" b="0" i="0">
+                <a:solidFill>
+                  <a:srgbClr val="595959"/>
+                </a:solidFill>
+                <a:latin typeface="Arial"/>
+              </a:rPr>
+              <a:t>standalone video · voice-over on text slides</a:t>
             </a:r>
           </a:p>
         </p:txBody>
@@ -47486,8 +47100,8 @@
         </p:nvSpPr>
         <p:spPr>
           <a:xfrm>
-            <a:off x="822960" y="822960"/>
-            <a:ext cx="7315200" cy="457200"/>
+            <a:off x="1005840" y="1325880"/>
+            <a:ext cx="5486400" cy="365760"/>
           </a:xfrm>
           <a:prstGeom prst="rect">
             <a:avLst/>
@@ -47503,11 +47117,11 @@
             <a:r>
               <a:rPr sz="1200" b="1" i="0">
                 <a:solidFill>
-                  <a:srgbClr val="595959"/>
-                </a:solidFill>
-                <a:latin typeface="Arial"/>
-              </a:rPr>
-              <a:t>MODULE 5 · VIDEO 5.10</a:t>
+                  <a:srgbClr val="006E96"/>
+                </a:solidFill>
+                <a:latin typeface="Arial"/>
+              </a:rPr>
+              <a:t>WHERE WE START</a:t>
             </a:r>
           </a:p>
         </p:txBody>
@@ -47520,8 +47134,8 @@
         </p:nvSpPr>
         <p:spPr>
           <a:xfrm>
-            <a:off x="822960" y="1828800"/>
-            <a:ext cx="2011680" cy="1097280"/>
+            <a:off x="1005840" y="1783080"/>
+            <a:ext cx="10149840" cy="1737360"/>
           </a:xfrm>
           <a:prstGeom prst="rect">
             <a:avLst/>
@@ -47535,13 +47149,13 @@
           <a:lstStyle/>
           <a:p>
             <a:r>
-              <a:rPr sz="6000" b="1" i="0">
-                <a:solidFill>
-                  <a:srgbClr val="009CD6"/>
-                </a:solidFill>
-                <a:latin typeface="Arial"/>
-              </a:rPr>
-              <a:t>5.10</a:t>
+              <a:rPr sz="3000" b="1" i="0">
+                <a:solidFill>
+                  <a:srgbClr val="1A1A1A"/>
+                </a:solidFill>
+                <a:latin typeface="Arial"/>
+              </a:rPr>
+              <a:t>The framework was built on education. It is not education-specific.</a:t>
             </a:r>
           </a:p>
         </p:txBody>
@@ -47554,8 +47168,8 @@
         </p:nvSpPr>
         <p:spPr>
           <a:xfrm>
-            <a:off x="822960" y="2880360"/>
-            <a:ext cx="9601200" cy="1371600"/>
+            <a:off x="1005840" y="3611880"/>
+            <a:ext cx="10149840" cy="2377440"/>
           </a:xfrm>
           <a:prstGeom prst="rect">
             <a:avLst/>
@@ -47568,14 +47182,35 @@
           </a:bodyPr>
           <a:lstStyle/>
           <a:p>
-            <a:r>
-              <a:rPr sz="3400" b="1" i="0">
-                <a:solidFill>
-                  <a:srgbClr val="1A1A1A"/>
-                </a:solidFill>
-                <a:latin typeface="Arial"/>
-              </a:rPr>
-              <a:t>Carry the framework to the next sector</a:t>
+            <a:pPr>
+              <a:spcAft>
+                <a:spcPts val="800"/>
+              </a:spcAft>
+            </a:pPr>
+            <a:r>
+              <a:rPr sz="1700" b="0" i="0">
+                <a:solidFill>
+                  <a:srgbClr val="595959"/>
+                </a:solidFill>
+                <a:latin typeface="Arial"/>
+              </a:rPr>
+              <a:t>Know what carries to the next sector unchanged, and what is new.</a:t>
+            </a:r>
+          </a:p>
+          <a:p>
+            <a:pPr>
+              <a:spcAft>
+                <a:spcPts val="800"/>
+              </a:spcAft>
+            </a:pPr>
+            <a:r>
+              <a:rPr sz="1700" b="0" i="0">
+                <a:solidFill>
+                  <a:srgbClr val="595959"/>
+                </a:solidFill>
+                <a:latin typeface="Arial"/>
+              </a:rPr>
+              <a:t>Get that split right, and the second sector pays only for its own vocabularies and services.</a:t>
             </a:r>
           </a:p>
         </p:txBody>
@@ -47588,8 +47223,8 @@
         </p:nvSpPr>
         <p:spPr>
           <a:xfrm>
-            <a:off x="822960" y="4343400"/>
-            <a:ext cx="9875520" cy="1554480"/>
+            <a:off x="457200" y="6473952"/>
+            <a:ext cx="7772400" cy="292608"/>
           </a:xfrm>
           <a:prstGeom prst="rect">
             <a:avLst/>
@@ -47603,13 +47238,13 @@
           <a:lstStyle/>
           <a:p>
             <a:r>
-              <a:rPr sz="1700" b="0" i="1">
+              <a:rPr sz="900" b="0" i="0">
                 <a:solidFill>
                   <a:srgbClr val="595959"/>
                 </a:solidFill>
                 <a:latin typeface="Arial"/>
               </a:rPr>
-              <a:t>The same four-layer framework stands up interoperability beyond education — the method is sector-portable, and the second sector is cheaper than the first.</a:t>
+              <a:t>5.10 · Carry the framework to the next sector</a:t>
             </a:r>
           </a:p>
         </p:txBody>
@@ -47622,8 +47257,8 @@
         </p:nvSpPr>
         <p:spPr>
           <a:xfrm>
-            <a:off x="822960" y="5989320"/>
-            <a:ext cx="7315200" cy="365760"/>
+            <a:off x="10058400" y="6473952"/>
+            <a:ext cx="1673352" cy="292608"/>
           </a:xfrm>
           <a:prstGeom prst="rect">
             <a:avLst/>
@@ -47636,14 +47271,15 @@
           </a:bodyPr>
           <a:lstStyle/>
           <a:p>
-            <a:r>
-              <a:rPr sz="1200" b="0" i="0">
+            <a:pPr algn="r"/>
+            <a:r>
+              <a:rPr sz="900" b="0" i="0">
                 <a:solidFill>
                   <a:srgbClr val="595959"/>
                 </a:solidFill>
                 <a:latin typeface="Arial"/>
               </a:rPr>
-              <a:t>standalone video · voice-over on text slides</a:t>
+              <a:t>www.itu.int</a:t>
             </a:r>
           </a:p>
         </p:txBody>
@@ -47668,14 +47304,58 @@
       <p:grpSpPr/>
       <p:sp>
         <p:nvSpPr>
-          <p:cNvPr id="2" name="TextBox 1"/>
+          <p:cNvPr id="2" name="Rectangle 1"/>
+          <p:cNvSpPr/>
+          <p:nvPr/>
+        </p:nvSpPr>
+        <p:spPr>
+          <a:xfrm>
+            <a:off x="457200" y="384048"/>
+            <a:ext cx="45720" cy="256032"/>
+          </a:xfrm>
+          <a:prstGeom prst="rect">
+            <a:avLst/>
+          </a:prstGeom>
+          <a:solidFill>
+            <a:srgbClr val="009CD6"/>
+          </a:solidFill>
+          <a:ln>
+            <a:noFill/>
+          </a:ln>
+          <a:effectLst/>
+        </p:spPr>
+        <p:style>
+          <a:lnRef idx="1">
+            <a:schemeClr val="accent1"/>
+          </a:lnRef>
+          <a:fillRef idx="3">
+            <a:schemeClr val="accent1"/>
+          </a:fillRef>
+          <a:effectRef idx="2">
+            <a:schemeClr val="accent1"/>
+          </a:effectRef>
+          <a:fontRef idx="minor">
+            <a:schemeClr val="lt1"/>
+          </a:fontRef>
+        </p:style>
+        <p:txBody>
+          <a:bodyPr rtlCol="0" anchor="ctr"/>
+          <a:lstStyle/>
+          <a:p>
+            <a:pPr algn="ctr"/>
+          </a:p>
+        </p:txBody>
+      </p:sp>
+      <p:sp>
+        <p:nvSpPr>
+          <p:cNvPr id="3" name="TextBox 2"/>
           <p:cNvSpPr txBox="1"/>
           <p:nvPr/>
         </p:nvSpPr>
         <p:spPr>
           <a:xfrm>
-            <a:off x="1005840" y="1325880"/>
-            <a:ext cx="5486400" cy="365760"/>
+            <a:off x="621792" y="274320"/>
+            <a:ext cx="11247120" cy="914400"/>
           </a:xfrm>
           <a:prstGeom prst="rect">
             <a:avLst/>
@@ -47689,27 +47369,73 @@
           <a:lstStyle/>
           <a:p>
             <a:r>
-              <a:rPr sz="1200" b="1" i="0">
-                <a:solidFill>
-                  <a:srgbClr val="006E96"/>
-                </a:solidFill>
-                <a:latin typeface="Arial"/>
-              </a:rPr>
-              <a:t>WHERE WE START</a:t>
-            </a:r>
-          </a:p>
-        </p:txBody>
-      </p:sp>
-      <p:sp>
-        <p:nvSpPr>
-          <p:cNvPr id="3" name="TextBox 2"/>
+              <a:rPr sz="2800" b="1" i="0">
+                <a:solidFill>
+                  <a:srgbClr val="1A1A1A"/>
+                </a:solidFill>
+                <a:latin typeface="Arial"/>
+              </a:rPr>
+              <a:t>Two things are new per sector — the rest carries unchanged</a:t>
+            </a:r>
+          </a:p>
+        </p:txBody>
+      </p:sp>
+      <p:sp>
+        <p:nvSpPr>
+          <p:cNvPr id="4" name="Rounded Rectangle 3"/>
+          <p:cNvSpPr/>
+          <p:nvPr/>
+        </p:nvSpPr>
+        <p:spPr>
+          <a:xfrm>
+            <a:off x="658368" y="1554480"/>
+            <a:ext cx="5394960" cy="3383280"/>
+          </a:xfrm>
+          <a:prstGeom prst="roundRect">
+            <a:avLst>
+              <a:gd name="adj" fmla="val 4500"/>
+            </a:avLst>
+          </a:prstGeom>
+          <a:solidFill>
+            <a:srgbClr val="E5F5FB"/>
+          </a:solidFill>
+          <a:ln>
+            <a:noFill/>
+          </a:ln>
+          <a:effectLst/>
+        </p:spPr>
+        <p:style>
+          <a:lnRef idx="1">
+            <a:schemeClr val="accent1"/>
+          </a:lnRef>
+          <a:fillRef idx="3">
+            <a:schemeClr val="accent1"/>
+          </a:fillRef>
+          <a:effectRef idx="2">
+            <a:schemeClr val="accent1"/>
+          </a:effectRef>
+          <a:fontRef idx="minor">
+            <a:schemeClr val="lt1"/>
+          </a:fontRef>
+        </p:style>
+        <p:txBody>
+          <a:bodyPr rtlCol="0" anchor="ctr"/>
+          <a:lstStyle/>
+          <a:p>
+            <a:pPr algn="ctr"/>
+          </a:p>
+        </p:txBody>
+      </p:sp>
+      <p:sp>
+        <p:nvSpPr>
+          <p:cNvPr id="5" name="TextBox 4"/>
           <p:cNvSpPr txBox="1"/>
           <p:nvPr/>
         </p:nvSpPr>
         <p:spPr>
           <a:xfrm>
-            <a:off x="1005840" y="1783080"/>
-            <a:ext cx="10149840" cy="1737360"/>
+            <a:off x="859536" y="1700784"/>
+            <a:ext cx="4992624" cy="3108960"/>
           </a:xfrm>
           <a:prstGeom prst="rect">
             <a:avLst/>
@@ -47722,28 +47448,159 @@
           </a:bodyPr>
           <a:lstStyle/>
           <a:p>
-            <a:r>
-              <a:rPr sz="3000" b="1" i="0">
+            <a:pPr>
+              <a:spcAft>
+                <a:spcPts val="700"/>
+              </a:spcAft>
+            </a:pPr>
+            <a:r>
+              <a:rPr sz="1900" b="1" i="0">
+                <a:solidFill>
+                  <a:srgbClr val="006E96"/>
+                </a:solidFill>
+                <a:latin typeface="Arial"/>
+              </a:rPr>
+              <a:t>CARRIES UNCHANGED</a:t>
+            </a:r>
+          </a:p>
+          <a:p>
+            <a:pPr>
+              <a:spcAft>
+                <a:spcPts val="700"/>
+              </a:spcAft>
+            </a:pPr>
+            <a:r>
+              <a:rPr sz="1600" b="0" i="0">
                 <a:solidFill>
                   <a:srgbClr val="1A1A1A"/>
                 </a:solidFill>
                 <a:latin typeface="Arial"/>
               </a:rPr>
-              <a:t>The framework was built on education. It is not education-specific.</a:t>
-            </a:r>
-          </a:p>
-        </p:txBody>
-      </p:sp>
-      <p:sp>
-        <p:nvSpPr>
-          <p:cNvPr id="4" name="TextBox 3"/>
+              <a:t>The four layers</a:t>
+            </a:r>
+          </a:p>
+          <a:p>
+            <a:pPr>
+              <a:spcAft>
+                <a:spcPts val="700"/>
+              </a:spcAft>
+            </a:pPr>
+            <a:r>
+              <a:rPr sz="1600" b="0" i="0">
+                <a:solidFill>
+                  <a:srgbClr val="1A1A1A"/>
+                </a:solidFill>
+                <a:latin typeface="Arial"/>
+              </a:rPr>
+              <a:t>The decree pattern</a:t>
+            </a:r>
+          </a:p>
+          <a:p>
+            <a:pPr>
+              <a:spcAft>
+                <a:spcPts val="700"/>
+              </a:spcAft>
+            </a:pPr>
+            <a:r>
+              <a:rPr sz="1600" b="0" i="0">
+                <a:solidFill>
+                  <a:srgbClr val="1A1A1A"/>
+                </a:solidFill>
+                <a:latin typeface="Arial"/>
+              </a:rPr>
+              <a:t>The governance — tiers, RACI, Operating Authority</a:t>
+            </a:r>
+          </a:p>
+          <a:p>
+            <a:pPr>
+              <a:spcAft>
+                <a:spcPts val="700"/>
+              </a:spcAft>
+            </a:pPr>
+            <a:r>
+              <a:rPr sz="1600" b="0" i="0">
+                <a:solidFill>
+                  <a:srgbClr val="1A1A1A"/>
+                </a:solidFill>
+                <a:latin typeface="Arial"/>
+              </a:rPr>
+              <a:t>The standards portfolio</a:t>
+            </a:r>
+          </a:p>
+          <a:p>
+            <a:pPr>
+              <a:spcAft>
+                <a:spcPts val="700"/>
+              </a:spcAft>
+            </a:pPr>
+            <a:r>
+              <a:rPr sz="1600" b="0" i="0">
+                <a:solidFill>
+                  <a:srgbClr val="1A1A1A"/>
+                </a:solidFill>
+                <a:latin typeface="Arial"/>
+              </a:rPr>
+              <a:t>The bus itself, already running</a:t>
+            </a:r>
+          </a:p>
+        </p:txBody>
+      </p:sp>
+      <p:sp>
+        <p:nvSpPr>
+          <p:cNvPr id="6" name="Rounded Rectangle 5"/>
+          <p:cNvSpPr/>
+          <p:nvPr/>
+        </p:nvSpPr>
+        <p:spPr>
+          <a:xfrm>
+            <a:off x="6263640" y="1554480"/>
+            <a:ext cx="5394960" cy="3383280"/>
+          </a:xfrm>
+          <a:prstGeom prst="roundRect">
+            <a:avLst>
+              <a:gd name="adj" fmla="val 4500"/>
+            </a:avLst>
+          </a:prstGeom>
+          <a:solidFill>
+            <a:srgbClr val="E5F5FB"/>
+          </a:solidFill>
+          <a:ln>
+            <a:noFill/>
+          </a:ln>
+          <a:effectLst/>
+        </p:spPr>
+        <p:style>
+          <a:lnRef idx="1">
+            <a:schemeClr val="accent1"/>
+          </a:lnRef>
+          <a:fillRef idx="3">
+            <a:schemeClr val="accent1"/>
+          </a:fillRef>
+          <a:effectRef idx="2">
+            <a:schemeClr val="accent1"/>
+          </a:effectRef>
+          <a:fontRef idx="minor">
+            <a:schemeClr val="lt1"/>
+          </a:fontRef>
+        </p:style>
+        <p:txBody>
+          <a:bodyPr rtlCol="0" anchor="ctr"/>
+          <a:lstStyle/>
+          <a:p>
+            <a:pPr algn="ctr"/>
+          </a:p>
+        </p:txBody>
+      </p:sp>
+      <p:sp>
+        <p:nvSpPr>
+          <p:cNvPr id="7" name="TextBox 6"/>
           <p:cNvSpPr txBox="1"/>
           <p:nvPr/>
         </p:nvSpPr>
         <p:spPr>
           <a:xfrm>
-            <a:off x="1005840" y="3611880"/>
-            <a:ext cx="10149840" cy="2377440"/>
+            <a:off x="6464808" y="1700784"/>
+            <a:ext cx="4992624" cy="3108960"/>
           </a:xfrm>
           <a:prstGeom prst="rect">
             <a:avLst/>
@@ -47758,47 +47615,63 @@
           <a:p>
             <a:pPr>
               <a:spcAft>
-                <a:spcPts val="800"/>
+                <a:spcPts val="700"/>
               </a:spcAft>
             </a:pPr>
             <a:r>
-              <a:rPr sz="1700" b="0" i="0">
-                <a:solidFill>
-                  <a:srgbClr val="595959"/>
-                </a:solidFill>
-                <a:latin typeface="Arial"/>
-              </a:rPr>
-              <a:t>Know what carries to the next sector unchanged, and what is new.</a:t>
+              <a:rPr sz="1900" b="1" i="0">
+                <a:solidFill>
+                  <a:srgbClr val="006E96"/>
+                </a:solidFill>
+                <a:latin typeface="Arial"/>
+              </a:rPr>
+              <a:t>NEW PER SECTOR</a:t>
             </a:r>
           </a:p>
           <a:p>
             <a:pPr>
               <a:spcAft>
-                <a:spcPts val="800"/>
+                <a:spcPts val="700"/>
               </a:spcAft>
             </a:pPr>
             <a:r>
-              <a:rPr sz="1700" b="0" i="0">
-                <a:solidFill>
-                  <a:srgbClr val="595959"/>
-                </a:solidFill>
-                <a:latin typeface="Arial"/>
-              </a:rPr>
-              <a:t>Get that split right, and the second sector pays only for its own vocabularies and services.</a:t>
-            </a:r>
-          </a:p>
-        </p:txBody>
-      </p:sp>
-      <p:sp>
-        <p:nvSpPr>
-          <p:cNvPr id="5" name="TextBox 4"/>
+              <a:rPr sz="1600" b="0" i="0">
+                <a:solidFill>
+                  <a:srgbClr val="1A1A1A"/>
+                </a:solidFill>
+                <a:latin typeface="Arial"/>
+              </a:rPr>
+              <a:t>The semantic layer — its vocabularies</a:t>
+            </a:r>
+          </a:p>
+          <a:p>
+            <a:pPr>
+              <a:spcAft>
+                <a:spcPts val="700"/>
+              </a:spcAft>
+            </a:pPr>
+            <a:r>
+              <a:rPr sz="1600" b="0" i="0">
+                <a:solidFill>
+                  <a:srgbClr val="1A1A1A"/>
+                </a:solidFill>
+                <a:latin typeface="Arial"/>
+              </a:rPr>
+              <a:t>The specific exchanges and services</a:t>
+            </a:r>
+          </a:p>
+        </p:txBody>
+      </p:sp>
+      <p:sp>
+        <p:nvSpPr>
+          <p:cNvPr id="8" name="TextBox 7"/>
           <p:cNvSpPr txBox="1"/>
           <p:nvPr/>
         </p:nvSpPr>
         <p:spPr>
           <a:xfrm>
-            <a:off x="457200" y="6473952"/>
-            <a:ext cx="7772400" cy="292608"/>
+            <a:off x="658368" y="5120640"/>
+            <a:ext cx="10881360" cy="548640"/>
           </a:xfrm>
           <a:prstGeom prst="rect">
             <a:avLst/>
@@ -47812,27 +47685,27 @@
           <a:lstStyle/>
           <a:p>
             <a:r>
-              <a:rPr sz="900" b="0" i="0">
-                <a:solidFill>
-                  <a:srgbClr val="595959"/>
-                </a:solidFill>
-                <a:latin typeface="Arial"/>
-              </a:rPr>
-              <a:t>5.10 · Carry the framework to the next sector</a:t>
-            </a:r>
-          </a:p>
-        </p:txBody>
-      </p:sp>
-      <p:sp>
-        <p:nvSpPr>
-          <p:cNvPr id="6" name="TextBox 5"/>
+              <a:rPr sz="1550" b="1" i="0">
+                <a:solidFill>
+                  <a:srgbClr val="006E96"/>
+                </a:solidFill>
+                <a:latin typeface="Arial"/>
+              </a:rPr>
+              <a:t>Whichever sector goes first pays for the platform. The next is cheaper either way.</a:t>
+            </a:r>
+          </a:p>
+        </p:txBody>
+      </p:sp>
+      <p:sp>
+        <p:nvSpPr>
+          <p:cNvPr id="9" name="TextBox 8"/>
           <p:cNvSpPr txBox="1"/>
           <p:nvPr/>
         </p:nvSpPr>
         <p:spPr>
           <a:xfrm>
-            <a:off x="10058400" y="6473952"/>
-            <a:ext cx="1673352" cy="292608"/>
+            <a:off x="457200" y="6473952"/>
+            <a:ext cx="7772400" cy="292608"/>
           </a:xfrm>
           <a:prstGeom prst="rect">
             <a:avLst/>
@@ -47845,7 +47718,6 @@
           </a:bodyPr>
           <a:lstStyle/>
           <a:p>
-            <a:pPr algn="r"/>
             <a:r>
               <a:rPr sz="900" b="0" i="0">
                 <a:solidFill>
@@ -47853,7 +47725,7 @@
                 </a:solidFill>
                 <a:latin typeface="Arial"/>
               </a:rPr>
-              <a:t>www.itu.int</a:t>
+              <a:t>5.10 · Carry the framework to the next sector</a:t>
             </a:r>
           </a:p>
         </p:txBody>
@@ -47949,21 +47821,76 @@
                 </a:solidFill>
                 <a:latin typeface="Arial"/>
               </a:rPr>
-              <a:t>Two things are new per sector — the rest carries unchanged</a:t>
-            </a:r>
-          </a:p>
-        </p:txBody>
-      </p:sp>
-      <p:sp>
-        <p:nvSpPr>
-          <p:cNvPr id="4" name="Rounded Rectangle 3"/>
+              <a:t>A planned framework gets cheaper with every sector</a:t>
+            </a:r>
+          </a:p>
+        </p:txBody>
+      </p:sp>
+      <p:sp>
+        <p:nvSpPr>
+          <p:cNvPr id="4" name="TextBox 3"/>
+          <p:cNvSpPr txBox="1"/>
+          <p:nvPr/>
+        </p:nvSpPr>
+        <p:spPr>
+          <a:xfrm>
+            <a:off x="658368" y="1600200"/>
+            <a:ext cx="10881360" cy="2194560"/>
+          </a:xfrm>
+          <a:prstGeom prst="rect">
+            <a:avLst/>
+          </a:prstGeom>
+          <a:noFill/>
+        </p:spPr>
+        <p:txBody>
+          <a:bodyPr wrap="square">
+            <a:spAutoFit/>
+          </a:bodyPr>
+          <a:lstStyle/>
+          <a:p>
+            <a:pPr>
+              <a:spcAft>
+                <a:spcPts val="1200"/>
+              </a:spcAft>
+            </a:pPr>
+            <a:r>
+              <a:rPr sz="2000" b="0" i="0">
+                <a:solidFill>
+                  <a:srgbClr val="1A1A1A"/>
+                </a:solidFill>
+                <a:latin typeface="Arial"/>
+              </a:rPr>
+              <a:t>The first sector pays for the bus, the governance and the legal mandate.</a:t>
+            </a:r>
+          </a:p>
+          <a:p>
+            <a:pPr>
+              <a:spcAft>
+                <a:spcPts val="1200"/>
+              </a:spcAft>
+            </a:pPr>
+            <a:r>
+              <a:rPr sz="2000" b="0" i="0">
+                <a:solidFill>
+                  <a:srgbClr val="1A1A1A"/>
+                </a:solidFill>
+                <a:latin typeface="Arial"/>
+              </a:rPr>
+              <a:t>The second reuses all of it and pays only for its own semantics and services; the third reuses more still.</a:t>
+            </a:r>
+          </a:p>
+        </p:txBody>
+      </p:sp>
+      <p:sp>
+        <p:nvSpPr>
+          <p:cNvPr id="5" name="Rounded Rectangle 4"/>
           <p:cNvSpPr/>
           <p:nvPr/>
         </p:nvSpPr>
         <p:spPr>
           <a:xfrm>
-            <a:off x="658368" y="1554480"/>
-            <a:ext cx="5394960" cy="3383280"/>
+            <a:off x="658368" y="3977639"/>
+            <a:ext cx="10881360" cy="1325880"/>
           </a:xfrm>
           <a:prstGeom prst="roundRect">
             <a:avLst>
@@ -48002,14 +47929,14 @@
       </p:sp>
       <p:sp>
         <p:nvSpPr>
-          <p:cNvPr id="5" name="TextBox 4"/>
+          <p:cNvPr id="6" name="TextBox 5"/>
           <p:cNvSpPr txBox="1"/>
           <p:nvPr/>
         </p:nvSpPr>
         <p:spPr>
           <a:xfrm>
-            <a:off x="859536" y="1700784"/>
-            <a:ext cx="4992624" cy="3108960"/>
+            <a:off x="859536" y="4169663"/>
+            <a:ext cx="10479024" cy="1051560"/>
           </a:xfrm>
           <a:prstGeom prst="rect">
             <a:avLst/>
@@ -48028,251 +47955,20 @@
               </a:spcAft>
             </a:pPr>
             <a:r>
-              <a:rPr sz="1900" b="1" i="0">
+              <a:rPr sz="2300" b="1" i="0">
                 <a:solidFill>
                   <a:srgbClr val="006E96"/>
                 </a:solidFill>
                 <a:latin typeface="Arial"/>
               </a:rPr>
-              <a:t>CARRIES UNCHANGED</a:t>
-            </a:r>
-          </a:p>
-          <a:p>
-            <a:pPr>
-              <a:spcAft>
-                <a:spcPts val="700"/>
-              </a:spcAft>
-            </a:pPr>
-            <a:r>
-              <a:rPr sz="1600" b="0" i="0">
-                <a:solidFill>
-                  <a:srgbClr val="1A1A1A"/>
-                </a:solidFill>
-                <a:latin typeface="Arial"/>
-              </a:rPr>
-              <a:t>The four layers</a:t>
-            </a:r>
-          </a:p>
-          <a:p>
-            <a:pPr>
-              <a:spcAft>
-                <a:spcPts val="700"/>
-              </a:spcAft>
-            </a:pPr>
-            <a:r>
-              <a:rPr sz="1600" b="0" i="0">
-                <a:solidFill>
-                  <a:srgbClr val="1A1A1A"/>
-                </a:solidFill>
-                <a:latin typeface="Arial"/>
-              </a:rPr>
-              <a:t>The decree pattern</a:t>
-            </a:r>
-          </a:p>
-          <a:p>
-            <a:pPr>
-              <a:spcAft>
-                <a:spcPts val="700"/>
-              </a:spcAft>
-            </a:pPr>
-            <a:r>
-              <a:rPr sz="1600" b="0" i="0">
-                <a:solidFill>
-                  <a:srgbClr val="1A1A1A"/>
-                </a:solidFill>
-                <a:latin typeface="Arial"/>
-              </a:rPr>
-              <a:t>The governance — tiers, RACI, Operating Authority</a:t>
-            </a:r>
-          </a:p>
-          <a:p>
-            <a:pPr>
-              <a:spcAft>
-                <a:spcPts val="700"/>
-              </a:spcAft>
-            </a:pPr>
-            <a:r>
-              <a:rPr sz="1600" b="0" i="0">
-                <a:solidFill>
-                  <a:srgbClr val="1A1A1A"/>
-                </a:solidFill>
-                <a:latin typeface="Arial"/>
-              </a:rPr>
-              <a:t>The standards portfolio</a:t>
-            </a:r>
-          </a:p>
-          <a:p>
-            <a:pPr>
-              <a:spcAft>
-                <a:spcPts val="700"/>
-              </a:spcAft>
-            </a:pPr>
-            <a:r>
-              <a:rPr sz="1600" b="0" i="0">
-                <a:solidFill>
-                  <a:srgbClr val="1A1A1A"/>
-                </a:solidFill>
-                <a:latin typeface="Arial"/>
-              </a:rPr>
-              <a:t>The bus itself, already running</a:t>
-            </a:r>
-          </a:p>
-        </p:txBody>
-      </p:sp>
-      <p:sp>
-        <p:nvSpPr>
-          <p:cNvPr id="6" name="Rounded Rectangle 5"/>
-          <p:cNvSpPr/>
-          <p:nvPr/>
-        </p:nvSpPr>
-        <p:spPr>
-          <a:xfrm>
-            <a:off x="6263640" y="1554480"/>
-            <a:ext cx="5394960" cy="3383280"/>
-          </a:xfrm>
-          <a:prstGeom prst="roundRect">
-            <a:avLst>
-              <a:gd name="adj" fmla="val 4500"/>
-            </a:avLst>
-          </a:prstGeom>
-          <a:solidFill>
-            <a:srgbClr val="E5F5FB"/>
-          </a:solidFill>
-          <a:ln>
-            <a:noFill/>
-          </a:ln>
-          <a:effectLst/>
-        </p:spPr>
-        <p:style>
-          <a:lnRef idx="1">
-            <a:schemeClr val="accent1"/>
-          </a:lnRef>
-          <a:fillRef idx="3">
-            <a:schemeClr val="accent1"/>
-          </a:fillRef>
-          <a:effectRef idx="2">
-            <a:schemeClr val="accent1"/>
-          </a:effectRef>
-          <a:fontRef idx="minor">
-            <a:schemeClr val="lt1"/>
-          </a:fontRef>
-        </p:style>
-        <p:txBody>
-          <a:bodyPr rtlCol="0" anchor="ctr"/>
-          <a:lstStyle/>
-          <a:p>
-            <a:pPr algn="ctr"/>
+              <a:t>A set of separate sector projects never gets cheaper.</a:t>
+            </a:r>
           </a:p>
         </p:txBody>
       </p:sp>
       <p:sp>
         <p:nvSpPr>
           <p:cNvPr id="7" name="TextBox 6"/>
-          <p:cNvSpPr txBox="1"/>
-          <p:nvPr/>
-        </p:nvSpPr>
-        <p:spPr>
-          <a:xfrm>
-            <a:off x="6464808" y="1700784"/>
-            <a:ext cx="4992624" cy="3108960"/>
-          </a:xfrm>
-          <a:prstGeom prst="rect">
-            <a:avLst/>
-          </a:prstGeom>
-          <a:noFill/>
-        </p:spPr>
-        <p:txBody>
-          <a:bodyPr wrap="square">
-            <a:spAutoFit/>
-          </a:bodyPr>
-          <a:lstStyle/>
-          <a:p>
-            <a:pPr>
-              <a:spcAft>
-                <a:spcPts val="700"/>
-              </a:spcAft>
-            </a:pPr>
-            <a:r>
-              <a:rPr sz="1900" b="1" i="0">
-                <a:solidFill>
-                  <a:srgbClr val="006E96"/>
-                </a:solidFill>
-                <a:latin typeface="Arial"/>
-              </a:rPr>
-              <a:t>NEW PER SECTOR</a:t>
-            </a:r>
-          </a:p>
-          <a:p>
-            <a:pPr>
-              <a:spcAft>
-                <a:spcPts val="700"/>
-              </a:spcAft>
-            </a:pPr>
-            <a:r>
-              <a:rPr sz="1600" b="0" i="0">
-                <a:solidFill>
-                  <a:srgbClr val="1A1A1A"/>
-                </a:solidFill>
-                <a:latin typeface="Arial"/>
-              </a:rPr>
-              <a:t>The semantic layer — its vocabularies</a:t>
-            </a:r>
-          </a:p>
-          <a:p>
-            <a:pPr>
-              <a:spcAft>
-                <a:spcPts val="700"/>
-              </a:spcAft>
-            </a:pPr>
-            <a:r>
-              <a:rPr sz="1600" b="0" i="0">
-                <a:solidFill>
-                  <a:srgbClr val="1A1A1A"/>
-                </a:solidFill>
-                <a:latin typeface="Arial"/>
-              </a:rPr>
-              <a:t>The specific exchanges and services</a:t>
-            </a:r>
-          </a:p>
-        </p:txBody>
-      </p:sp>
-      <p:sp>
-        <p:nvSpPr>
-          <p:cNvPr id="8" name="TextBox 7"/>
-          <p:cNvSpPr txBox="1"/>
-          <p:nvPr/>
-        </p:nvSpPr>
-        <p:spPr>
-          <a:xfrm>
-            <a:off x="658368" y="5120640"/>
-            <a:ext cx="10881360" cy="548640"/>
-          </a:xfrm>
-          <a:prstGeom prst="rect">
-            <a:avLst/>
-          </a:prstGeom>
-          <a:noFill/>
-        </p:spPr>
-        <p:txBody>
-          <a:bodyPr wrap="square">
-            <a:spAutoFit/>
-          </a:bodyPr>
-          <a:lstStyle/>
-          <a:p>
-            <a:r>
-              <a:rPr sz="1550" b="1" i="0">
-                <a:solidFill>
-                  <a:srgbClr val="006E96"/>
-                </a:solidFill>
-                <a:latin typeface="Arial"/>
-              </a:rPr>
-              <a:t>Whichever sector goes first pays for the platform. The next is cheaper either way.</a:t>
-            </a:r>
-          </a:p>
-        </p:txBody>
-      </p:sp>
-      <p:sp>
-        <p:nvSpPr>
-          <p:cNvPr id="9" name="TextBox 8"/>
           <p:cNvSpPr txBox="1"/>
           <p:nvPr/>
         </p:nvSpPr>
@@ -48395,7 +48091,7 @@
                 </a:solidFill>
                 <a:latin typeface="Arial"/>
               </a:rPr>
-              <a:t>A planned framework gets cheaper with every sector</a:t>
+              <a:t>The portability map is the next sector's business case</a:t>
             </a:r>
           </a:p>
         </p:txBody>
@@ -48434,7 +48130,7 @@
                 </a:solidFill>
                 <a:latin typeface="Arial"/>
               </a:rPr>
-              <a:t>The first sector pays for the bus, the governance and the legal mandate.</a:t>
+              <a:t>Here is what we reuse — most of it.</a:t>
             </a:r>
           </a:p>
           <a:p>
@@ -48450,7 +48146,7 @@
                 </a:solidFill>
                 <a:latin typeface="Arial"/>
               </a:rPr>
-              <a:t>The second reuses all of it and pays only for its own semantics and services; the third reuses more still.</a:t>
+              <a:t>Here is the small, sector-specific part we build new.</a:t>
             </a:r>
           </a:p>
         </p:txBody>
@@ -48535,7 +48231,7 @@
                 </a:solidFill>
                 <a:latin typeface="Arial"/>
               </a:rPr>
-              <a:t>A set of separate sector projects never gets cheaper.</a:t>
+              <a:t>The investment a strategist can defend for a decade.</a:t>
             </a:r>
           </a:p>
         </p:txBody>
@@ -48594,23 +48290,95 @@
       <p:grpSpPr/>
       <p:sp>
         <p:nvSpPr>
-          <p:cNvPr id="2" name="Rectangle 1"/>
+          <p:cNvPr id="2" name="TextBox 1"/>
+          <p:cNvSpPr txBox="1"/>
+          <p:nvPr/>
+        </p:nvSpPr>
+        <p:spPr>
+          <a:xfrm>
+            <a:off x="1005840" y="2103120"/>
+            <a:ext cx="10149840" cy="2377440"/>
+          </a:xfrm>
+          <a:prstGeom prst="rect">
+            <a:avLst/>
+          </a:prstGeom>
+          <a:noFill/>
+        </p:spPr>
+        <p:txBody>
+          <a:bodyPr wrap="square">
+            <a:spAutoFit/>
+          </a:bodyPr>
+          <a:lstStyle/>
+          <a:p>
+            <a:r>
+              <a:rPr sz="3000" b="1" i="0">
+                <a:solidFill>
+                  <a:srgbClr val="1A1A1A"/>
+                </a:solidFill>
+                <a:latin typeface="Arial"/>
+              </a:rPr>
+              <a:t>The framework is sector-portable — build the platform once, reuse it everywhere, and the next sector is cheaper than the last.</a:t>
+            </a:r>
+          </a:p>
+        </p:txBody>
+      </p:sp>
+      <p:sp>
+        <p:nvSpPr>
+          <p:cNvPr id="3" name="TextBox 2"/>
+          <p:cNvSpPr txBox="1"/>
+          <p:nvPr/>
+        </p:nvSpPr>
+        <p:spPr>
+          <a:xfrm>
+            <a:off x="1005840" y="1554480"/>
+            <a:ext cx="5486400" cy="365760"/>
+          </a:xfrm>
+          <a:prstGeom prst="rect">
+            <a:avLst/>
+          </a:prstGeom>
+          <a:noFill/>
+        </p:spPr>
+        <p:txBody>
+          <a:bodyPr wrap="square">
+            <a:spAutoFit/>
+          </a:bodyPr>
+          <a:lstStyle/>
+          <a:p>
+            <a:r>
+              <a:rPr sz="1200" b="1" i="0">
+                <a:solidFill>
+                  <a:srgbClr val="006E96"/>
+                </a:solidFill>
+                <a:latin typeface="Arial"/>
+              </a:rPr>
+              <a:t>IN ONE SENTENCE</a:t>
+            </a:r>
+          </a:p>
+        </p:txBody>
+      </p:sp>
+      <p:sp>
+        <p:nvSpPr>
+          <p:cNvPr id="4" name="Rounded Rectangle 3"/>
           <p:cNvSpPr/>
           <p:nvPr/>
         </p:nvSpPr>
         <p:spPr>
           <a:xfrm>
-            <a:off x="457200" y="384048"/>
-            <a:ext cx="45720" cy="256032"/>
-          </a:xfrm>
-          <a:prstGeom prst="rect">
-            <a:avLst/>
+            <a:off x="658368" y="4709160"/>
+            <a:ext cx="10881360" cy="1554480"/>
+          </a:xfrm>
+          <a:prstGeom prst="roundRect">
+            <a:avLst>
+              <a:gd name="adj" fmla="val 4500"/>
+            </a:avLst>
           </a:prstGeom>
           <a:solidFill>
-            <a:srgbClr val="009CD6"/>
+            <a:srgbClr val="FFFFFF"/>
           </a:solidFill>
-          <a:ln>
-            <a:noFill/>
+          <a:ln w="9525">
+            <a:solidFill>
+              <a:srgbClr val="009CD6"/>
+            </a:solidFill>
           </a:ln>
           <a:effectLst/>
         </p:spPr>
@@ -48629,23 +48397,63 @@
           </a:fontRef>
         </p:style>
         <p:txBody>
-          <a:bodyPr rtlCol="0" anchor="ctr"/>
-          <a:lstStyle/>
-          <a:p>
-            <a:pPr algn="ctr"/>
-          </a:p>
-        </p:txBody>
-      </p:sp>
-      <p:sp>
-        <p:nvSpPr>
-          <p:cNvPr id="3" name="TextBox 2"/>
+          <a:bodyPr rtlCol="0" anchor="ctr" wrap="square" lIns="228600" rIns="228600" tIns="109728" bIns="109728">
+            <a:noAutofit/>
+          </a:bodyPr>
+          <a:lstStyle/>
+          <a:p>
+            <a:pPr algn="l">
+              <a:spcAft>
+                <a:spcPts val="400"/>
+              </a:spcAft>
+            </a:pPr>
+            <a:r>
+              <a:rPr sz="1800" b="1" i="0">
+                <a:solidFill>
+                  <a:srgbClr val="006E96"/>
+                </a:solidFill>
+                <a:latin typeface="Arial"/>
+              </a:rPr>
+              <a:t>Do this on your own sector. </a:t>
+            </a:r>
+            <a:r>
+              <a:rPr sz="1800" b="1" i="0">
+                <a:solidFill>
+                  <a:srgbClr val="1A1A1A"/>
+                </a:solidFill>
+                <a:latin typeface="Arial"/>
+              </a:rPr>
+              <a:t>Map your framework's sector-portable vs sector-specific parts for a new sector.</a:t>
+            </a:r>
+          </a:p>
+          <a:p>
+            <a:pPr algn="l">
+              <a:spcAft>
+                <a:spcPts val="400"/>
+              </a:spcAft>
+            </a:pPr>
+            <a:r>
+              <a:rPr sz="1800" b="0" i="0">
+                <a:solidFill>
+                  <a:srgbClr val="595959"/>
+                </a:solidFill>
+                <a:latin typeface="Arial"/>
+              </a:rPr>
+              <a:t>The prompt in the companion material gives you a sector-portability map (reused / new) plus a minister-ready business case. Before the next video.</a:t>
+            </a:r>
+          </a:p>
+        </p:txBody>
+      </p:sp>
+      <p:sp>
+        <p:nvSpPr>
+          <p:cNvPr id="5" name="TextBox 4"/>
           <p:cNvSpPr txBox="1"/>
           <p:nvPr/>
         </p:nvSpPr>
         <p:spPr>
           <a:xfrm>
-            <a:off x="621792" y="274320"/>
-            <a:ext cx="11247120" cy="914400"/>
+            <a:off x="457200" y="6473952"/>
+            <a:ext cx="7772400" cy="292608"/>
           </a:xfrm>
           <a:prstGeom prst="rect">
             <a:avLst/>
@@ -48659,27 +48467,27 @@
           <a:lstStyle/>
           <a:p>
             <a:r>
-              <a:rPr sz="2800" b="1" i="0">
-                <a:solidFill>
-                  <a:srgbClr val="1A1A1A"/>
-                </a:solidFill>
-                <a:latin typeface="Arial"/>
-              </a:rPr>
-              <a:t>The portability map is the next sector's business case</a:t>
-            </a:r>
-          </a:p>
-        </p:txBody>
-      </p:sp>
-      <p:sp>
-        <p:nvSpPr>
-          <p:cNvPr id="4" name="TextBox 3"/>
+              <a:rPr sz="900" b="0" i="0">
+                <a:solidFill>
+                  <a:srgbClr val="595959"/>
+                </a:solidFill>
+                <a:latin typeface="Arial"/>
+              </a:rPr>
+              <a:t>5.10 · Carry the framework to the next sector</a:t>
+            </a:r>
+          </a:p>
+        </p:txBody>
+      </p:sp>
+      <p:sp>
+        <p:nvSpPr>
+          <p:cNvPr id="6" name="TextBox 5"/>
           <p:cNvSpPr txBox="1"/>
           <p:nvPr/>
         </p:nvSpPr>
         <p:spPr>
           <a:xfrm>
-            <a:off x="658368" y="1600200"/>
-            <a:ext cx="10881360" cy="2194560"/>
+            <a:off x="10058400" y="6473952"/>
+            <a:ext cx="1673352" cy="292608"/>
           </a:xfrm>
           <a:prstGeom prst="rect">
             <a:avLst/>
@@ -48692,146 +48500,7 @@
           </a:bodyPr>
           <a:lstStyle/>
           <a:p>
-            <a:pPr>
-              <a:spcAft>
-                <a:spcPts val="1200"/>
-              </a:spcAft>
-            </a:pPr>
-            <a:r>
-              <a:rPr sz="2000" b="0" i="0">
-                <a:solidFill>
-                  <a:srgbClr val="1A1A1A"/>
-                </a:solidFill>
-                <a:latin typeface="Arial"/>
-              </a:rPr>
-              <a:t>Here is what we reuse — most of it.</a:t>
-            </a:r>
-          </a:p>
-          <a:p>
-            <a:pPr>
-              <a:spcAft>
-                <a:spcPts val="1200"/>
-              </a:spcAft>
-            </a:pPr>
-            <a:r>
-              <a:rPr sz="2000" b="0" i="0">
-                <a:solidFill>
-                  <a:srgbClr val="1A1A1A"/>
-                </a:solidFill>
-                <a:latin typeface="Arial"/>
-              </a:rPr>
-              <a:t>Here is the small, sector-specific part we build new.</a:t>
-            </a:r>
-          </a:p>
-        </p:txBody>
-      </p:sp>
-      <p:sp>
-        <p:nvSpPr>
-          <p:cNvPr id="5" name="Rounded Rectangle 4"/>
-          <p:cNvSpPr/>
-          <p:nvPr/>
-        </p:nvSpPr>
-        <p:spPr>
-          <a:xfrm>
-            <a:off x="658368" y="3977639"/>
-            <a:ext cx="10881360" cy="1325880"/>
-          </a:xfrm>
-          <a:prstGeom prst="roundRect">
-            <a:avLst>
-              <a:gd name="adj" fmla="val 4500"/>
-            </a:avLst>
-          </a:prstGeom>
-          <a:solidFill>
-            <a:srgbClr val="E5F5FB"/>
-          </a:solidFill>
-          <a:ln>
-            <a:noFill/>
-          </a:ln>
-          <a:effectLst/>
-        </p:spPr>
-        <p:style>
-          <a:lnRef idx="1">
-            <a:schemeClr val="accent1"/>
-          </a:lnRef>
-          <a:fillRef idx="3">
-            <a:schemeClr val="accent1"/>
-          </a:fillRef>
-          <a:effectRef idx="2">
-            <a:schemeClr val="accent1"/>
-          </a:effectRef>
-          <a:fontRef idx="minor">
-            <a:schemeClr val="lt1"/>
-          </a:fontRef>
-        </p:style>
-        <p:txBody>
-          <a:bodyPr rtlCol="0" anchor="ctr"/>
-          <a:lstStyle/>
-          <a:p>
-            <a:pPr algn="ctr"/>
-          </a:p>
-        </p:txBody>
-      </p:sp>
-      <p:sp>
-        <p:nvSpPr>
-          <p:cNvPr id="6" name="TextBox 5"/>
-          <p:cNvSpPr txBox="1"/>
-          <p:nvPr/>
-        </p:nvSpPr>
-        <p:spPr>
-          <a:xfrm>
-            <a:off x="859536" y="4169663"/>
-            <a:ext cx="10479024" cy="1051560"/>
-          </a:xfrm>
-          <a:prstGeom prst="rect">
-            <a:avLst/>
-          </a:prstGeom>
-          <a:noFill/>
-        </p:spPr>
-        <p:txBody>
-          <a:bodyPr wrap="square">
-            <a:spAutoFit/>
-          </a:bodyPr>
-          <a:lstStyle/>
-          <a:p>
-            <a:pPr>
-              <a:spcAft>
-                <a:spcPts val="700"/>
-              </a:spcAft>
-            </a:pPr>
-            <a:r>
-              <a:rPr sz="2300" b="1" i="0">
-                <a:solidFill>
-                  <a:srgbClr val="006E96"/>
-                </a:solidFill>
-                <a:latin typeface="Arial"/>
-              </a:rPr>
-              <a:t>The investment a strategist can defend for a decade.</a:t>
-            </a:r>
-          </a:p>
-        </p:txBody>
-      </p:sp>
-      <p:sp>
-        <p:nvSpPr>
-          <p:cNvPr id="7" name="TextBox 6"/>
-          <p:cNvSpPr txBox="1"/>
-          <p:nvPr/>
-        </p:nvSpPr>
-        <p:spPr>
-          <a:xfrm>
-            <a:off x="457200" y="6473952"/>
-            <a:ext cx="7772400" cy="292608"/>
-          </a:xfrm>
-          <a:prstGeom prst="rect">
-            <a:avLst/>
-          </a:prstGeom>
-          <a:noFill/>
-        </p:spPr>
-        <p:txBody>
-          <a:bodyPr wrap="square">
-            <a:spAutoFit/>
-          </a:bodyPr>
-          <a:lstStyle/>
-          <a:p>
+            <a:pPr algn="r"/>
             <a:r>
               <a:rPr sz="900" b="0" i="0">
                 <a:solidFill>
@@ -48839,7 +48508,7 @@
                 </a:solidFill>
                 <a:latin typeface="Arial"/>
               </a:rPr>
-              <a:t>5.10 · Carry the framework to the next sector</a:t>
+              <a:t>www.itu.int</a:t>
             </a:r>
           </a:p>
         </p:txBody>
@@ -48864,95 +48533,23 @@
       <p:grpSpPr/>
       <p:sp>
         <p:nvSpPr>
-          <p:cNvPr id="2" name="TextBox 1"/>
-          <p:cNvSpPr txBox="1"/>
-          <p:nvPr/>
-        </p:nvSpPr>
-        <p:spPr>
-          <a:xfrm>
-            <a:off x="1005840" y="2103120"/>
-            <a:ext cx="10149840" cy="2377440"/>
-          </a:xfrm>
-          <a:prstGeom prst="rect">
-            <a:avLst/>
-          </a:prstGeom>
-          <a:noFill/>
-        </p:spPr>
-        <p:txBody>
-          <a:bodyPr wrap="square">
-            <a:spAutoFit/>
-          </a:bodyPr>
-          <a:lstStyle/>
-          <a:p>
-            <a:r>
-              <a:rPr sz="3000" b="1" i="0">
-                <a:solidFill>
-                  <a:srgbClr val="1A1A1A"/>
-                </a:solidFill>
-                <a:latin typeface="Arial"/>
-              </a:rPr>
-              <a:t>The framework is sector-portable — build the platform once, reuse it everywhere, and the next sector is cheaper than the last.</a:t>
-            </a:r>
-          </a:p>
-        </p:txBody>
-      </p:sp>
-      <p:sp>
-        <p:nvSpPr>
-          <p:cNvPr id="3" name="TextBox 2"/>
-          <p:cNvSpPr txBox="1"/>
-          <p:nvPr/>
-        </p:nvSpPr>
-        <p:spPr>
-          <a:xfrm>
-            <a:off x="1005840" y="1554480"/>
-            <a:ext cx="5486400" cy="365760"/>
-          </a:xfrm>
-          <a:prstGeom prst="rect">
-            <a:avLst/>
-          </a:prstGeom>
-          <a:noFill/>
-        </p:spPr>
-        <p:txBody>
-          <a:bodyPr wrap="square">
-            <a:spAutoFit/>
-          </a:bodyPr>
-          <a:lstStyle/>
-          <a:p>
-            <a:r>
-              <a:rPr sz="1200" b="1" i="0">
-                <a:solidFill>
-                  <a:srgbClr val="006E96"/>
-                </a:solidFill>
-                <a:latin typeface="Arial"/>
-              </a:rPr>
-              <a:t>IN ONE SENTENCE</a:t>
-            </a:r>
-          </a:p>
-        </p:txBody>
-      </p:sp>
-      <p:sp>
-        <p:nvSpPr>
-          <p:cNvPr id="4" name="Rounded Rectangle 3"/>
+          <p:cNvPr id="2" name="Rectangle 1"/>
           <p:cNvSpPr/>
           <p:nvPr/>
         </p:nvSpPr>
         <p:spPr>
           <a:xfrm>
-            <a:off x="658368" y="4709160"/>
-            <a:ext cx="10881360" cy="1554480"/>
-          </a:xfrm>
-          <a:prstGeom prst="roundRect">
-            <a:avLst>
-              <a:gd name="adj" fmla="val 4500"/>
-            </a:avLst>
+            <a:off x="457200" y="384048"/>
+            <a:ext cx="45720" cy="256032"/>
+          </a:xfrm>
+          <a:prstGeom prst="rect">
+            <a:avLst/>
           </a:prstGeom>
           <a:solidFill>
-            <a:srgbClr val="FFFFFF"/>
+            <a:srgbClr val="009CD6"/>
           </a:solidFill>
-          <a:ln w="9525">
-            <a:solidFill>
-              <a:srgbClr val="009CD6"/>
-            </a:solidFill>
+          <a:ln>
+            <a:noFill/>
           </a:ln>
           <a:effectLst/>
         </p:spPr>
@@ -48971,63 +48568,23 @@
           </a:fontRef>
         </p:style>
         <p:txBody>
-          <a:bodyPr rtlCol="0" anchor="ctr" wrap="square" lIns="228600" rIns="228600" tIns="109728" bIns="109728">
-            <a:noAutofit/>
-          </a:bodyPr>
-          <a:lstStyle/>
-          <a:p>
-            <a:pPr algn="l">
-              <a:spcAft>
-                <a:spcPts val="400"/>
-              </a:spcAft>
-            </a:pPr>
-            <a:r>
-              <a:rPr sz="1800" b="1" i="0">
-                <a:solidFill>
-                  <a:srgbClr val="006E96"/>
-                </a:solidFill>
-                <a:latin typeface="Arial"/>
-              </a:rPr>
-              <a:t>Do this on your own sector. </a:t>
-            </a:r>
-            <a:r>
-              <a:rPr sz="1800" b="1" i="0">
-                <a:solidFill>
-                  <a:srgbClr val="1A1A1A"/>
-                </a:solidFill>
-                <a:latin typeface="Arial"/>
-              </a:rPr>
-              <a:t>Map your framework's sector-portable vs sector-specific parts for a new sector.</a:t>
-            </a:r>
-          </a:p>
-          <a:p>
-            <a:pPr algn="l">
-              <a:spcAft>
-                <a:spcPts val="400"/>
-              </a:spcAft>
-            </a:pPr>
-            <a:r>
-              <a:rPr sz="1800" b="0" i="0">
-                <a:solidFill>
-                  <a:srgbClr val="595959"/>
-                </a:solidFill>
-                <a:latin typeface="Arial"/>
-              </a:rPr>
-              <a:t>The prompt in the companion material gives you a sector-portability map (reused / new) plus a minister-ready business case. Before the next video.</a:t>
-            </a:r>
-          </a:p>
-        </p:txBody>
-      </p:sp>
-      <p:sp>
-        <p:nvSpPr>
-          <p:cNvPr id="5" name="TextBox 4"/>
+          <a:bodyPr rtlCol="0" anchor="ctr"/>
+          <a:lstStyle/>
+          <a:p>
+            <a:pPr algn="ctr"/>
+          </a:p>
+        </p:txBody>
+      </p:sp>
+      <p:sp>
+        <p:nvSpPr>
+          <p:cNvPr id="3" name="TextBox 2"/>
           <p:cNvSpPr txBox="1"/>
           <p:nvPr/>
         </p:nvSpPr>
         <p:spPr>
           <a:xfrm>
-            <a:off x="457200" y="6473952"/>
-            <a:ext cx="7772400" cy="292608"/>
+            <a:off x="621792" y="274320"/>
+            <a:ext cx="11247120" cy="914400"/>
           </a:xfrm>
           <a:prstGeom prst="rect">
             <a:avLst/>
@@ -49041,27 +48598,27 @@
           <a:lstStyle/>
           <a:p>
             <a:r>
-              <a:rPr sz="900" b="0" i="0">
-                <a:solidFill>
-                  <a:srgbClr val="595959"/>
-                </a:solidFill>
-                <a:latin typeface="Arial"/>
-              </a:rPr>
-              <a:t>5.10 · Carry the framework to the next sector</a:t>
-            </a:r>
-          </a:p>
-        </p:txBody>
-      </p:sp>
-      <p:sp>
-        <p:nvSpPr>
-          <p:cNvPr id="6" name="TextBox 5"/>
+              <a:rPr sz="2800" b="1" i="0">
+                <a:solidFill>
+                  <a:srgbClr val="1A1A1A"/>
+                </a:solidFill>
+                <a:latin typeface="Arial"/>
+              </a:rPr>
+              <a:t>Sources</a:t>
+            </a:r>
+          </a:p>
+        </p:txBody>
+      </p:sp>
+      <p:sp>
+        <p:nvSpPr>
+          <p:cNvPr id="4" name="TextBox 3"/>
           <p:cNvSpPr txBox="1"/>
           <p:nvPr/>
         </p:nvSpPr>
         <p:spPr>
           <a:xfrm>
-            <a:off x="10058400" y="6473952"/>
-            <a:ext cx="1673352" cy="292608"/>
+            <a:off x="658368" y="1554480"/>
+            <a:ext cx="10789920" cy="3840480"/>
           </a:xfrm>
           <a:prstGeom prst="rect">
             <a:avLst/>
@@ -49074,7 +48631,111 @@
           </a:bodyPr>
           <a:lstStyle/>
           <a:p>
-            <a:pPr algn="r"/>
+            <a:pPr>
+              <a:spcAft>
+                <a:spcPts val="1200"/>
+              </a:spcAft>
+            </a:pPr>
+            <a:r>
+              <a:rPr sz="1700" b="0" i="0">
+                <a:solidFill>
+                  <a:srgbClr val="1A1A1A"/>
+                </a:solidFill>
+                <a:latin typeface="Arial"/>
+              </a:rPr>
+              <a:t>•  Terms of Reference §4.4 — sector portability</a:t>
+            </a:r>
+          </a:p>
+          <a:p>
+            <a:pPr>
+              <a:spcAft>
+                <a:spcPts val="1200"/>
+              </a:spcAft>
+            </a:pPr>
+            <a:r>
+              <a:rPr sz="1700" b="0" i="0">
+                <a:solidFill>
+                  <a:srgbClr val="1A1A1A"/>
+                </a:solidFill>
+                <a:latin typeface="Arial"/>
+              </a:rPr>
+              <a:t>•  EU European Interoperability Framework — the four-layer model</a:t>
+            </a:r>
+          </a:p>
+          <a:p>
+            <a:pPr>
+              <a:spcAft>
+                <a:spcPts val="1200"/>
+              </a:spcAft>
+            </a:pPr>
+            <a:r>
+              <a:rPr sz="1700" b="0" i="0">
+                <a:solidFill>
+                  <a:srgbClr val="1A1A1A"/>
+                </a:solidFill>
+                <a:latin typeface="Arial"/>
+              </a:rPr>
+              <a:t>•  PAERA v1.0 — §3.4.3 (Interoperability framing)</a:t>
+            </a:r>
+          </a:p>
+        </p:txBody>
+      </p:sp>
+      <p:sp>
+        <p:nvSpPr>
+          <p:cNvPr id="5" name="TextBox 4"/>
+          <p:cNvSpPr txBox="1"/>
+          <p:nvPr/>
+        </p:nvSpPr>
+        <p:spPr>
+          <a:xfrm>
+            <a:off x="658368" y="5806440"/>
+            <a:ext cx="10789920" cy="457200"/>
+          </a:xfrm>
+          <a:prstGeom prst="rect">
+            <a:avLst/>
+          </a:prstGeom>
+          <a:noFill/>
+        </p:spPr>
+        <p:txBody>
+          <a:bodyPr wrap="square">
+            <a:spAutoFit/>
+          </a:bodyPr>
+          <a:lstStyle/>
+          <a:p>
+            <a:r>
+              <a:rPr sz="1400" b="1" i="0">
+                <a:solidFill>
+                  <a:srgbClr val="006E96"/>
+                </a:solidFill>
+                <a:latin typeface="Arial"/>
+              </a:rPr>
+              <a:t>Find the link in the description.</a:t>
+            </a:r>
+          </a:p>
+        </p:txBody>
+      </p:sp>
+      <p:sp>
+        <p:nvSpPr>
+          <p:cNvPr id="6" name="TextBox 5"/>
+          <p:cNvSpPr txBox="1"/>
+          <p:nvPr/>
+        </p:nvSpPr>
+        <p:spPr>
+          <a:xfrm>
+            <a:off x="457200" y="6473952"/>
+            <a:ext cx="7772400" cy="292608"/>
+          </a:xfrm>
+          <a:prstGeom prst="rect">
+            <a:avLst/>
+          </a:prstGeom>
+          <a:noFill/>
+        </p:spPr>
+        <p:txBody>
+          <a:bodyPr wrap="square">
+            <a:spAutoFit/>
+          </a:bodyPr>
+          <a:lstStyle/>
+          <a:p>
             <a:r>
               <a:rPr sz="900" b="0" i="0">
                 <a:solidFill>
@@ -49082,7 +48743,7 @@
                 </a:solidFill>
                 <a:latin typeface="Arial"/>
               </a:rPr>
-              <a:t>www.itu.int</a:t>
+              <a:t>5.10 · Carry the framework to the next sector</a:t>
             </a:r>
           </a:p>
         </p:txBody>
@@ -49096,241 +48757,6 @@
 </file>
 
 <file path=ppt/slides/slide88.xml><?xml version="1.0" encoding="utf-8"?>
-<p:sld xmlns:a="http://schemas.openxmlformats.org/drawingml/2006/main" xmlns:p="http://schemas.openxmlformats.org/presentationml/2006/main" xmlns:r="http://schemas.openxmlformats.org/officeDocument/2006/relationships">
-  <p:cSld>
-    <p:spTree>
-      <p:nvGrpSpPr>
-        <p:cNvPr id="1" name=""/>
-        <p:cNvGrpSpPr/>
-        <p:nvPr/>
-      </p:nvGrpSpPr>
-      <p:grpSpPr/>
-      <p:sp>
-        <p:nvSpPr>
-          <p:cNvPr id="2" name="Rectangle 1"/>
-          <p:cNvSpPr/>
-          <p:nvPr/>
-        </p:nvSpPr>
-        <p:spPr>
-          <a:xfrm>
-            <a:off x="457200" y="384048"/>
-            <a:ext cx="45720" cy="256032"/>
-          </a:xfrm>
-          <a:prstGeom prst="rect">
-            <a:avLst/>
-          </a:prstGeom>
-          <a:solidFill>
-            <a:srgbClr val="009CD6"/>
-          </a:solidFill>
-          <a:ln>
-            <a:noFill/>
-          </a:ln>
-          <a:effectLst/>
-        </p:spPr>
-        <p:style>
-          <a:lnRef idx="1">
-            <a:schemeClr val="accent1"/>
-          </a:lnRef>
-          <a:fillRef idx="3">
-            <a:schemeClr val="accent1"/>
-          </a:fillRef>
-          <a:effectRef idx="2">
-            <a:schemeClr val="accent1"/>
-          </a:effectRef>
-          <a:fontRef idx="minor">
-            <a:schemeClr val="lt1"/>
-          </a:fontRef>
-        </p:style>
-        <p:txBody>
-          <a:bodyPr rtlCol="0" anchor="ctr"/>
-          <a:lstStyle/>
-          <a:p>
-            <a:pPr algn="ctr"/>
-          </a:p>
-        </p:txBody>
-      </p:sp>
-      <p:sp>
-        <p:nvSpPr>
-          <p:cNvPr id="3" name="TextBox 2"/>
-          <p:cNvSpPr txBox="1"/>
-          <p:nvPr/>
-        </p:nvSpPr>
-        <p:spPr>
-          <a:xfrm>
-            <a:off x="621792" y="274320"/>
-            <a:ext cx="11247120" cy="914400"/>
-          </a:xfrm>
-          <a:prstGeom prst="rect">
-            <a:avLst/>
-          </a:prstGeom>
-          <a:noFill/>
-        </p:spPr>
-        <p:txBody>
-          <a:bodyPr wrap="square">
-            <a:spAutoFit/>
-          </a:bodyPr>
-          <a:lstStyle/>
-          <a:p>
-            <a:r>
-              <a:rPr sz="2800" b="1" i="0">
-                <a:solidFill>
-                  <a:srgbClr val="1A1A1A"/>
-                </a:solidFill>
-                <a:latin typeface="Arial"/>
-              </a:rPr>
-              <a:t>Sources</a:t>
-            </a:r>
-          </a:p>
-        </p:txBody>
-      </p:sp>
-      <p:sp>
-        <p:nvSpPr>
-          <p:cNvPr id="4" name="TextBox 3"/>
-          <p:cNvSpPr txBox="1"/>
-          <p:nvPr/>
-        </p:nvSpPr>
-        <p:spPr>
-          <a:xfrm>
-            <a:off x="658368" y="1554480"/>
-            <a:ext cx="10789920" cy="3840480"/>
-          </a:xfrm>
-          <a:prstGeom prst="rect">
-            <a:avLst/>
-          </a:prstGeom>
-          <a:noFill/>
-        </p:spPr>
-        <p:txBody>
-          <a:bodyPr wrap="square">
-            <a:spAutoFit/>
-          </a:bodyPr>
-          <a:lstStyle/>
-          <a:p>
-            <a:pPr>
-              <a:spcAft>
-                <a:spcPts val="1200"/>
-              </a:spcAft>
-            </a:pPr>
-            <a:r>
-              <a:rPr sz="1700" b="0" i="0">
-                <a:solidFill>
-                  <a:srgbClr val="1A1A1A"/>
-                </a:solidFill>
-                <a:latin typeface="Arial"/>
-              </a:rPr>
-              <a:t>•  Terms of Reference §4.4 — sector portability</a:t>
-            </a:r>
-          </a:p>
-          <a:p>
-            <a:pPr>
-              <a:spcAft>
-                <a:spcPts val="1200"/>
-              </a:spcAft>
-            </a:pPr>
-            <a:r>
-              <a:rPr sz="1700" b="0" i="0">
-                <a:solidFill>
-                  <a:srgbClr val="1A1A1A"/>
-                </a:solidFill>
-                <a:latin typeface="Arial"/>
-              </a:rPr>
-              <a:t>•  EU European Interoperability Framework — the four-layer model</a:t>
-            </a:r>
-          </a:p>
-          <a:p>
-            <a:pPr>
-              <a:spcAft>
-                <a:spcPts val="1200"/>
-              </a:spcAft>
-            </a:pPr>
-            <a:r>
-              <a:rPr sz="1700" b="0" i="0">
-                <a:solidFill>
-                  <a:srgbClr val="1A1A1A"/>
-                </a:solidFill>
-                <a:latin typeface="Arial"/>
-              </a:rPr>
-              <a:t>•  PAERA v1.0 — §3.4.3 (Interoperability framing)</a:t>
-            </a:r>
-          </a:p>
-        </p:txBody>
-      </p:sp>
-      <p:sp>
-        <p:nvSpPr>
-          <p:cNvPr id="5" name="TextBox 4"/>
-          <p:cNvSpPr txBox="1"/>
-          <p:nvPr/>
-        </p:nvSpPr>
-        <p:spPr>
-          <a:xfrm>
-            <a:off x="658368" y="5806440"/>
-            <a:ext cx="10789920" cy="457200"/>
-          </a:xfrm>
-          <a:prstGeom prst="rect">
-            <a:avLst/>
-          </a:prstGeom>
-          <a:noFill/>
-        </p:spPr>
-        <p:txBody>
-          <a:bodyPr wrap="square">
-            <a:spAutoFit/>
-          </a:bodyPr>
-          <a:lstStyle/>
-          <a:p>
-            <a:r>
-              <a:rPr sz="1400" b="1" i="0">
-                <a:solidFill>
-                  <a:srgbClr val="006E96"/>
-                </a:solidFill>
-                <a:latin typeface="Arial"/>
-              </a:rPr>
-              <a:t>Find the link in the description.</a:t>
-            </a:r>
-          </a:p>
-        </p:txBody>
-      </p:sp>
-      <p:sp>
-        <p:nvSpPr>
-          <p:cNvPr id="6" name="TextBox 5"/>
-          <p:cNvSpPr txBox="1"/>
-          <p:nvPr/>
-        </p:nvSpPr>
-        <p:spPr>
-          <a:xfrm>
-            <a:off x="457200" y="6473952"/>
-            <a:ext cx="7772400" cy="292608"/>
-          </a:xfrm>
-          <a:prstGeom prst="rect">
-            <a:avLst/>
-          </a:prstGeom>
-          <a:noFill/>
-        </p:spPr>
-        <p:txBody>
-          <a:bodyPr wrap="square">
-            <a:spAutoFit/>
-          </a:bodyPr>
-          <a:lstStyle/>
-          <a:p>
-            <a:r>
-              <a:rPr sz="900" b="0" i="0">
-                <a:solidFill>
-                  <a:srgbClr val="595959"/>
-                </a:solidFill>
-                <a:latin typeface="Arial"/>
-              </a:rPr>
-              <a:t>5.10 · Carry the framework to the next sector</a:t>
-            </a:r>
-          </a:p>
-        </p:txBody>
-      </p:sp>
-    </p:spTree>
-  </p:cSld>
-  <p:clrMapOvr>
-    <a:masterClrMapping/>
-  </p:clrMapOvr>
-</p:sld>
-</file>
-
-<file path=ppt/slides/slide89.xml><?xml version="1.0" encoding="utf-8"?>
 <p:sld xmlns:a="http://schemas.openxmlformats.org/drawingml/2006/main" xmlns:p="http://schemas.openxmlformats.org/presentationml/2006/main" xmlns:r="http://schemas.openxmlformats.org/officeDocument/2006/relationships">
   <p:cSld>
     <p:spTree>
